--- a/slides/1_systems.pptx
+++ b/slides/1_systems.pptx
@@ -5,7 +5,7 @@
     <p:sldMasterId id="2147483648" r:id="rId1"/>
   </p:sldMasterIdLst>
   <p:notesMasterIdLst>
-    <p:notesMasterId r:id="rId35"/>
+    <p:notesMasterId r:id="rId36"/>
   </p:notesMasterIdLst>
   <p:sldIdLst>
     <p:sldId id="256" r:id="rId2"/>
@@ -17,30 +17,31 @@
     <p:sldId id="269" r:id="rId8"/>
     <p:sldId id="270" r:id="rId9"/>
     <p:sldId id="268" r:id="rId10"/>
-    <p:sldId id="272" r:id="rId11"/>
-    <p:sldId id="273" r:id="rId12"/>
-    <p:sldId id="309" r:id="rId13"/>
-    <p:sldId id="274" r:id="rId14"/>
-    <p:sldId id="317" r:id="rId15"/>
-    <p:sldId id="311" r:id="rId16"/>
-    <p:sldId id="313" r:id="rId17"/>
-    <p:sldId id="310" r:id="rId18"/>
-    <p:sldId id="281" r:id="rId19"/>
-    <p:sldId id="306" r:id="rId20"/>
-    <p:sldId id="307" r:id="rId21"/>
-    <p:sldId id="308" r:id="rId22"/>
-    <p:sldId id="275" r:id="rId23"/>
-    <p:sldId id="312" r:id="rId24"/>
-    <p:sldId id="314" r:id="rId25"/>
-    <p:sldId id="315" r:id="rId26"/>
-    <p:sldId id="282" r:id="rId27"/>
-    <p:sldId id="318" r:id="rId28"/>
-    <p:sldId id="283" r:id="rId29"/>
-    <p:sldId id="271" r:id="rId30"/>
-    <p:sldId id="276" r:id="rId31"/>
-    <p:sldId id="316" r:id="rId32"/>
-    <p:sldId id="280" r:id="rId33"/>
-    <p:sldId id="277" r:id="rId34"/>
+    <p:sldId id="319" r:id="rId11"/>
+    <p:sldId id="272" r:id="rId12"/>
+    <p:sldId id="273" r:id="rId13"/>
+    <p:sldId id="309" r:id="rId14"/>
+    <p:sldId id="274" r:id="rId15"/>
+    <p:sldId id="317" r:id="rId16"/>
+    <p:sldId id="311" r:id="rId17"/>
+    <p:sldId id="313" r:id="rId18"/>
+    <p:sldId id="310" r:id="rId19"/>
+    <p:sldId id="281" r:id="rId20"/>
+    <p:sldId id="306" r:id="rId21"/>
+    <p:sldId id="307" r:id="rId22"/>
+    <p:sldId id="308" r:id="rId23"/>
+    <p:sldId id="320" r:id="rId24"/>
+    <p:sldId id="321" r:id="rId25"/>
+    <p:sldId id="322" r:id="rId26"/>
+    <p:sldId id="323" r:id="rId27"/>
+    <p:sldId id="282" r:id="rId28"/>
+    <p:sldId id="318" r:id="rId29"/>
+    <p:sldId id="283" r:id="rId30"/>
+    <p:sldId id="271" r:id="rId31"/>
+    <p:sldId id="276" r:id="rId32"/>
+    <p:sldId id="316" r:id="rId33"/>
+    <p:sldId id="280" r:id="rId34"/>
+    <p:sldId id="277" r:id="rId35"/>
   </p:sldIdLst>
   <p:sldSz cx="12192000" cy="6858000"/>
   <p:notesSz cx="6858000" cy="9144000"/>
@@ -240,7 +241,7 @@
           <a:p>
             <a:fld id="{506E0FD1-891F-4B1E-916D-E9B585160BB8}" type="datetimeFigureOut">
               <a:rPr lang="en-GB" smtClean="0"/>
-              <a:t>16/02/2026</a:t>
+              <a:t>12/03/2026</a:t>
             </a:fld>
             <a:endParaRPr lang="en-GB"/>
           </a:p>
@@ -657,7 +658,7 @@
           <a:p>
             <a:fld id="{D68C3F22-27B2-44E3-9C5F-D08126455F6F}" type="datetime1">
               <a:rPr lang="en-GB" smtClean="0"/>
-              <a:t>16/02/2026</a:t>
+              <a:t>12/03/2026</a:t>
             </a:fld>
             <a:endParaRPr lang="en-GB"/>
           </a:p>
@@ -857,7 +858,7 @@
           <a:p>
             <a:fld id="{1CD03846-7BF6-4FB6-A921-FF3379ADBD4C}" type="datetime1">
               <a:rPr lang="en-GB" smtClean="0"/>
-              <a:t>16/02/2026</a:t>
+              <a:t>12/03/2026</a:t>
             </a:fld>
             <a:endParaRPr lang="en-GB"/>
           </a:p>
@@ -1067,7 +1068,7 @@
           <a:p>
             <a:fld id="{99E1B91A-3FD0-4144-9C84-63E9688ED2FE}" type="datetime1">
               <a:rPr lang="en-GB" smtClean="0"/>
-              <a:t>16/02/2026</a:t>
+              <a:t>12/03/2026</a:t>
             </a:fld>
             <a:endParaRPr lang="en-GB"/>
           </a:p>
@@ -1267,7 +1268,7 @@
           <a:p>
             <a:fld id="{5295ED7B-FEAD-4734-819F-93EF4B0EA908}" type="datetime1">
               <a:rPr lang="en-GB" smtClean="0"/>
-              <a:t>16/02/2026</a:t>
+              <a:t>12/03/2026</a:t>
             </a:fld>
             <a:endParaRPr lang="en-GB"/>
           </a:p>
@@ -1543,7 +1544,7 @@
           <a:p>
             <a:fld id="{D2D5D4B4-C926-4B45-8815-1ED8911179A2}" type="datetime1">
               <a:rPr lang="en-GB" smtClean="0"/>
-              <a:t>16/02/2026</a:t>
+              <a:t>12/03/2026</a:t>
             </a:fld>
             <a:endParaRPr lang="en-GB"/>
           </a:p>
@@ -1811,7 +1812,7 @@
           <a:p>
             <a:fld id="{B4C5210A-0E37-4935-93AF-69F21A5F712F}" type="datetime1">
               <a:rPr lang="en-GB" smtClean="0"/>
-              <a:t>16/02/2026</a:t>
+              <a:t>12/03/2026</a:t>
             </a:fld>
             <a:endParaRPr lang="en-GB"/>
           </a:p>
@@ -2226,7 +2227,7 @@
           <a:p>
             <a:fld id="{3D3A6B2F-436C-4691-80E8-9C890E000E9D}" type="datetime1">
               <a:rPr lang="en-GB" smtClean="0"/>
-              <a:t>16/02/2026</a:t>
+              <a:t>12/03/2026</a:t>
             </a:fld>
             <a:endParaRPr lang="en-GB"/>
           </a:p>
@@ -2368,7 +2369,7 @@
           <a:p>
             <a:fld id="{84385F4C-D74B-496F-8D21-97E3549C783B}" type="datetime1">
               <a:rPr lang="en-GB" smtClean="0"/>
-              <a:t>16/02/2026</a:t>
+              <a:t>12/03/2026</a:t>
             </a:fld>
             <a:endParaRPr lang="en-GB"/>
           </a:p>
@@ -2481,7 +2482,7 @@
           <a:p>
             <a:fld id="{0CBDCB32-C241-4703-A832-4EB47BD54E83}" type="datetime1">
               <a:rPr lang="en-GB" smtClean="0"/>
-              <a:t>16/02/2026</a:t>
+              <a:t>12/03/2026</a:t>
             </a:fld>
             <a:endParaRPr lang="en-GB"/>
           </a:p>
@@ -2794,7 +2795,7 @@
           <a:p>
             <a:fld id="{85C150FF-BE95-4D25-A16A-E368A81CBF24}" type="datetime1">
               <a:rPr lang="en-GB" smtClean="0"/>
-              <a:t>16/02/2026</a:t>
+              <a:t>12/03/2026</a:t>
             </a:fld>
             <a:endParaRPr lang="en-GB"/>
           </a:p>
@@ -3083,7 +3084,7 @@
           <a:p>
             <a:fld id="{F3C5DB4B-B349-43C9-A424-BADA723AD9F1}" type="datetime1">
               <a:rPr lang="en-GB" smtClean="0"/>
-              <a:t>16/02/2026</a:t>
+              <a:t>12/03/2026</a:t>
             </a:fld>
             <a:endParaRPr lang="en-GB"/>
           </a:p>
@@ -3326,7 +3327,7 @@
           <a:p>
             <a:fld id="{12632426-0A0C-405F-A3D0-2D11AA44702A}" type="datetime1">
               <a:rPr lang="en-GB" smtClean="0"/>
-              <a:t>16/02/2026</a:t>
+              <a:t>12/03/2026</a:t>
             </a:fld>
             <a:endParaRPr lang="en-GB"/>
           </a:p>
@@ -3837,6 +3838,1443 @@
           <p:cNvPr id="2" name="Titel 1">
             <a:extLst>
               <a:ext uri="{FF2B5EF4-FFF2-40B4-BE49-F238E27FC236}">
+                <a16:creationId xmlns:a16="http://schemas.microsoft.com/office/drawing/2014/main" id="{4F504ED3-385E-7B00-0162-09F64BE83CAB}"/>
+              </a:ext>
+            </a:extLst>
+          </p:cNvPr>
+          <p:cNvSpPr>
+            <a:spLocks noGrp="1"/>
+          </p:cNvSpPr>
+          <p:nvPr>
+            <p:ph type="title"/>
+          </p:nvPr>
+        </p:nvSpPr>
+        <p:spPr/>
+        <p:txBody>
+          <a:bodyPr/>
+          <a:lstStyle/>
+          <a:p>
+            <a:r>
+              <a:rPr lang="de-DE"/>
+              <a:t>White-, Gray-, and Black-Box Models</a:t>
+            </a:r>
+            <a:endParaRPr lang="de-DE" dirty="0"/>
+          </a:p>
+        </p:txBody>
+      </p:sp>
+      <p:sp>
+        <p:nvSpPr>
+          <p:cNvPr id="4" name="Foliennummernplatzhalter 3">
+            <a:extLst>
+              <a:ext uri="{FF2B5EF4-FFF2-40B4-BE49-F238E27FC236}">
+                <a16:creationId xmlns:a16="http://schemas.microsoft.com/office/drawing/2014/main" id="{59C2A8E6-7F9C-01B9-B5A6-AC86A5042F60}"/>
+              </a:ext>
+            </a:extLst>
+          </p:cNvPr>
+          <p:cNvSpPr>
+            <a:spLocks noGrp="1"/>
+          </p:cNvSpPr>
+          <p:nvPr>
+            <p:ph type="sldNum" sz="quarter" idx="12"/>
+          </p:nvPr>
+        </p:nvSpPr>
+        <p:spPr/>
+        <p:txBody>
+          <a:bodyPr/>
+          <a:lstStyle/>
+          <a:p>
+            <a:fld id="{08C366F5-AFAD-49CB-854A-9D9E238FCA13}" type="slidenum">
+              <a:rPr lang="en-GB" smtClean="0"/>
+              <a:t>10</a:t>
+            </a:fld>
+            <a:endParaRPr lang="en-GB"/>
+          </a:p>
+        </p:txBody>
+      </p:sp>
+      <p:graphicFrame>
+        <p:nvGraphicFramePr>
+          <p:cNvPr id="6" name="Tabelle 5">
+            <a:extLst>
+              <a:ext uri="{FF2B5EF4-FFF2-40B4-BE49-F238E27FC236}">
+                <a16:creationId xmlns:a16="http://schemas.microsoft.com/office/drawing/2014/main" id="{7888DE93-C4B7-39EF-D411-679A43E7986D}"/>
+              </a:ext>
+            </a:extLst>
+          </p:cNvPr>
+          <p:cNvGraphicFramePr>
+            <a:graphicFrameLocks noGrp="1"/>
+          </p:cNvGraphicFramePr>
+          <p:nvPr>
+            <p:extLst>
+              <p:ext uri="{D42A27DB-BD31-4B8C-83A1-F6EECF244321}">
+                <p14:modId xmlns:p14="http://schemas.microsoft.com/office/powerpoint/2010/main" val="300007603"/>
+              </p:ext>
+            </p:extLst>
+          </p:nvPr>
+        </p:nvGraphicFramePr>
+        <p:xfrm>
+          <a:off x="1843093" y="1644044"/>
+          <a:ext cx="8505813" cy="4940400"/>
+        </p:xfrm>
+        <a:graphic>
+          <a:graphicData uri="http://schemas.openxmlformats.org/drawingml/2006/table">
+            <a:tbl>
+              <a:tblPr>
+                <a:solidFill>
+                  <a:schemeClr val="bg1"/>
+                </a:solidFill>
+              </a:tblPr>
+              <a:tblGrid>
+                <a:gridCol w="2420449">
+                  <a:extLst>
+                    <a:ext uri="{9D8B030D-6E8A-4147-A177-3AD203B41FA5}">
+                      <a16:colId xmlns:a16="http://schemas.microsoft.com/office/drawing/2014/main" val="1055275469"/>
+                    </a:ext>
+                  </a:extLst>
+                </a:gridCol>
+                <a:gridCol w="2023123">
+                  <a:extLst>
+                    <a:ext uri="{9D8B030D-6E8A-4147-A177-3AD203B41FA5}">
+                      <a16:colId xmlns:a16="http://schemas.microsoft.com/office/drawing/2014/main" val="2433305726"/>
+                    </a:ext>
+                  </a:extLst>
+                </a:gridCol>
+                <a:gridCol w="1807123">
+                  <a:extLst>
+                    <a:ext uri="{9D8B030D-6E8A-4147-A177-3AD203B41FA5}">
+                      <a16:colId xmlns:a16="http://schemas.microsoft.com/office/drawing/2014/main" val="3149600892"/>
+                    </a:ext>
+                  </a:extLst>
+                </a:gridCol>
+                <a:gridCol w="2255118">
+                  <a:extLst>
+                    <a:ext uri="{9D8B030D-6E8A-4147-A177-3AD203B41FA5}">
+                      <a16:colId xmlns:a16="http://schemas.microsoft.com/office/drawing/2014/main" val="507545762"/>
+                    </a:ext>
+                  </a:extLst>
+                </a:gridCol>
+              </a:tblGrid>
+              <a:tr h="824400">
+                <a:tc>
+                  <a:txBody>
+                    <a:bodyPr/>
+                    <a:lstStyle/>
+                    <a:p>
+                      <a:pPr>
+                        <a:buNone/>
+                      </a:pPr>
+                      <a:endParaRPr lang="de-DE" sz="2000" cap="none" spc="0" dirty="0">
+                        <a:solidFill>
+                          <a:schemeClr val="tx1"/>
+                        </a:solidFill>
+                      </a:endParaRPr>
+                    </a:p>
+                  </a:txBody>
+                  <a:tcPr marL="129960" marR="99969" marT="99969" marB="99969" anchor="ctr">
+                    <a:lnL w="19050" cap="flat" cmpd="sng" algn="ctr">
+                      <a:solidFill>
+                        <a:schemeClr val="tx1"/>
+                      </a:solidFill>
+                      <a:prstDash val="solid"/>
+                    </a:lnL>
+                    <a:lnR w="19050" cap="flat" cmpd="sng" algn="ctr">
+                      <a:solidFill>
+                        <a:schemeClr val="tx1"/>
+                      </a:solidFill>
+                      <a:prstDash val="solid"/>
+                    </a:lnR>
+                    <a:lnT w="19050" cap="flat" cmpd="sng" algn="ctr">
+                      <a:solidFill>
+                        <a:schemeClr val="tx1"/>
+                      </a:solidFill>
+                      <a:prstDash val="solid"/>
+                    </a:lnT>
+                    <a:lnB w="6350" cap="flat" cmpd="sng" algn="ctr">
+                      <a:solidFill>
+                        <a:schemeClr val="tx1">
+                          <a:lumMod val="50000"/>
+                          <a:lumOff val="50000"/>
+                        </a:schemeClr>
+                      </a:solidFill>
+                      <a:prstDash val="solid"/>
+                    </a:lnB>
+                    <a:noFill/>
+                  </a:tcPr>
+                </a:tc>
+                <a:tc>
+                  <a:txBody>
+                    <a:bodyPr/>
+                    <a:lstStyle/>
+                    <a:p>
+                      <a:pPr>
+                        <a:buNone/>
+                      </a:pPr>
+                      <a:r>
+                        <a:rPr lang="de-DE" sz="2000" b="1" cap="none" spc="0" dirty="0">
+                          <a:solidFill>
+                            <a:schemeClr val="tx1"/>
+                          </a:solidFill>
+                        </a:rPr>
+                        <a:t>White-Box</a:t>
+                      </a:r>
+                      <a:endParaRPr lang="de-DE" sz="2000" cap="none" spc="0" dirty="0">
+                        <a:solidFill>
+                          <a:schemeClr val="tx1"/>
+                        </a:solidFill>
+                      </a:endParaRPr>
+                    </a:p>
+                  </a:txBody>
+                  <a:tcPr marL="129960" marR="99969" marT="99969" marB="99969" anchor="ctr">
+                    <a:lnL w="19050" cap="flat" cmpd="sng" algn="ctr">
+                      <a:solidFill>
+                        <a:schemeClr val="tx1"/>
+                      </a:solidFill>
+                      <a:prstDash val="solid"/>
+                    </a:lnL>
+                    <a:lnR w="19050" cap="flat" cmpd="sng" algn="ctr">
+                      <a:solidFill>
+                        <a:schemeClr val="tx1"/>
+                      </a:solidFill>
+                      <a:prstDash val="solid"/>
+                    </a:lnR>
+                    <a:lnT w="19050" cap="flat" cmpd="sng" algn="ctr">
+                      <a:solidFill>
+                        <a:schemeClr val="tx1"/>
+                      </a:solidFill>
+                      <a:prstDash val="solid"/>
+                    </a:lnT>
+                    <a:lnB w="6350" cap="flat" cmpd="sng" algn="ctr">
+                      <a:solidFill>
+                        <a:schemeClr val="tx1">
+                          <a:lumMod val="50000"/>
+                          <a:lumOff val="50000"/>
+                        </a:schemeClr>
+                      </a:solidFill>
+                      <a:prstDash val="solid"/>
+                    </a:lnB>
+                    <a:noFill/>
+                  </a:tcPr>
+                </a:tc>
+                <a:tc>
+                  <a:txBody>
+                    <a:bodyPr/>
+                    <a:lstStyle/>
+                    <a:p>
+                      <a:pPr>
+                        <a:buNone/>
+                      </a:pPr>
+                      <a:r>
+                        <a:rPr lang="de-DE" sz="2000" b="1" cap="none" spc="0">
+                          <a:solidFill>
+                            <a:schemeClr val="tx1"/>
+                          </a:solidFill>
+                        </a:rPr>
+                        <a:t>Gray-Box</a:t>
+                      </a:r>
+                      <a:endParaRPr lang="de-DE" sz="2000" cap="none" spc="0">
+                        <a:solidFill>
+                          <a:schemeClr val="tx1"/>
+                        </a:solidFill>
+                      </a:endParaRPr>
+                    </a:p>
+                  </a:txBody>
+                  <a:tcPr marL="129960" marR="99969" marT="99969" marB="99969" anchor="ctr">
+                    <a:lnL w="19050" cap="flat" cmpd="sng" algn="ctr">
+                      <a:solidFill>
+                        <a:schemeClr val="tx1"/>
+                      </a:solidFill>
+                      <a:prstDash val="solid"/>
+                    </a:lnL>
+                    <a:lnR w="19050" cap="flat" cmpd="sng" algn="ctr">
+                      <a:solidFill>
+                        <a:schemeClr val="tx1"/>
+                      </a:solidFill>
+                      <a:prstDash val="solid"/>
+                    </a:lnR>
+                    <a:lnT w="19050" cap="flat" cmpd="sng" algn="ctr">
+                      <a:solidFill>
+                        <a:schemeClr val="tx1"/>
+                      </a:solidFill>
+                      <a:prstDash val="solid"/>
+                    </a:lnT>
+                    <a:lnB w="6350" cap="flat" cmpd="sng" algn="ctr">
+                      <a:solidFill>
+                        <a:schemeClr val="tx1">
+                          <a:lumMod val="50000"/>
+                          <a:lumOff val="50000"/>
+                        </a:schemeClr>
+                      </a:solidFill>
+                      <a:prstDash val="solid"/>
+                    </a:lnB>
+                    <a:noFill/>
+                  </a:tcPr>
+                </a:tc>
+                <a:tc>
+                  <a:txBody>
+                    <a:bodyPr/>
+                    <a:lstStyle/>
+                    <a:p>
+                      <a:pPr>
+                        <a:buNone/>
+                      </a:pPr>
+                      <a:r>
+                        <a:rPr lang="de-DE" sz="2000" b="1" cap="none" spc="0" dirty="0">
+                          <a:solidFill>
+                            <a:schemeClr val="tx1"/>
+                          </a:solidFill>
+                        </a:rPr>
+                        <a:t>Black-Box</a:t>
+                      </a:r>
+                      <a:endParaRPr lang="de-DE" sz="2000" cap="none" spc="0" dirty="0">
+                        <a:solidFill>
+                          <a:schemeClr val="tx1"/>
+                        </a:solidFill>
+                      </a:endParaRPr>
+                    </a:p>
+                  </a:txBody>
+                  <a:tcPr marL="129960" marR="99969" marT="99969" marB="99969" anchor="ctr">
+                    <a:lnL w="19050" cap="flat" cmpd="sng" algn="ctr">
+                      <a:solidFill>
+                        <a:schemeClr val="tx1"/>
+                      </a:solidFill>
+                      <a:prstDash val="solid"/>
+                    </a:lnL>
+                    <a:lnR w="19050" cap="flat" cmpd="sng" algn="ctr">
+                      <a:solidFill>
+                        <a:schemeClr val="tx1"/>
+                      </a:solidFill>
+                      <a:prstDash val="solid"/>
+                    </a:lnR>
+                    <a:lnT w="19050" cap="flat" cmpd="sng" algn="ctr">
+                      <a:solidFill>
+                        <a:schemeClr val="tx1"/>
+                      </a:solidFill>
+                      <a:prstDash val="solid"/>
+                    </a:lnT>
+                    <a:lnB w="6350" cap="flat" cmpd="sng" algn="ctr">
+                      <a:solidFill>
+                        <a:schemeClr val="tx1">
+                          <a:lumMod val="50000"/>
+                          <a:lumOff val="50000"/>
+                        </a:schemeClr>
+                      </a:solidFill>
+                      <a:prstDash val="solid"/>
+                    </a:lnB>
+                    <a:noFill/>
+                  </a:tcPr>
+                </a:tc>
+                <a:extLst>
+                  <a:ext uri="{0D108BD9-81ED-4DB2-BD59-A6C34878D82A}">
+                    <a16:rowId xmlns:a16="http://schemas.microsoft.com/office/drawing/2014/main" val="4095818538"/>
+                  </a:ext>
+                </a:extLst>
+              </a:tr>
+              <a:tr h="823200">
+                <a:tc>
+                  <a:txBody>
+                    <a:bodyPr/>
+                    <a:lstStyle/>
+                    <a:p>
+                      <a:pPr>
+                        <a:buNone/>
+                      </a:pPr>
+                      <a:r>
+                        <a:rPr lang="de-DE" sz="2000" cap="none" spc="0" dirty="0">
+                          <a:solidFill>
+                            <a:schemeClr val="tx1"/>
+                          </a:solidFill>
+                        </a:rPr>
+                        <a:t>System Knowledge</a:t>
+                      </a:r>
+                    </a:p>
+                  </a:txBody>
+                  <a:tcPr marL="129960" marR="99969" marT="99969" marB="99969" anchor="ctr">
+                    <a:lnL w="19050" cap="flat" cmpd="sng" algn="ctr">
+                      <a:solidFill>
+                        <a:schemeClr val="tx1"/>
+                      </a:solidFill>
+                      <a:prstDash val="solid"/>
+                    </a:lnL>
+                    <a:lnR w="19050" cap="flat" cmpd="sng" algn="ctr">
+                      <a:solidFill>
+                        <a:schemeClr val="tx1"/>
+                      </a:solidFill>
+                      <a:prstDash val="solid"/>
+                    </a:lnR>
+                    <a:lnT w="6350" cap="flat" cmpd="sng" algn="ctr">
+                      <a:solidFill>
+                        <a:schemeClr val="tx1">
+                          <a:lumMod val="50000"/>
+                          <a:lumOff val="50000"/>
+                        </a:schemeClr>
+                      </a:solidFill>
+                      <a:prstDash val="solid"/>
+                    </a:lnT>
+                    <a:lnB w="6350" cap="flat" cmpd="sng" algn="ctr">
+                      <a:solidFill>
+                        <a:schemeClr val="tx1">
+                          <a:lumMod val="50000"/>
+                          <a:lumOff val="50000"/>
+                        </a:schemeClr>
+                      </a:solidFill>
+                      <a:prstDash val="solid"/>
+                    </a:lnB>
+                    <a:noFill/>
+                  </a:tcPr>
+                </a:tc>
+                <a:tc>
+                  <a:txBody>
+                    <a:bodyPr/>
+                    <a:lstStyle/>
+                    <a:p>
+                      <a:pPr>
+                        <a:buNone/>
+                      </a:pPr>
+                      <a:r>
+                        <a:rPr lang="de-DE" sz="2000" cap="none" spc="0" dirty="0" err="1">
+                          <a:solidFill>
+                            <a:schemeClr val="tx1"/>
+                          </a:solidFill>
+                        </a:rPr>
+                        <a:t>Full</a:t>
+                      </a:r>
+                      <a:endParaRPr lang="de-DE" sz="2000" cap="none" spc="0" dirty="0">
+                        <a:solidFill>
+                          <a:schemeClr val="tx1"/>
+                        </a:solidFill>
+                      </a:endParaRPr>
+                    </a:p>
+                  </a:txBody>
+                  <a:tcPr marL="129960" marR="99969" marT="99969" marB="99969" anchor="ctr">
+                    <a:lnL w="19050" cap="flat" cmpd="sng" algn="ctr">
+                      <a:solidFill>
+                        <a:schemeClr val="tx1"/>
+                      </a:solidFill>
+                      <a:prstDash val="solid"/>
+                    </a:lnL>
+                    <a:lnR w="19050" cap="flat" cmpd="sng" algn="ctr">
+                      <a:solidFill>
+                        <a:schemeClr val="tx1"/>
+                      </a:solidFill>
+                      <a:prstDash val="solid"/>
+                    </a:lnR>
+                    <a:lnT w="6350" cap="flat" cmpd="sng" algn="ctr">
+                      <a:solidFill>
+                        <a:schemeClr val="tx1">
+                          <a:lumMod val="50000"/>
+                          <a:lumOff val="50000"/>
+                        </a:schemeClr>
+                      </a:solidFill>
+                      <a:prstDash val="solid"/>
+                    </a:lnT>
+                    <a:lnB w="6350" cap="flat" cmpd="sng" algn="ctr">
+                      <a:solidFill>
+                        <a:schemeClr val="tx1">
+                          <a:lumMod val="50000"/>
+                          <a:lumOff val="50000"/>
+                        </a:schemeClr>
+                      </a:solidFill>
+                      <a:prstDash val="solid"/>
+                    </a:lnB>
+                    <a:noFill/>
+                  </a:tcPr>
+                </a:tc>
+                <a:tc>
+                  <a:txBody>
+                    <a:bodyPr/>
+                    <a:lstStyle/>
+                    <a:p>
+                      <a:pPr>
+                        <a:buNone/>
+                      </a:pPr>
+                      <a:r>
+                        <a:rPr lang="de-DE" sz="2000" cap="none" spc="0">
+                          <a:solidFill>
+                            <a:schemeClr val="tx1"/>
+                          </a:solidFill>
+                        </a:rPr>
+                        <a:t>Partial</a:t>
+                      </a:r>
+                    </a:p>
+                  </a:txBody>
+                  <a:tcPr marL="129960" marR="99969" marT="99969" marB="99969" anchor="ctr">
+                    <a:lnL w="19050" cap="flat" cmpd="sng" algn="ctr">
+                      <a:solidFill>
+                        <a:schemeClr val="tx1"/>
+                      </a:solidFill>
+                      <a:prstDash val="solid"/>
+                    </a:lnL>
+                    <a:lnR w="19050" cap="flat" cmpd="sng" algn="ctr">
+                      <a:solidFill>
+                        <a:schemeClr val="tx1"/>
+                      </a:solidFill>
+                      <a:prstDash val="solid"/>
+                    </a:lnR>
+                    <a:lnT w="6350" cap="flat" cmpd="sng" algn="ctr">
+                      <a:solidFill>
+                        <a:schemeClr val="tx1">
+                          <a:lumMod val="50000"/>
+                          <a:lumOff val="50000"/>
+                        </a:schemeClr>
+                      </a:solidFill>
+                      <a:prstDash val="solid"/>
+                    </a:lnT>
+                    <a:lnB w="6350" cap="flat" cmpd="sng" algn="ctr">
+                      <a:solidFill>
+                        <a:schemeClr val="tx1">
+                          <a:lumMod val="50000"/>
+                          <a:lumOff val="50000"/>
+                        </a:schemeClr>
+                      </a:solidFill>
+                      <a:prstDash val="solid"/>
+                    </a:lnB>
+                    <a:noFill/>
+                  </a:tcPr>
+                </a:tc>
+                <a:tc>
+                  <a:txBody>
+                    <a:bodyPr/>
+                    <a:lstStyle/>
+                    <a:p>
+                      <a:pPr>
+                        <a:buNone/>
+                      </a:pPr>
+                      <a:r>
+                        <a:rPr lang="de-DE" sz="2000" cap="none" spc="0">
+                          <a:solidFill>
+                            <a:schemeClr val="tx1"/>
+                          </a:solidFill>
+                        </a:rPr>
+                        <a:t>None</a:t>
+                      </a:r>
+                    </a:p>
+                  </a:txBody>
+                  <a:tcPr marL="129960" marR="99969" marT="99969" marB="99969" anchor="ctr">
+                    <a:lnL w="19050" cap="flat" cmpd="sng" algn="ctr">
+                      <a:solidFill>
+                        <a:schemeClr val="tx1"/>
+                      </a:solidFill>
+                      <a:prstDash val="solid"/>
+                    </a:lnL>
+                    <a:lnR w="19050" cap="flat" cmpd="sng" algn="ctr">
+                      <a:solidFill>
+                        <a:schemeClr val="tx1"/>
+                      </a:solidFill>
+                      <a:prstDash val="solid"/>
+                    </a:lnR>
+                    <a:lnT w="6350" cap="flat" cmpd="sng" algn="ctr">
+                      <a:solidFill>
+                        <a:schemeClr val="tx1">
+                          <a:lumMod val="50000"/>
+                          <a:lumOff val="50000"/>
+                        </a:schemeClr>
+                      </a:solidFill>
+                      <a:prstDash val="solid"/>
+                    </a:lnT>
+                    <a:lnB w="6350" cap="flat" cmpd="sng" algn="ctr">
+                      <a:solidFill>
+                        <a:schemeClr val="tx1">
+                          <a:lumMod val="50000"/>
+                          <a:lumOff val="50000"/>
+                        </a:schemeClr>
+                      </a:solidFill>
+                      <a:prstDash val="solid"/>
+                    </a:lnB>
+                    <a:noFill/>
+                  </a:tcPr>
+                </a:tc>
+                <a:extLst>
+                  <a:ext uri="{0D108BD9-81ED-4DB2-BD59-A6C34878D82A}">
+                    <a16:rowId xmlns:a16="http://schemas.microsoft.com/office/drawing/2014/main" val="905568887"/>
+                  </a:ext>
+                </a:extLst>
+              </a:tr>
+              <a:tr h="823200">
+                <a:tc>
+                  <a:txBody>
+                    <a:bodyPr/>
+                    <a:lstStyle/>
+                    <a:p>
+                      <a:pPr>
+                        <a:buNone/>
+                      </a:pPr>
+                      <a:r>
+                        <a:rPr lang="de-DE" sz="2000" cap="none" spc="0" dirty="0">
+                          <a:solidFill>
+                            <a:schemeClr val="tx1"/>
+                          </a:solidFill>
+                        </a:rPr>
+                        <a:t>Parameter Source</a:t>
+                      </a:r>
+                    </a:p>
+                  </a:txBody>
+                  <a:tcPr marL="129960" marR="99969" marT="99969" marB="99969" anchor="ctr">
+                    <a:lnL w="19050" cap="flat" cmpd="sng" algn="ctr">
+                      <a:solidFill>
+                        <a:schemeClr val="tx1"/>
+                      </a:solidFill>
+                      <a:prstDash val="solid"/>
+                    </a:lnL>
+                    <a:lnR w="19050" cap="flat" cmpd="sng" algn="ctr">
+                      <a:solidFill>
+                        <a:schemeClr val="tx1"/>
+                      </a:solidFill>
+                      <a:prstDash val="solid"/>
+                    </a:lnR>
+                    <a:lnT w="6350" cap="flat" cmpd="sng" algn="ctr">
+                      <a:solidFill>
+                        <a:schemeClr val="tx1">
+                          <a:lumMod val="50000"/>
+                          <a:lumOff val="50000"/>
+                        </a:schemeClr>
+                      </a:solidFill>
+                      <a:prstDash val="solid"/>
+                    </a:lnT>
+                    <a:lnB w="6350" cap="flat" cmpd="sng" algn="ctr">
+                      <a:solidFill>
+                        <a:schemeClr val="tx1">
+                          <a:lumMod val="50000"/>
+                          <a:lumOff val="50000"/>
+                        </a:schemeClr>
+                      </a:solidFill>
+                      <a:prstDash val="solid"/>
+                    </a:lnB>
+                    <a:noFill/>
+                  </a:tcPr>
+                </a:tc>
+                <a:tc>
+                  <a:txBody>
+                    <a:bodyPr/>
+                    <a:lstStyle/>
+                    <a:p>
+                      <a:pPr>
+                        <a:buNone/>
+                      </a:pPr>
+                      <a:r>
+                        <a:rPr lang="de-DE" sz="2000" cap="none" spc="0">
+                          <a:solidFill>
+                            <a:schemeClr val="tx1"/>
+                          </a:solidFill>
+                        </a:rPr>
+                        <a:t>Physical</a:t>
+                      </a:r>
+                    </a:p>
+                  </a:txBody>
+                  <a:tcPr marL="129960" marR="99969" marT="99969" marB="99969" anchor="ctr">
+                    <a:lnL w="19050" cap="flat" cmpd="sng" algn="ctr">
+                      <a:solidFill>
+                        <a:schemeClr val="tx1"/>
+                      </a:solidFill>
+                      <a:prstDash val="solid"/>
+                    </a:lnL>
+                    <a:lnR w="19050" cap="flat" cmpd="sng" algn="ctr">
+                      <a:solidFill>
+                        <a:schemeClr val="tx1"/>
+                      </a:solidFill>
+                      <a:prstDash val="solid"/>
+                    </a:lnR>
+                    <a:lnT w="6350" cap="flat" cmpd="sng" algn="ctr">
+                      <a:solidFill>
+                        <a:schemeClr val="tx1">
+                          <a:lumMod val="50000"/>
+                          <a:lumOff val="50000"/>
+                        </a:schemeClr>
+                      </a:solidFill>
+                      <a:prstDash val="solid"/>
+                    </a:lnT>
+                    <a:lnB w="6350" cap="flat" cmpd="sng" algn="ctr">
+                      <a:solidFill>
+                        <a:schemeClr val="tx1">
+                          <a:lumMod val="50000"/>
+                          <a:lumOff val="50000"/>
+                        </a:schemeClr>
+                      </a:solidFill>
+                      <a:prstDash val="solid"/>
+                    </a:lnB>
+                    <a:noFill/>
+                  </a:tcPr>
+                </a:tc>
+                <a:tc>
+                  <a:txBody>
+                    <a:bodyPr/>
+                    <a:lstStyle/>
+                    <a:p>
+                      <a:pPr>
+                        <a:buNone/>
+                      </a:pPr>
+                      <a:r>
+                        <a:rPr lang="de-DE" sz="2000" cap="none" spc="0">
+                          <a:solidFill>
+                            <a:schemeClr val="tx1"/>
+                          </a:solidFill>
+                        </a:rPr>
+                        <a:t>Mixed</a:t>
+                      </a:r>
+                    </a:p>
+                  </a:txBody>
+                  <a:tcPr marL="129960" marR="99969" marT="99969" marB="99969" anchor="ctr">
+                    <a:lnL w="19050" cap="flat" cmpd="sng" algn="ctr">
+                      <a:solidFill>
+                        <a:schemeClr val="tx1"/>
+                      </a:solidFill>
+                      <a:prstDash val="solid"/>
+                    </a:lnL>
+                    <a:lnR w="19050" cap="flat" cmpd="sng" algn="ctr">
+                      <a:solidFill>
+                        <a:schemeClr val="tx1"/>
+                      </a:solidFill>
+                      <a:prstDash val="solid"/>
+                    </a:lnR>
+                    <a:lnT w="6350" cap="flat" cmpd="sng" algn="ctr">
+                      <a:solidFill>
+                        <a:schemeClr val="tx1">
+                          <a:lumMod val="50000"/>
+                          <a:lumOff val="50000"/>
+                        </a:schemeClr>
+                      </a:solidFill>
+                      <a:prstDash val="solid"/>
+                    </a:lnT>
+                    <a:lnB w="6350" cap="flat" cmpd="sng" algn="ctr">
+                      <a:solidFill>
+                        <a:schemeClr val="tx1">
+                          <a:lumMod val="50000"/>
+                          <a:lumOff val="50000"/>
+                        </a:schemeClr>
+                      </a:solidFill>
+                      <a:prstDash val="solid"/>
+                    </a:lnB>
+                    <a:noFill/>
+                  </a:tcPr>
+                </a:tc>
+                <a:tc>
+                  <a:txBody>
+                    <a:bodyPr/>
+                    <a:lstStyle/>
+                    <a:p>
+                      <a:pPr>
+                        <a:buNone/>
+                      </a:pPr>
+                      <a:r>
+                        <a:rPr lang="de-DE" sz="2000" cap="none" spc="0">
+                          <a:solidFill>
+                            <a:schemeClr val="tx1"/>
+                          </a:solidFill>
+                        </a:rPr>
+                        <a:t>Data Only</a:t>
+                      </a:r>
+                    </a:p>
+                  </a:txBody>
+                  <a:tcPr marL="129960" marR="99969" marT="99969" marB="99969" anchor="ctr">
+                    <a:lnL w="19050" cap="flat" cmpd="sng" algn="ctr">
+                      <a:solidFill>
+                        <a:schemeClr val="tx1"/>
+                      </a:solidFill>
+                      <a:prstDash val="solid"/>
+                    </a:lnL>
+                    <a:lnR w="19050" cap="flat" cmpd="sng" algn="ctr">
+                      <a:solidFill>
+                        <a:schemeClr val="tx1"/>
+                      </a:solidFill>
+                      <a:prstDash val="solid"/>
+                    </a:lnR>
+                    <a:lnT w="6350" cap="flat" cmpd="sng" algn="ctr">
+                      <a:solidFill>
+                        <a:schemeClr val="tx1">
+                          <a:lumMod val="50000"/>
+                          <a:lumOff val="50000"/>
+                        </a:schemeClr>
+                      </a:solidFill>
+                      <a:prstDash val="solid"/>
+                    </a:lnT>
+                    <a:lnB w="6350" cap="flat" cmpd="sng" algn="ctr">
+                      <a:solidFill>
+                        <a:schemeClr val="tx1">
+                          <a:lumMod val="50000"/>
+                          <a:lumOff val="50000"/>
+                        </a:schemeClr>
+                      </a:solidFill>
+                      <a:prstDash val="solid"/>
+                    </a:lnB>
+                    <a:noFill/>
+                  </a:tcPr>
+                </a:tc>
+                <a:extLst>
+                  <a:ext uri="{0D108BD9-81ED-4DB2-BD59-A6C34878D82A}">
+                    <a16:rowId xmlns:a16="http://schemas.microsoft.com/office/drawing/2014/main" val="422521085"/>
+                  </a:ext>
+                </a:extLst>
+              </a:tr>
+              <a:tr h="823200">
+                <a:tc>
+                  <a:txBody>
+                    <a:bodyPr/>
+                    <a:lstStyle/>
+                    <a:p>
+                      <a:pPr>
+                        <a:buNone/>
+                      </a:pPr>
+                      <a:r>
+                        <a:rPr lang="de-DE" sz="2000" cap="none" spc="0">
+                          <a:solidFill>
+                            <a:schemeClr val="tx1"/>
+                          </a:solidFill>
+                        </a:rPr>
+                        <a:t>Interpretability</a:t>
+                      </a:r>
+                    </a:p>
+                  </a:txBody>
+                  <a:tcPr marL="129960" marR="99969" marT="99969" marB="99969" anchor="ctr">
+                    <a:lnL w="19050" cap="flat" cmpd="sng" algn="ctr">
+                      <a:solidFill>
+                        <a:schemeClr val="tx1"/>
+                      </a:solidFill>
+                      <a:prstDash val="solid"/>
+                    </a:lnL>
+                    <a:lnR w="19050" cap="flat" cmpd="sng" algn="ctr">
+                      <a:solidFill>
+                        <a:schemeClr val="tx1"/>
+                      </a:solidFill>
+                      <a:prstDash val="solid"/>
+                    </a:lnR>
+                    <a:lnT w="6350" cap="flat" cmpd="sng" algn="ctr">
+                      <a:solidFill>
+                        <a:schemeClr val="tx1">
+                          <a:lumMod val="50000"/>
+                          <a:lumOff val="50000"/>
+                        </a:schemeClr>
+                      </a:solidFill>
+                      <a:prstDash val="solid"/>
+                    </a:lnT>
+                    <a:lnB w="6350" cap="flat" cmpd="sng" algn="ctr">
+                      <a:solidFill>
+                        <a:schemeClr val="tx1">
+                          <a:lumMod val="50000"/>
+                          <a:lumOff val="50000"/>
+                        </a:schemeClr>
+                      </a:solidFill>
+                      <a:prstDash val="solid"/>
+                    </a:lnB>
+                    <a:noFill/>
+                  </a:tcPr>
+                </a:tc>
+                <a:tc>
+                  <a:txBody>
+                    <a:bodyPr/>
+                    <a:lstStyle/>
+                    <a:p>
+                      <a:pPr>
+                        <a:buNone/>
+                      </a:pPr>
+                      <a:r>
+                        <a:rPr lang="de-DE" sz="2000" cap="none" spc="0">
+                          <a:solidFill>
+                            <a:schemeClr val="tx1"/>
+                          </a:solidFill>
+                        </a:rPr>
+                        <a:t>High</a:t>
+                      </a:r>
+                    </a:p>
+                  </a:txBody>
+                  <a:tcPr marL="129960" marR="99969" marT="99969" marB="99969" anchor="ctr">
+                    <a:lnL w="19050" cap="flat" cmpd="sng" algn="ctr">
+                      <a:solidFill>
+                        <a:schemeClr val="tx1"/>
+                      </a:solidFill>
+                      <a:prstDash val="solid"/>
+                    </a:lnL>
+                    <a:lnR w="19050" cap="flat" cmpd="sng" algn="ctr">
+                      <a:solidFill>
+                        <a:schemeClr val="tx1"/>
+                      </a:solidFill>
+                      <a:prstDash val="solid"/>
+                    </a:lnR>
+                    <a:lnT w="6350" cap="flat" cmpd="sng" algn="ctr">
+                      <a:solidFill>
+                        <a:schemeClr val="tx1">
+                          <a:lumMod val="50000"/>
+                          <a:lumOff val="50000"/>
+                        </a:schemeClr>
+                      </a:solidFill>
+                      <a:prstDash val="solid"/>
+                    </a:lnT>
+                    <a:lnB w="6350" cap="flat" cmpd="sng" algn="ctr">
+                      <a:solidFill>
+                        <a:schemeClr val="tx1">
+                          <a:lumMod val="50000"/>
+                          <a:lumOff val="50000"/>
+                        </a:schemeClr>
+                      </a:solidFill>
+                      <a:prstDash val="solid"/>
+                    </a:lnB>
+                    <a:noFill/>
+                  </a:tcPr>
+                </a:tc>
+                <a:tc>
+                  <a:txBody>
+                    <a:bodyPr/>
+                    <a:lstStyle/>
+                    <a:p>
+                      <a:pPr>
+                        <a:buNone/>
+                      </a:pPr>
+                      <a:r>
+                        <a:rPr lang="de-DE" sz="2000" cap="none" spc="0">
+                          <a:solidFill>
+                            <a:schemeClr val="tx1"/>
+                          </a:solidFill>
+                        </a:rPr>
+                        <a:t>Medium</a:t>
+                      </a:r>
+                    </a:p>
+                  </a:txBody>
+                  <a:tcPr marL="129960" marR="99969" marT="99969" marB="99969" anchor="ctr">
+                    <a:lnL w="19050" cap="flat" cmpd="sng" algn="ctr">
+                      <a:solidFill>
+                        <a:schemeClr val="tx1"/>
+                      </a:solidFill>
+                      <a:prstDash val="solid"/>
+                    </a:lnL>
+                    <a:lnR w="19050" cap="flat" cmpd="sng" algn="ctr">
+                      <a:solidFill>
+                        <a:schemeClr val="tx1"/>
+                      </a:solidFill>
+                      <a:prstDash val="solid"/>
+                    </a:lnR>
+                    <a:lnT w="6350" cap="flat" cmpd="sng" algn="ctr">
+                      <a:solidFill>
+                        <a:schemeClr val="tx1">
+                          <a:lumMod val="50000"/>
+                          <a:lumOff val="50000"/>
+                        </a:schemeClr>
+                      </a:solidFill>
+                      <a:prstDash val="solid"/>
+                    </a:lnT>
+                    <a:lnB w="6350" cap="flat" cmpd="sng" algn="ctr">
+                      <a:solidFill>
+                        <a:schemeClr val="tx1">
+                          <a:lumMod val="50000"/>
+                          <a:lumOff val="50000"/>
+                        </a:schemeClr>
+                      </a:solidFill>
+                      <a:prstDash val="solid"/>
+                    </a:lnB>
+                    <a:noFill/>
+                  </a:tcPr>
+                </a:tc>
+                <a:tc>
+                  <a:txBody>
+                    <a:bodyPr/>
+                    <a:lstStyle/>
+                    <a:p>
+                      <a:pPr>
+                        <a:buNone/>
+                      </a:pPr>
+                      <a:r>
+                        <a:rPr lang="de-DE" sz="2000" cap="none" spc="0">
+                          <a:solidFill>
+                            <a:schemeClr val="tx1"/>
+                          </a:solidFill>
+                        </a:rPr>
+                        <a:t>Low</a:t>
+                      </a:r>
+                    </a:p>
+                  </a:txBody>
+                  <a:tcPr marL="129960" marR="99969" marT="99969" marB="99969" anchor="ctr">
+                    <a:lnL w="19050" cap="flat" cmpd="sng" algn="ctr">
+                      <a:solidFill>
+                        <a:schemeClr val="tx1"/>
+                      </a:solidFill>
+                      <a:prstDash val="solid"/>
+                    </a:lnL>
+                    <a:lnR w="19050" cap="flat" cmpd="sng" algn="ctr">
+                      <a:solidFill>
+                        <a:schemeClr val="tx1"/>
+                      </a:solidFill>
+                      <a:prstDash val="solid"/>
+                    </a:lnR>
+                    <a:lnT w="6350" cap="flat" cmpd="sng" algn="ctr">
+                      <a:solidFill>
+                        <a:schemeClr val="tx1">
+                          <a:lumMod val="50000"/>
+                          <a:lumOff val="50000"/>
+                        </a:schemeClr>
+                      </a:solidFill>
+                      <a:prstDash val="solid"/>
+                    </a:lnT>
+                    <a:lnB w="6350" cap="flat" cmpd="sng" algn="ctr">
+                      <a:solidFill>
+                        <a:schemeClr val="tx1">
+                          <a:lumMod val="50000"/>
+                          <a:lumOff val="50000"/>
+                        </a:schemeClr>
+                      </a:solidFill>
+                      <a:prstDash val="solid"/>
+                    </a:lnB>
+                    <a:noFill/>
+                  </a:tcPr>
+                </a:tc>
+                <a:extLst>
+                  <a:ext uri="{0D108BD9-81ED-4DB2-BD59-A6C34878D82A}">
+                    <a16:rowId xmlns:a16="http://schemas.microsoft.com/office/drawing/2014/main" val="2614014430"/>
+                  </a:ext>
+                </a:extLst>
+              </a:tr>
+              <a:tr h="823200">
+                <a:tc>
+                  <a:txBody>
+                    <a:bodyPr/>
+                    <a:lstStyle/>
+                    <a:p>
+                      <a:pPr>
+                        <a:buNone/>
+                      </a:pPr>
+                      <a:r>
+                        <a:rPr lang="de-DE" sz="2000" cap="none" spc="0">
+                          <a:solidFill>
+                            <a:schemeClr val="tx1"/>
+                          </a:solidFill>
+                        </a:rPr>
+                        <a:t>Effort / Complexity</a:t>
+                      </a:r>
+                    </a:p>
+                  </a:txBody>
+                  <a:tcPr marL="129960" marR="99969" marT="99969" marB="99969" anchor="ctr">
+                    <a:lnL w="19050" cap="flat" cmpd="sng" algn="ctr">
+                      <a:solidFill>
+                        <a:schemeClr val="tx1"/>
+                      </a:solidFill>
+                      <a:prstDash val="solid"/>
+                    </a:lnL>
+                    <a:lnR w="19050" cap="flat" cmpd="sng" algn="ctr">
+                      <a:solidFill>
+                        <a:schemeClr val="tx1"/>
+                      </a:solidFill>
+                      <a:prstDash val="solid"/>
+                    </a:lnR>
+                    <a:lnT w="6350" cap="flat" cmpd="sng" algn="ctr">
+                      <a:solidFill>
+                        <a:schemeClr val="tx1">
+                          <a:lumMod val="50000"/>
+                          <a:lumOff val="50000"/>
+                        </a:schemeClr>
+                      </a:solidFill>
+                      <a:prstDash val="solid"/>
+                    </a:lnT>
+                    <a:lnB w="6350" cap="flat" cmpd="sng" algn="ctr">
+                      <a:solidFill>
+                        <a:schemeClr val="tx1">
+                          <a:lumMod val="50000"/>
+                          <a:lumOff val="50000"/>
+                        </a:schemeClr>
+                      </a:solidFill>
+                      <a:prstDash val="solid"/>
+                    </a:lnB>
+                    <a:noFill/>
+                  </a:tcPr>
+                </a:tc>
+                <a:tc>
+                  <a:txBody>
+                    <a:bodyPr/>
+                    <a:lstStyle/>
+                    <a:p>
+                      <a:pPr>
+                        <a:buNone/>
+                      </a:pPr>
+                      <a:r>
+                        <a:rPr lang="de-DE" sz="2000" cap="none" spc="0">
+                          <a:solidFill>
+                            <a:schemeClr val="tx1"/>
+                          </a:solidFill>
+                        </a:rPr>
+                        <a:t>High</a:t>
+                      </a:r>
+                    </a:p>
+                  </a:txBody>
+                  <a:tcPr marL="129960" marR="99969" marT="99969" marB="99969" anchor="ctr">
+                    <a:lnL w="19050" cap="flat" cmpd="sng" algn="ctr">
+                      <a:solidFill>
+                        <a:schemeClr val="tx1"/>
+                      </a:solidFill>
+                      <a:prstDash val="solid"/>
+                    </a:lnL>
+                    <a:lnR w="19050" cap="flat" cmpd="sng" algn="ctr">
+                      <a:solidFill>
+                        <a:schemeClr val="tx1"/>
+                      </a:solidFill>
+                      <a:prstDash val="solid"/>
+                    </a:lnR>
+                    <a:lnT w="6350" cap="flat" cmpd="sng" algn="ctr">
+                      <a:solidFill>
+                        <a:schemeClr val="tx1">
+                          <a:lumMod val="50000"/>
+                          <a:lumOff val="50000"/>
+                        </a:schemeClr>
+                      </a:solidFill>
+                      <a:prstDash val="solid"/>
+                    </a:lnT>
+                    <a:lnB w="6350" cap="flat" cmpd="sng" algn="ctr">
+                      <a:solidFill>
+                        <a:schemeClr val="tx1">
+                          <a:lumMod val="50000"/>
+                          <a:lumOff val="50000"/>
+                        </a:schemeClr>
+                      </a:solidFill>
+                      <a:prstDash val="solid"/>
+                    </a:lnB>
+                    <a:noFill/>
+                  </a:tcPr>
+                </a:tc>
+                <a:tc>
+                  <a:txBody>
+                    <a:bodyPr/>
+                    <a:lstStyle/>
+                    <a:p>
+                      <a:pPr>
+                        <a:buNone/>
+                      </a:pPr>
+                      <a:r>
+                        <a:rPr lang="de-DE" sz="2000" cap="none" spc="0">
+                          <a:solidFill>
+                            <a:schemeClr val="tx1"/>
+                          </a:solidFill>
+                        </a:rPr>
+                        <a:t>Medium</a:t>
+                      </a:r>
+                    </a:p>
+                  </a:txBody>
+                  <a:tcPr marL="129960" marR="99969" marT="99969" marB="99969" anchor="ctr">
+                    <a:lnL w="19050" cap="flat" cmpd="sng" algn="ctr">
+                      <a:solidFill>
+                        <a:schemeClr val="tx1"/>
+                      </a:solidFill>
+                      <a:prstDash val="solid"/>
+                    </a:lnL>
+                    <a:lnR w="19050" cap="flat" cmpd="sng" algn="ctr">
+                      <a:solidFill>
+                        <a:schemeClr val="tx1"/>
+                      </a:solidFill>
+                      <a:prstDash val="solid"/>
+                    </a:lnR>
+                    <a:lnT w="6350" cap="flat" cmpd="sng" algn="ctr">
+                      <a:solidFill>
+                        <a:schemeClr val="tx1">
+                          <a:lumMod val="50000"/>
+                          <a:lumOff val="50000"/>
+                        </a:schemeClr>
+                      </a:solidFill>
+                      <a:prstDash val="solid"/>
+                    </a:lnT>
+                    <a:lnB w="6350" cap="flat" cmpd="sng" algn="ctr">
+                      <a:solidFill>
+                        <a:schemeClr val="tx1">
+                          <a:lumMod val="50000"/>
+                          <a:lumOff val="50000"/>
+                        </a:schemeClr>
+                      </a:solidFill>
+                      <a:prstDash val="solid"/>
+                    </a:lnB>
+                    <a:noFill/>
+                  </a:tcPr>
+                </a:tc>
+                <a:tc>
+                  <a:txBody>
+                    <a:bodyPr/>
+                    <a:lstStyle/>
+                    <a:p>
+                      <a:pPr>
+                        <a:buNone/>
+                      </a:pPr>
+                      <a:r>
+                        <a:rPr lang="de-DE" sz="2000" cap="none" spc="0">
+                          <a:solidFill>
+                            <a:schemeClr val="tx1"/>
+                          </a:solidFill>
+                        </a:rPr>
+                        <a:t>Low-Medium</a:t>
+                      </a:r>
+                    </a:p>
+                  </a:txBody>
+                  <a:tcPr marL="129960" marR="99969" marT="99969" marB="99969" anchor="ctr">
+                    <a:lnL w="19050" cap="flat" cmpd="sng" algn="ctr">
+                      <a:solidFill>
+                        <a:schemeClr val="tx1"/>
+                      </a:solidFill>
+                      <a:prstDash val="solid"/>
+                    </a:lnL>
+                    <a:lnR w="19050" cap="flat" cmpd="sng" algn="ctr">
+                      <a:solidFill>
+                        <a:schemeClr val="tx1"/>
+                      </a:solidFill>
+                      <a:prstDash val="solid"/>
+                    </a:lnR>
+                    <a:lnT w="6350" cap="flat" cmpd="sng" algn="ctr">
+                      <a:solidFill>
+                        <a:schemeClr val="tx1">
+                          <a:lumMod val="50000"/>
+                          <a:lumOff val="50000"/>
+                        </a:schemeClr>
+                      </a:solidFill>
+                      <a:prstDash val="solid"/>
+                    </a:lnT>
+                    <a:lnB w="6350" cap="flat" cmpd="sng" algn="ctr">
+                      <a:solidFill>
+                        <a:schemeClr val="tx1">
+                          <a:lumMod val="50000"/>
+                          <a:lumOff val="50000"/>
+                        </a:schemeClr>
+                      </a:solidFill>
+                      <a:prstDash val="solid"/>
+                    </a:lnB>
+                    <a:noFill/>
+                  </a:tcPr>
+                </a:tc>
+                <a:extLst>
+                  <a:ext uri="{0D108BD9-81ED-4DB2-BD59-A6C34878D82A}">
+                    <a16:rowId xmlns:a16="http://schemas.microsoft.com/office/drawing/2014/main" val="504966552"/>
+                  </a:ext>
+                </a:extLst>
+              </a:tr>
+              <a:tr h="823200">
+                <a:tc>
+                  <a:txBody>
+                    <a:bodyPr/>
+                    <a:lstStyle/>
+                    <a:p>
+                      <a:pPr>
+                        <a:buNone/>
+                      </a:pPr>
+                      <a:r>
+                        <a:rPr lang="de-DE" sz="2000" cap="none" spc="0">
+                          <a:solidFill>
+                            <a:schemeClr val="tx1"/>
+                          </a:solidFill>
+                        </a:rPr>
+                        <a:t>Extrapolation</a:t>
+                      </a:r>
+                    </a:p>
+                  </a:txBody>
+                  <a:tcPr marL="129960" marR="99969" marT="99969" marB="99969" anchor="ctr">
+                    <a:lnL w="19050" cap="flat" cmpd="sng" algn="ctr">
+                      <a:solidFill>
+                        <a:schemeClr val="tx1"/>
+                      </a:solidFill>
+                      <a:prstDash val="solid"/>
+                    </a:lnL>
+                    <a:lnR w="19050" cap="flat" cmpd="sng" algn="ctr">
+                      <a:solidFill>
+                        <a:schemeClr val="tx1"/>
+                      </a:solidFill>
+                      <a:prstDash val="solid"/>
+                    </a:lnR>
+                    <a:lnT w="6350" cap="flat" cmpd="sng" algn="ctr">
+                      <a:solidFill>
+                        <a:schemeClr val="tx1">
+                          <a:lumMod val="50000"/>
+                          <a:lumOff val="50000"/>
+                        </a:schemeClr>
+                      </a:solidFill>
+                      <a:prstDash val="solid"/>
+                    </a:lnT>
+                    <a:lnB w="19050" cap="flat" cmpd="sng" algn="ctr">
+                      <a:solidFill>
+                        <a:schemeClr val="tx1"/>
+                      </a:solidFill>
+                      <a:prstDash val="solid"/>
+                    </a:lnB>
+                    <a:noFill/>
+                  </a:tcPr>
+                </a:tc>
+                <a:tc>
+                  <a:txBody>
+                    <a:bodyPr/>
+                    <a:lstStyle/>
+                    <a:p>
+                      <a:pPr>
+                        <a:buNone/>
+                      </a:pPr>
+                      <a:r>
+                        <a:rPr lang="de-DE" sz="2000" cap="none" spc="0">
+                          <a:solidFill>
+                            <a:schemeClr val="tx1"/>
+                          </a:solidFill>
+                        </a:rPr>
+                        <a:t>Reliable</a:t>
+                      </a:r>
+                    </a:p>
+                  </a:txBody>
+                  <a:tcPr marL="129960" marR="99969" marT="99969" marB="99969" anchor="ctr">
+                    <a:lnL w="19050" cap="flat" cmpd="sng" algn="ctr">
+                      <a:solidFill>
+                        <a:schemeClr val="tx1"/>
+                      </a:solidFill>
+                      <a:prstDash val="solid"/>
+                    </a:lnL>
+                    <a:lnR w="19050" cap="flat" cmpd="sng" algn="ctr">
+                      <a:solidFill>
+                        <a:schemeClr val="tx1"/>
+                      </a:solidFill>
+                      <a:prstDash val="solid"/>
+                    </a:lnR>
+                    <a:lnT w="6350" cap="flat" cmpd="sng" algn="ctr">
+                      <a:solidFill>
+                        <a:schemeClr val="tx1">
+                          <a:lumMod val="50000"/>
+                          <a:lumOff val="50000"/>
+                        </a:schemeClr>
+                      </a:solidFill>
+                      <a:prstDash val="solid"/>
+                    </a:lnT>
+                    <a:lnB w="19050" cap="flat" cmpd="sng" algn="ctr">
+                      <a:solidFill>
+                        <a:schemeClr val="tx1"/>
+                      </a:solidFill>
+                      <a:prstDash val="solid"/>
+                    </a:lnB>
+                    <a:noFill/>
+                  </a:tcPr>
+                </a:tc>
+                <a:tc>
+                  <a:txBody>
+                    <a:bodyPr/>
+                    <a:lstStyle/>
+                    <a:p>
+                      <a:pPr>
+                        <a:buNone/>
+                      </a:pPr>
+                      <a:r>
+                        <a:rPr lang="de-DE" sz="2000" cap="none" spc="0">
+                          <a:solidFill>
+                            <a:schemeClr val="tx1"/>
+                          </a:solidFill>
+                        </a:rPr>
+                        <a:t>Moderate</a:t>
+                      </a:r>
+                    </a:p>
+                  </a:txBody>
+                  <a:tcPr marL="129960" marR="99969" marT="99969" marB="99969" anchor="ctr">
+                    <a:lnL w="19050" cap="flat" cmpd="sng" algn="ctr">
+                      <a:solidFill>
+                        <a:schemeClr val="tx1"/>
+                      </a:solidFill>
+                      <a:prstDash val="solid"/>
+                    </a:lnL>
+                    <a:lnR w="19050" cap="flat" cmpd="sng" algn="ctr">
+                      <a:solidFill>
+                        <a:schemeClr val="tx1"/>
+                      </a:solidFill>
+                      <a:prstDash val="solid"/>
+                    </a:lnR>
+                    <a:lnT w="6350" cap="flat" cmpd="sng" algn="ctr">
+                      <a:solidFill>
+                        <a:schemeClr val="tx1">
+                          <a:lumMod val="50000"/>
+                          <a:lumOff val="50000"/>
+                        </a:schemeClr>
+                      </a:solidFill>
+                      <a:prstDash val="solid"/>
+                    </a:lnT>
+                    <a:lnB w="19050" cap="flat" cmpd="sng" algn="ctr">
+                      <a:solidFill>
+                        <a:schemeClr val="tx1"/>
+                      </a:solidFill>
+                      <a:prstDash val="solid"/>
+                    </a:lnB>
+                    <a:noFill/>
+                  </a:tcPr>
+                </a:tc>
+                <a:tc>
+                  <a:txBody>
+                    <a:bodyPr/>
+                    <a:lstStyle/>
+                    <a:p>
+                      <a:pPr>
+                        <a:buNone/>
+                      </a:pPr>
+                      <a:r>
+                        <a:rPr lang="de-DE" sz="2000" cap="none" spc="0" dirty="0">
+                          <a:solidFill>
+                            <a:schemeClr val="tx1"/>
+                          </a:solidFill>
+                        </a:rPr>
+                        <a:t>Poor</a:t>
+                      </a:r>
+                    </a:p>
+                  </a:txBody>
+                  <a:tcPr marL="129960" marR="99969" marT="99969" marB="99969" anchor="ctr">
+                    <a:lnL w="19050" cap="flat" cmpd="sng" algn="ctr">
+                      <a:solidFill>
+                        <a:schemeClr val="tx1"/>
+                      </a:solidFill>
+                      <a:prstDash val="solid"/>
+                    </a:lnL>
+                    <a:lnR w="19050" cap="flat" cmpd="sng" algn="ctr">
+                      <a:solidFill>
+                        <a:schemeClr val="tx1"/>
+                      </a:solidFill>
+                      <a:prstDash val="solid"/>
+                    </a:lnR>
+                    <a:lnT w="6350" cap="flat" cmpd="sng" algn="ctr">
+                      <a:solidFill>
+                        <a:schemeClr val="tx1">
+                          <a:lumMod val="50000"/>
+                          <a:lumOff val="50000"/>
+                        </a:schemeClr>
+                      </a:solidFill>
+                      <a:prstDash val="solid"/>
+                    </a:lnT>
+                    <a:lnB w="19050" cap="flat" cmpd="sng" algn="ctr">
+                      <a:solidFill>
+                        <a:schemeClr val="tx1"/>
+                      </a:solidFill>
+                      <a:prstDash val="solid"/>
+                    </a:lnB>
+                    <a:noFill/>
+                  </a:tcPr>
+                </a:tc>
+                <a:extLst>
+                  <a:ext uri="{0D108BD9-81ED-4DB2-BD59-A6C34878D82A}">
+                    <a16:rowId xmlns:a16="http://schemas.microsoft.com/office/drawing/2014/main" val="2603892022"/>
+                  </a:ext>
+                </a:extLst>
+              </a:tr>
+            </a:tbl>
+          </a:graphicData>
+        </a:graphic>
+      </p:graphicFrame>
+    </p:spTree>
+    <p:extLst>
+      <p:ext uri="{BB962C8B-B14F-4D97-AF65-F5344CB8AC3E}">
+        <p14:creationId xmlns:p14="http://schemas.microsoft.com/office/powerpoint/2010/main" val="2139381194"/>
+      </p:ext>
+    </p:extLst>
+  </p:cSld>
+  <p:clrMapOvr>
+    <a:masterClrMapping/>
+  </p:clrMapOvr>
+</p:sld>
+</file>
+
+<file path=ppt/slides/slide11.xml><?xml version="1.0" encoding="utf-8"?>
+<p:sld xmlns:a="http://schemas.openxmlformats.org/drawingml/2006/main" xmlns:r="http://schemas.openxmlformats.org/officeDocument/2006/relationships" xmlns:p="http://schemas.openxmlformats.org/presentationml/2006/main">
+  <p:cSld>
+    <p:spTree>
+      <p:nvGrpSpPr>
+        <p:cNvPr id="1" name=""/>
+        <p:cNvGrpSpPr/>
+        <p:nvPr/>
+      </p:nvGrpSpPr>
+      <p:grpSpPr>
+        <a:xfrm>
+          <a:off x="0" y="0"/>
+          <a:ext cx="0" cy="0"/>
+          <a:chOff x="0" y="0"/>
+          <a:chExt cx="0" cy="0"/>
+        </a:xfrm>
+      </p:grpSpPr>
+      <p:sp>
+        <p:nvSpPr>
+          <p:cNvPr id="2" name="Titel 1">
+            <a:extLst>
+              <a:ext uri="{FF2B5EF4-FFF2-40B4-BE49-F238E27FC236}">
                 <a16:creationId xmlns:a16="http://schemas.microsoft.com/office/drawing/2014/main" id="{28EDA3A2-F561-C805-764F-7D8E46B25AA0}"/>
               </a:ext>
             </a:extLst>
@@ -4258,7 +5696,7 @@
           <a:p>
             <a:fld id="{08C366F5-AFAD-49CB-854A-9D9E238FCA13}" type="slidenum">
               <a:rPr lang="en-GB" smtClean="0"/>
-              <a:t>10</a:t>
+              <a:t>11</a:t>
             </a:fld>
             <a:endParaRPr lang="en-GB"/>
           </a:p>
@@ -4318,7 +5756,7 @@
 </p:sld>
 </file>
 
-<file path=ppt/slides/slide11.xml><?xml version="1.0" encoding="utf-8"?>
+<file path=ppt/slides/slide12.xml><?xml version="1.0" encoding="utf-8"?>
 <p:sld xmlns:a="http://schemas.openxmlformats.org/drawingml/2006/main" xmlns:r="http://schemas.openxmlformats.org/officeDocument/2006/relationships" xmlns:p="http://schemas.openxmlformats.org/presentationml/2006/main">
   <p:cSld>
     <p:spTree>
@@ -4865,7 +6303,7 @@
           <a:p>
             <a:fld id="{08C366F5-AFAD-49CB-854A-9D9E238FCA13}" type="slidenum">
               <a:rPr lang="en-GB" smtClean="0"/>
-              <a:t>11</a:t>
+              <a:t>12</a:t>
             </a:fld>
             <a:endParaRPr lang="en-GB"/>
           </a:p>
@@ -4964,7 +6402,7 @@
 </p:sld>
 </file>
 
-<file path=ppt/slides/slide12.xml><?xml version="1.0" encoding="utf-8"?>
+<file path=ppt/slides/slide13.xml><?xml version="1.0" encoding="utf-8"?>
 <p:sld xmlns:a="http://schemas.openxmlformats.org/drawingml/2006/main" xmlns:r="http://schemas.openxmlformats.org/officeDocument/2006/relationships" xmlns:p="http://schemas.openxmlformats.org/presentationml/2006/main">
   <p:cSld>
     <p:spTree>
@@ -5578,7 +7016,7 @@
           <a:p>
             <a:fld id="{08C366F5-AFAD-49CB-854A-9D9E238FCA13}" type="slidenum">
               <a:rPr lang="en-GB" smtClean="0"/>
-              <a:t>12</a:t>
+              <a:t>13</a:t>
             </a:fld>
             <a:endParaRPr lang="en-GB"/>
           </a:p>
@@ -5755,7 +7193,7 @@
         <p:spPr>
           <a:xfrm>
             <a:off x="3907506" y="3109400"/>
-            <a:ext cx="2835392" cy="461665"/>
+            <a:ext cx="3938194" cy="461665"/>
           </a:xfrm>
           <a:prstGeom prst="rect">
             <a:avLst/>
@@ -5780,7 +7218,18 @@
               <a:rPr lang="de-DE" sz="2400" dirty="0" err="1"/>
               <a:t>acceleration</a:t>
             </a:r>
-            <a:endParaRPr lang="de-DE" sz="2400" dirty="0"/>
+            <a:r>
+              <a:rPr lang="de-DE" sz="2400" dirty="0"/>
+              <a:t> (</a:t>
+            </a:r>
+            <a:r>
+              <a:rPr lang="de-DE" sz="2400" dirty="0" err="1"/>
+              <a:t>gravity</a:t>
+            </a:r>
+            <a:r>
+              <a:rPr lang="de-DE" sz="2400" dirty="0"/>
+              <a:t>)</a:t>
+            </a:r>
           </a:p>
         </p:txBody>
       </p:sp>
@@ -5890,7 +7339,7 @@
         </p:blipFill>
         <p:spPr>
           <a:xfrm>
-            <a:off x="6742898" y="3568427"/>
+            <a:off x="6742898" y="3608183"/>
             <a:ext cx="5251262" cy="1925733"/>
           </a:xfrm>
           <a:prstGeom prst="rect">
@@ -5911,7 +7360,7 @@
 </p:sld>
 </file>
 
-<file path=ppt/slides/slide13.xml><?xml version="1.0" encoding="utf-8"?>
+<file path=ppt/slides/slide14.xml><?xml version="1.0" encoding="utf-8"?>
 <p:sld xmlns:a="http://schemas.openxmlformats.org/drawingml/2006/main" xmlns:r="http://schemas.openxmlformats.org/officeDocument/2006/relationships" xmlns:p="http://schemas.openxmlformats.org/presentationml/2006/main">
   <p:cSld>
     <p:spTree>
@@ -6560,7 +8009,7 @@
           <a:p>
             <a:fld id="{08C366F5-AFAD-49CB-854A-9D9E238FCA13}" type="slidenum">
               <a:rPr lang="en-GB" smtClean="0"/>
-              <a:t>13</a:t>
+              <a:t>14</a:t>
             </a:fld>
             <a:endParaRPr lang="en-GB"/>
           </a:p>
@@ -7133,6 +8582,217 @@
           </p:sp>
         </mc:Fallback>
       </mc:AlternateContent>
+      <p:cxnSp>
+        <p:nvCxnSpPr>
+          <p:cNvPr id="11" name="Gerade Verbindung 10">
+            <a:extLst>
+              <a:ext uri="{FF2B5EF4-FFF2-40B4-BE49-F238E27FC236}">
+                <a16:creationId xmlns:a16="http://schemas.microsoft.com/office/drawing/2014/main" id="{E92474A8-0D60-A379-C595-D92B302236B5}"/>
+              </a:ext>
+            </a:extLst>
+          </p:cNvPr>
+          <p:cNvCxnSpPr>
+            <a:cxnSpLocks/>
+          </p:cNvCxnSpPr>
+          <p:nvPr/>
+        </p:nvCxnSpPr>
+        <p:spPr>
+          <a:xfrm>
+            <a:off x="6858000" y="3916017"/>
+            <a:ext cx="2622612" cy="0"/>
+          </a:xfrm>
+          <a:prstGeom prst="line">
+            <a:avLst/>
+          </a:prstGeom>
+        </p:spPr>
+        <p:style>
+          <a:lnRef idx="2">
+            <a:schemeClr val="dk1"/>
+          </a:lnRef>
+          <a:fillRef idx="0">
+            <a:schemeClr val="dk1"/>
+          </a:fillRef>
+          <a:effectRef idx="1">
+            <a:schemeClr val="dk1"/>
+          </a:effectRef>
+          <a:fontRef idx="minor">
+            <a:schemeClr val="tx1"/>
+          </a:fontRef>
+        </p:style>
+      </p:cxnSp>
+      <p:sp>
+        <p:nvSpPr>
+          <p:cNvPr id="13" name="Textfeld 12">
+            <a:extLst>
+              <a:ext uri="{FF2B5EF4-FFF2-40B4-BE49-F238E27FC236}">
+                <a16:creationId xmlns:a16="http://schemas.microsoft.com/office/drawing/2014/main" id="{B1669DC8-B72D-8135-5003-9A08C7138DAC}"/>
+              </a:ext>
+            </a:extLst>
+          </p:cNvPr>
+          <p:cNvSpPr txBox="1"/>
+          <p:nvPr/>
+        </p:nvSpPr>
+        <p:spPr>
+          <a:xfrm>
+            <a:off x="8721739" y="3620256"/>
+            <a:ext cx="622286" cy="369332"/>
+          </a:xfrm>
+          <a:prstGeom prst="rect">
+            <a:avLst/>
+          </a:prstGeom>
+          <a:noFill/>
+        </p:spPr>
+        <p:txBody>
+          <a:bodyPr wrap="none" rtlCol="0">
+            <a:spAutoFit/>
+          </a:bodyPr>
+          <a:lstStyle/>
+          <a:p>
+            <a:r>
+              <a:rPr lang="de-DE" dirty="0"/>
+              <a:t>63%</a:t>
+            </a:r>
+          </a:p>
+        </p:txBody>
+      </p:sp>
+      <mc:AlternateContent xmlns:mc="http://schemas.openxmlformats.org/markup-compatibility/2006" xmlns:a14="http://schemas.microsoft.com/office/drawing/2010/main">
+        <mc:Choice Requires="a14">
+          <p:sp>
+            <p:nvSpPr>
+              <p:cNvPr id="15" name="Textfeld 14">
+                <a:extLst>
+                  <a:ext uri="{FF2B5EF4-FFF2-40B4-BE49-F238E27FC236}">
+                    <a16:creationId xmlns:a16="http://schemas.microsoft.com/office/drawing/2014/main" id="{3B801FC8-1B2F-DC15-E05C-25850766135A}"/>
+                  </a:ext>
+                </a:extLst>
+              </p:cNvPr>
+              <p:cNvSpPr txBox="1"/>
+              <p:nvPr/>
+            </p:nvSpPr>
+            <p:spPr>
+              <a:xfrm>
+                <a:off x="7640974" y="5391186"/>
+                <a:ext cx="385536" cy="369332"/>
+              </a:xfrm>
+              <a:prstGeom prst="rect">
+                <a:avLst/>
+              </a:prstGeom>
+              <a:noFill/>
+            </p:spPr>
+            <p:txBody>
+              <a:bodyPr wrap="square">
+                <a:spAutoFit/>
+              </a:bodyPr>
+              <a:lstStyle/>
+              <a:p>
+                <a:pPr/>
+                <a14:m>
+                  <m:oMathPara xmlns:m="http://schemas.openxmlformats.org/officeDocument/2006/math">
+                    <m:oMathParaPr>
+                      <m:jc m:val="centerGroup"/>
+                    </m:oMathParaPr>
+                    <m:oMath xmlns:m="http://schemas.openxmlformats.org/officeDocument/2006/math">
+                      <m:r>
+                        <a:rPr lang="el-GR" i="1" smtClean="0">
+                          <a:latin typeface="Cambria Math" panose="02040503050406030204" pitchFamily="18" charset="0"/>
+                          <a:ea typeface="Cambria Math" panose="02040503050406030204" pitchFamily="18" charset="0"/>
+                        </a:rPr>
+                        <m:t>𝜏</m:t>
+                      </m:r>
+                    </m:oMath>
+                  </m:oMathPara>
+                </a14:m>
+                <a:endParaRPr lang="de-DE" dirty="0"/>
+              </a:p>
+            </p:txBody>
+          </p:sp>
+        </mc:Choice>
+        <mc:Fallback xmlns="">
+          <p:sp>
+            <p:nvSpPr>
+              <p:cNvPr id="15" name="Textfeld 14">
+                <a:extLst>
+                  <a:ext uri="{FF2B5EF4-FFF2-40B4-BE49-F238E27FC236}">
+                    <a16:creationId xmlns:a16="http://schemas.microsoft.com/office/drawing/2014/main" id="{3B801FC8-1B2F-DC15-E05C-25850766135A}"/>
+                  </a:ext>
+                </a:extLst>
+              </p:cNvPr>
+              <p:cNvSpPr txBox="1">
+                <a:spLocks noRot="1" noChangeAspect="1" noMove="1" noResize="1" noEditPoints="1" noAdjustHandles="1" noChangeArrowheads="1" noChangeShapeType="1" noTextEdit="1"/>
+              </p:cNvSpPr>
+              <p:nvPr/>
+            </p:nvSpPr>
+            <p:spPr>
+              <a:xfrm>
+                <a:off x="7640974" y="5391186"/>
+                <a:ext cx="385536" cy="369332"/>
+              </a:xfrm>
+              <a:prstGeom prst="rect">
+                <a:avLst/>
+              </a:prstGeom>
+              <a:blipFill>
+                <a:blip r:embed="rId6"/>
+                <a:stretch>
+                  <a:fillRect/>
+                </a:stretch>
+              </a:blipFill>
+            </p:spPr>
+            <p:txBody>
+              <a:bodyPr/>
+              <a:lstStyle/>
+              <a:p>
+                <a:r>
+                  <a:rPr lang="de-DE">
+                    <a:noFill/>
+                  </a:rPr>
+                  <a:t> </a:t>
+                </a:r>
+              </a:p>
+            </p:txBody>
+          </p:sp>
+        </mc:Fallback>
+      </mc:AlternateContent>
+      <p:cxnSp>
+        <p:nvCxnSpPr>
+          <p:cNvPr id="17" name="Gerade Verbindung 16">
+            <a:extLst>
+              <a:ext uri="{FF2B5EF4-FFF2-40B4-BE49-F238E27FC236}">
+                <a16:creationId xmlns:a16="http://schemas.microsoft.com/office/drawing/2014/main" id="{272F4846-875F-7812-2E6C-15E025F60CB5}"/>
+              </a:ext>
+            </a:extLst>
+          </p:cNvPr>
+          <p:cNvCxnSpPr>
+            <a:cxnSpLocks/>
+          </p:cNvCxnSpPr>
+          <p:nvPr/>
+        </p:nvCxnSpPr>
+        <p:spPr>
+          <a:xfrm>
+            <a:off x="7742583" y="3955773"/>
+            <a:ext cx="0" cy="1844501"/>
+          </a:xfrm>
+          <a:prstGeom prst="line">
+            <a:avLst/>
+          </a:prstGeom>
+          <a:ln>
+            <a:prstDash val="dash"/>
+          </a:ln>
+        </p:spPr>
+        <p:style>
+          <a:lnRef idx="2">
+            <a:schemeClr val="dk1"/>
+          </a:lnRef>
+          <a:fillRef idx="0">
+            <a:schemeClr val="dk1"/>
+          </a:fillRef>
+          <a:effectRef idx="1">
+            <a:schemeClr val="dk1"/>
+          </a:effectRef>
+          <a:fontRef idx="minor">
+            <a:schemeClr val="tx1"/>
+          </a:fontRef>
+        </p:style>
+      </p:cxnSp>
     </p:spTree>
     <p:extLst>
       <p:ext uri="{BB962C8B-B14F-4D97-AF65-F5344CB8AC3E}">
@@ -7146,7 +8806,7 @@
 </p:sld>
 </file>
 
-<file path=ppt/slides/slide14.xml><?xml version="1.0" encoding="utf-8"?>
+<file path=ppt/slides/slide15.xml><?xml version="1.0" encoding="utf-8"?>
 <p:sld xmlns:a="http://schemas.openxmlformats.org/drawingml/2006/main" xmlns:r="http://schemas.openxmlformats.org/officeDocument/2006/relationships" xmlns:p="http://schemas.openxmlformats.org/presentationml/2006/main">
   <p:cSld>
     <p:spTree>
@@ -7218,7 +8878,7 @@
           <a:p>
             <a:fld id="{08C366F5-AFAD-49CB-854A-9D9E238FCA13}" type="slidenum">
               <a:rPr lang="en-GB" smtClean="0"/>
-              <a:t>14</a:t>
+              <a:t>15</a:t>
             </a:fld>
             <a:endParaRPr lang="en-GB"/>
           </a:p>
@@ -7260,6 +8920,103 @@
           </a:prstGeom>
         </p:spPr>
       </p:pic>
+      <mc:AlternateContent xmlns:mc="http://schemas.openxmlformats.org/markup-compatibility/2006" xmlns:a14="http://schemas.microsoft.com/office/drawing/2010/main">
+        <mc:Choice Requires="a14">
+          <p:sp>
+            <p:nvSpPr>
+              <p:cNvPr id="3" name="Textfeld 2">
+                <a:extLst>
+                  <a:ext uri="{FF2B5EF4-FFF2-40B4-BE49-F238E27FC236}">
+                    <a16:creationId xmlns:a16="http://schemas.microsoft.com/office/drawing/2014/main" id="{9F883B8F-F678-2F50-86EA-A4A6581D0514}"/>
+                  </a:ext>
+                </a:extLst>
+              </p:cNvPr>
+              <p:cNvSpPr txBox="1"/>
+              <p:nvPr/>
+            </p:nvSpPr>
+            <p:spPr>
+              <a:xfrm>
+                <a:off x="5464304" y="5833130"/>
+                <a:ext cx="385536" cy="523220"/>
+              </a:xfrm>
+              <a:prstGeom prst="rect">
+                <a:avLst/>
+              </a:prstGeom>
+              <a:noFill/>
+            </p:spPr>
+            <p:txBody>
+              <a:bodyPr wrap="square">
+                <a:spAutoFit/>
+              </a:bodyPr>
+              <a:lstStyle/>
+              <a:p>
+                <a:pPr/>
+                <a14:m>
+                  <m:oMathPara xmlns:m="http://schemas.openxmlformats.org/officeDocument/2006/math">
+                    <m:oMathParaPr>
+                      <m:jc m:val="centerGroup"/>
+                    </m:oMathParaPr>
+                    <m:oMath xmlns:m="http://schemas.openxmlformats.org/officeDocument/2006/math">
+                      <m:r>
+                        <a:rPr lang="el-GR" sz="2800" i="1" smtClean="0">
+                          <a:latin typeface="Cambria Math" panose="02040503050406030204" pitchFamily="18" charset="0"/>
+                          <a:ea typeface="Cambria Math" panose="02040503050406030204" pitchFamily="18" charset="0"/>
+                        </a:rPr>
+                        <m:t>𝜏</m:t>
+                      </m:r>
+                    </m:oMath>
+                  </m:oMathPara>
+                </a14:m>
+                <a:endParaRPr lang="de-DE" sz="2800" dirty="0"/>
+              </a:p>
+            </p:txBody>
+          </p:sp>
+        </mc:Choice>
+        <mc:Fallback xmlns="">
+          <p:sp>
+            <p:nvSpPr>
+              <p:cNvPr id="3" name="Textfeld 2">
+                <a:extLst>
+                  <a:ext uri="{FF2B5EF4-FFF2-40B4-BE49-F238E27FC236}">
+                    <a16:creationId xmlns:a16="http://schemas.microsoft.com/office/drawing/2014/main" id="{9F883B8F-F678-2F50-86EA-A4A6581D0514}"/>
+                  </a:ext>
+                </a:extLst>
+              </p:cNvPr>
+              <p:cNvSpPr txBox="1">
+                <a:spLocks noRot="1" noChangeAspect="1" noMove="1" noResize="1" noEditPoints="1" noAdjustHandles="1" noChangeArrowheads="1" noChangeShapeType="1" noTextEdit="1"/>
+              </p:cNvSpPr>
+              <p:nvPr/>
+            </p:nvSpPr>
+            <p:spPr>
+              <a:xfrm>
+                <a:off x="5464304" y="5833130"/>
+                <a:ext cx="385536" cy="523220"/>
+              </a:xfrm>
+              <a:prstGeom prst="rect">
+                <a:avLst/>
+              </a:prstGeom>
+              <a:blipFill>
+                <a:blip r:embed="rId3"/>
+                <a:stretch>
+                  <a:fillRect/>
+                </a:stretch>
+              </a:blipFill>
+            </p:spPr>
+            <p:txBody>
+              <a:bodyPr/>
+              <a:lstStyle/>
+              <a:p>
+                <a:r>
+                  <a:rPr lang="de-DE">
+                    <a:noFill/>
+                  </a:rPr>
+                  <a:t> </a:t>
+                </a:r>
+              </a:p>
+            </p:txBody>
+          </p:sp>
+        </mc:Fallback>
+      </mc:AlternateContent>
     </p:spTree>
     <p:extLst>
       <p:ext uri="{BB962C8B-B14F-4D97-AF65-F5344CB8AC3E}">
@@ -7273,7 +9030,7 @@
 </p:sld>
 </file>
 
-<file path=ppt/slides/slide15.xml><?xml version="1.0" encoding="utf-8"?>
+<file path=ppt/slides/slide16.xml><?xml version="1.0" encoding="utf-8"?>
 <p:sld xmlns:a="http://schemas.openxmlformats.org/drawingml/2006/main" xmlns:r="http://schemas.openxmlformats.org/officeDocument/2006/relationships" xmlns:p="http://schemas.openxmlformats.org/presentationml/2006/main">
   <p:cSld>
     <p:spTree>
@@ -8177,7 +9934,7 @@
           <a:p>
             <a:fld id="{08C366F5-AFAD-49CB-854A-9D9E238FCA13}" type="slidenum">
               <a:rPr lang="en-GB" smtClean="0"/>
-              <a:t>15</a:t>
+              <a:t>16</a:t>
             </a:fld>
             <a:endParaRPr lang="en-GB"/>
           </a:p>
@@ -8489,7 +10246,7 @@
 </p:sld>
 </file>
 
-<file path=ppt/slides/slide16.xml><?xml version="1.0" encoding="utf-8"?>
+<file path=ppt/slides/slide17.xml><?xml version="1.0" encoding="utf-8"?>
 <p:sld xmlns:a="http://schemas.openxmlformats.org/drawingml/2006/main" xmlns:r="http://schemas.openxmlformats.org/officeDocument/2006/relationships" xmlns:p="http://schemas.openxmlformats.org/presentationml/2006/main">
   <p:cSld>
     <p:spTree>
@@ -9750,7 +11507,7 @@
           <a:p>
             <a:fld id="{08C366F5-AFAD-49CB-854A-9D9E238FCA13}" type="slidenum">
               <a:rPr lang="en-GB" smtClean="0"/>
-              <a:t>16</a:t>
+              <a:t>17</a:t>
             </a:fld>
             <a:endParaRPr lang="en-GB"/>
           </a:p>
@@ -9769,7 +11526,7 @@
 </p:sld>
 </file>
 
-<file path=ppt/slides/slide17.xml><?xml version="1.0" encoding="utf-8"?>
+<file path=ppt/slides/slide18.xml><?xml version="1.0" encoding="utf-8"?>
 <p:sld xmlns:a="http://schemas.openxmlformats.org/drawingml/2006/main" xmlns:r="http://schemas.openxmlformats.org/officeDocument/2006/relationships" xmlns:p="http://schemas.openxmlformats.org/presentationml/2006/main">
   <p:cSld>
     <p:spTree>
@@ -10225,7 +11982,7 @@
           <a:p>
             <a:fld id="{08C366F5-AFAD-49CB-854A-9D9E238FCA13}" type="slidenum">
               <a:rPr lang="en-GB" smtClean="0"/>
-              <a:t>17</a:t>
+              <a:t>18</a:t>
             </a:fld>
             <a:endParaRPr lang="en-GB"/>
           </a:p>
@@ -10815,7 +12572,7 @@
 </p:sld>
 </file>
 
-<file path=ppt/slides/slide18.xml><?xml version="1.0" encoding="utf-8"?>
+<file path=ppt/slides/slide19.xml><?xml version="1.0" encoding="utf-8"?>
 <p:sld xmlns:a="http://schemas.openxmlformats.org/drawingml/2006/main" xmlns:r="http://schemas.openxmlformats.org/officeDocument/2006/relationships" xmlns:p="http://schemas.openxmlformats.org/presentationml/2006/main">
   <p:cSld>
     <p:spTree>
@@ -11278,7 +13035,7 @@
           <a:p>
             <a:fld id="{08C366F5-AFAD-49CB-854A-9D9E238FCA13}" type="slidenum">
               <a:rPr lang="en-GB" smtClean="0"/>
-              <a:t>18</a:t>
+              <a:t>19</a:t>
             </a:fld>
             <a:endParaRPr lang="en-GB"/>
           </a:p>
@@ -11297,7 +13054,286 @@
 </p:sld>
 </file>
 
-<file path=ppt/slides/slide19.xml><?xml version="1.0" encoding="utf-8"?>
+<file path=ppt/slides/slide2.xml><?xml version="1.0" encoding="utf-8"?>
+<p:sld xmlns:a="http://schemas.openxmlformats.org/drawingml/2006/main" xmlns:r="http://schemas.openxmlformats.org/officeDocument/2006/relationships" xmlns:p="http://schemas.openxmlformats.org/presentationml/2006/main">
+  <p:cSld>
+    <p:spTree>
+      <p:nvGrpSpPr>
+        <p:cNvPr id="1" name=""/>
+        <p:cNvGrpSpPr/>
+        <p:nvPr/>
+      </p:nvGrpSpPr>
+      <p:grpSpPr>
+        <a:xfrm>
+          <a:off x="0" y="0"/>
+          <a:ext cx="0" cy="0"/>
+          <a:chOff x="0" y="0"/>
+          <a:chExt cx="0" cy="0"/>
+        </a:xfrm>
+      </p:grpSpPr>
+      <p:sp>
+        <p:nvSpPr>
+          <p:cNvPr id="4" name="Title 3">
+            <a:extLst>
+              <a:ext uri="{FF2B5EF4-FFF2-40B4-BE49-F238E27FC236}">
+                <a16:creationId xmlns:a16="http://schemas.microsoft.com/office/drawing/2014/main" id="{080AD447-446B-E09E-6F4A-522C1DBB462E}"/>
+              </a:ext>
+            </a:extLst>
+          </p:cNvPr>
+          <p:cNvSpPr>
+            <a:spLocks noGrp="1"/>
+          </p:cNvSpPr>
+          <p:nvPr>
+            <p:ph type="title"/>
+          </p:nvPr>
+        </p:nvSpPr>
+        <p:spPr/>
+        <p:txBody>
+          <a:bodyPr/>
+          <a:lstStyle/>
+          <a:p>
+            <a:r>
+              <a:rPr lang="en-GB" dirty="0"/>
+              <a:t>Course Schedule</a:t>
+            </a:r>
+          </a:p>
+        </p:txBody>
+      </p:sp>
+      <p:sp>
+        <p:nvSpPr>
+          <p:cNvPr id="6" name="Inhaltsplatzhalter 5">
+            <a:extLst>
+              <a:ext uri="{FF2B5EF4-FFF2-40B4-BE49-F238E27FC236}">
+                <a16:creationId xmlns:a16="http://schemas.microsoft.com/office/drawing/2014/main" id="{CF502483-E45D-7D7D-D169-ACA4F8327D26}"/>
+              </a:ext>
+            </a:extLst>
+          </p:cNvPr>
+          <p:cNvSpPr>
+            <a:spLocks noGrp="1"/>
+          </p:cNvSpPr>
+          <p:nvPr>
+            <p:ph sz="half" idx="1"/>
+          </p:nvPr>
+        </p:nvSpPr>
+        <p:spPr/>
+        <p:txBody>
+          <a:bodyPr>
+            <a:normAutofit/>
+          </a:bodyPr>
+          <a:lstStyle/>
+          <a:p>
+            <a:pPr marL="514350" indent="-514350">
+              <a:buFont typeface="+mj-lt"/>
+              <a:buAutoNum type="arabicPeriod"/>
+            </a:pPr>
+            <a:r>
+              <a:rPr lang="de-DE" dirty="0"/>
+              <a:t>Systems</a:t>
+            </a:r>
+          </a:p>
+          <a:p>
+            <a:pPr marL="514350" indent="-514350">
+              <a:buFont typeface="+mj-lt"/>
+              <a:buAutoNum type="arabicPeriod"/>
+            </a:pPr>
+            <a:endParaRPr lang="de-DE" dirty="0"/>
+          </a:p>
+          <a:p>
+            <a:pPr marL="514350" indent="-514350">
+              <a:buFont typeface="+mj-lt"/>
+              <a:buAutoNum type="arabicPeriod"/>
+            </a:pPr>
+            <a:r>
+              <a:rPr lang="de-DE" dirty="0" err="1"/>
+              <a:t>Continuous</a:t>
+            </a:r>
+            <a:r>
+              <a:rPr lang="de-DE" dirty="0"/>
+              <a:t>-time Controllers</a:t>
+            </a:r>
+          </a:p>
+          <a:p>
+            <a:pPr marL="514350" indent="-514350">
+              <a:buFont typeface="+mj-lt"/>
+              <a:buAutoNum type="arabicPeriod"/>
+            </a:pPr>
+            <a:endParaRPr lang="de-DE" dirty="0"/>
+          </a:p>
+          <a:p>
+            <a:pPr marL="514350" indent="-514350">
+              <a:buFont typeface="+mj-lt"/>
+              <a:buAutoNum type="arabicPeriod"/>
+            </a:pPr>
+            <a:r>
+              <a:rPr lang="de-DE" dirty="0"/>
+              <a:t>Laplace Domain</a:t>
+            </a:r>
+          </a:p>
+          <a:p>
+            <a:pPr marL="514350" indent="-514350">
+              <a:buFont typeface="+mj-lt"/>
+              <a:buAutoNum type="arabicPeriod"/>
+            </a:pPr>
+            <a:endParaRPr lang="de-DE" dirty="0"/>
+          </a:p>
+          <a:p>
+            <a:pPr marL="514350" indent="-514350">
+              <a:buFont typeface="+mj-lt"/>
+              <a:buAutoNum type="arabicPeriod"/>
+            </a:pPr>
+            <a:r>
+              <a:rPr lang="de-DE" dirty="0"/>
+              <a:t>Poles/Zeros &amp; </a:t>
+            </a:r>
+            <a:r>
+              <a:rPr lang="de-DE" dirty="0" err="1"/>
+              <a:t>Stability</a:t>
+            </a:r>
+            <a:endParaRPr lang="de-DE" dirty="0"/>
+          </a:p>
+        </p:txBody>
+      </p:sp>
+      <p:sp>
+        <p:nvSpPr>
+          <p:cNvPr id="7" name="Inhaltsplatzhalter 6">
+            <a:extLst>
+              <a:ext uri="{FF2B5EF4-FFF2-40B4-BE49-F238E27FC236}">
+                <a16:creationId xmlns:a16="http://schemas.microsoft.com/office/drawing/2014/main" id="{B671907E-FFFA-73EF-8E7D-4AB4EBDD957B}"/>
+              </a:ext>
+            </a:extLst>
+          </p:cNvPr>
+          <p:cNvSpPr>
+            <a:spLocks noGrp="1"/>
+          </p:cNvSpPr>
+          <p:nvPr>
+            <p:ph sz="half" idx="2"/>
+          </p:nvPr>
+        </p:nvSpPr>
+        <p:spPr/>
+        <p:txBody>
+          <a:bodyPr>
+            <a:normAutofit/>
+          </a:bodyPr>
+          <a:lstStyle/>
+          <a:p>
+            <a:pPr marL="514350" indent="-514350">
+              <a:buFont typeface="+mj-lt"/>
+              <a:buAutoNum type="arabicPeriod" startAt="5"/>
+            </a:pPr>
+            <a:r>
+              <a:rPr lang="de-DE" dirty="0"/>
+              <a:t>Controller Design</a:t>
+            </a:r>
+          </a:p>
+          <a:p>
+            <a:pPr marL="514350" indent="-514350">
+              <a:buFont typeface="+mj-lt"/>
+              <a:buAutoNum type="arabicPeriod" startAt="5"/>
+            </a:pPr>
+            <a:endParaRPr lang="de-DE" dirty="0"/>
+          </a:p>
+          <a:p>
+            <a:pPr marL="514350" indent="-514350">
+              <a:buFont typeface="+mj-lt"/>
+              <a:buAutoNum type="arabicPeriod" startAt="5"/>
+            </a:pPr>
+            <a:r>
+              <a:rPr lang="de-DE" dirty="0" err="1"/>
+              <a:t>Discrete</a:t>
+            </a:r>
+            <a:r>
+              <a:rPr lang="de-DE" dirty="0"/>
+              <a:t>-time Controllers</a:t>
+            </a:r>
+          </a:p>
+          <a:p>
+            <a:pPr marL="514350" indent="-514350">
+              <a:buFont typeface="+mj-lt"/>
+              <a:buAutoNum type="arabicPeriod" startAt="5"/>
+            </a:pPr>
+            <a:endParaRPr lang="de-DE" dirty="0"/>
+          </a:p>
+          <a:p>
+            <a:pPr marL="514350" indent="-514350">
+              <a:buFont typeface="+mj-lt"/>
+              <a:buAutoNum type="arabicPeriod" startAt="5"/>
+            </a:pPr>
+            <a:r>
+              <a:rPr lang="de-DE" dirty="0"/>
+              <a:t>State Space </a:t>
+            </a:r>
+            <a:r>
+              <a:rPr lang="de-DE" dirty="0" err="1"/>
+              <a:t>Representation</a:t>
+            </a:r>
+            <a:endParaRPr lang="de-DE" dirty="0"/>
+          </a:p>
+          <a:p>
+            <a:pPr marL="514350" indent="-514350">
+              <a:buFont typeface="+mj-lt"/>
+              <a:buAutoNum type="arabicPeriod" startAt="5"/>
+            </a:pPr>
+            <a:endParaRPr lang="de-DE" dirty="0"/>
+          </a:p>
+          <a:p>
+            <a:pPr marL="514350" indent="-514350">
+              <a:buFont typeface="+mj-lt"/>
+              <a:buAutoNum type="arabicPeriod" startAt="5"/>
+            </a:pPr>
+            <a:r>
+              <a:rPr lang="de-DE" dirty="0" err="1"/>
+              <a:t>Advanced</a:t>
+            </a:r>
+            <a:r>
+              <a:rPr lang="de-DE" dirty="0"/>
+              <a:t> Control Methods</a:t>
+            </a:r>
+          </a:p>
+        </p:txBody>
+      </p:sp>
+      <p:sp>
+        <p:nvSpPr>
+          <p:cNvPr id="3" name="Slide Number Placeholder 2">
+            <a:extLst>
+              <a:ext uri="{FF2B5EF4-FFF2-40B4-BE49-F238E27FC236}">
+                <a16:creationId xmlns:a16="http://schemas.microsoft.com/office/drawing/2014/main" id="{A0664D44-83AC-6A7A-17E0-C1AE2ED18FF5}"/>
+              </a:ext>
+            </a:extLst>
+          </p:cNvPr>
+          <p:cNvSpPr>
+            <a:spLocks noGrp="1"/>
+          </p:cNvSpPr>
+          <p:nvPr>
+            <p:ph type="sldNum" sz="quarter" idx="12"/>
+          </p:nvPr>
+        </p:nvSpPr>
+        <p:spPr/>
+        <p:txBody>
+          <a:bodyPr/>
+          <a:lstStyle/>
+          <a:p>
+            <a:fld id="{08C366F5-AFAD-49CB-854A-9D9E238FCA13}" type="slidenum">
+              <a:rPr lang="en-GB" smtClean="0"/>
+              <a:t>2</a:t>
+            </a:fld>
+            <a:endParaRPr lang="en-GB" dirty="0"/>
+          </a:p>
+        </p:txBody>
+      </p:sp>
+    </p:spTree>
+    <p:extLst>
+      <p:ext uri="{BB962C8B-B14F-4D97-AF65-F5344CB8AC3E}">
+        <p14:creationId xmlns:p14="http://schemas.microsoft.com/office/powerpoint/2010/main" val="310336692"/>
+      </p:ext>
+    </p:extLst>
+  </p:cSld>
+  <p:clrMapOvr>
+    <a:masterClrMapping/>
+  </p:clrMapOvr>
+</p:sld>
+</file>
+
+<file path=ppt/slides/slide20.xml><?xml version="1.0" encoding="utf-8"?>
 <p:sld xmlns:a="http://schemas.openxmlformats.org/drawingml/2006/main" xmlns:r="http://schemas.openxmlformats.org/officeDocument/2006/relationships" xmlns:p="http://schemas.openxmlformats.org/presentationml/2006/main">
   <p:cSld>
     <p:spTree>
@@ -11365,7 +13401,7 @@
           <a:p>
             <a:fld id="{9803FC7C-1F2C-4946-B702-1A52A755583B}" type="slidenum">
               <a:rPr lang="de-DE" smtClean="0"/>
-              <a:t>19</a:t>
+              <a:t>20</a:t>
             </a:fld>
             <a:endParaRPr lang="de-DE"/>
           </a:p>
@@ -13298,286 +15334,7 @@
 </p:sld>
 </file>
 
-<file path=ppt/slides/slide2.xml><?xml version="1.0" encoding="utf-8"?>
-<p:sld xmlns:a="http://schemas.openxmlformats.org/drawingml/2006/main" xmlns:r="http://schemas.openxmlformats.org/officeDocument/2006/relationships" xmlns:p="http://schemas.openxmlformats.org/presentationml/2006/main">
-  <p:cSld>
-    <p:spTree>
-      <p:nvGrpSpPr>
-        <p:cNvPr id="1" name=""/>
-        <p:cNvGrpSpPr/>
-        <p:nvPr/>
-      </p:nvGrpSpPr>
-      <p:grpSpPr>
-        <a:xfrm>
-          <a:off x="0" y="0"/>
-          <a:ext cx="0" cy="0"/>
-          <a:chOff x="0" y="0"/>
-          <a:chExt cx="0" cy="0"/>
-        </a:xfrm>
-      </p:grpSpPr>
-      <p:sp>
-        <p:nvSpPr>
-          <p:cNvPr id="4" name="Title 3">
-            <a:extLst>
-              <a:ext uri="{FF2B5EF4-FFF2-40B4-BE49-F238E27FC236}">
-                <a16:creationId xmlns:a16="http://schemas.microsoft.com/office/drawing/2014/main" id="{080AD447-446B-E09E-6F4A-522C1DBB462E}"/>
-              </a:ext>
-            </a:extLst>
-          </p:cNvPr>
-          <p:cNvSpPr>
-            <a:spLocks noGrp="1"/>
-          </p:cNvSpPr>
-          <p:nvPr>
-            <p:ph type="title"/>
-          </p:nvPr>
-        </p:nvSpPr>
-        <p:spPr/>
-        <p:txBody>
-          <a:bodyPr/>
-          <a:lstStyle/>
-          <a:p>
-            <a:r>
-              <a:rPr lang="en-GB" dirty="0"/>
-              <a:t>Course Schedule</a:t>
-            </a:r>
-          </a:p>
-        </p:txBody>
-      </p:sp>
-      <p:sp>
-        <p:nvSpPr>
-          <p:cNvPr id="6" name="Inhaltsplatzhalter 5">
-            <a:extLst>
-              <a:ext uri="{FF2B5EF4-FFF2-40B4-BE49-F238E27FC236}">
-                <a16:creationId xmlns:a16="http://schemas.microsoft.com/office/drawing/2014/main" id="{CF502483-E45D-7D7D-D169-ACA4F8327D26}"/>
-              </a:ext>
-            </a:extLst>
-          </p:cNvPr>
-          <p:cNvSpPr>
-            <a:spLocks noGrp="1"/>
-          </p:cNvSpPr>
-          <p:nvPr>
-            <p:ph sz="half" idx="1"/>
-          </p:nvPr>
-        </p:nvSpPr>
-        <p:spPr/>
-        <p:txBody>
-          <a:bodyPr>
-            <a:normAutofit/>
-          </a:bodyPr>
-          <a:lstStyle/>
-          <a:p>
-            <a:pPr marL="514350" indent="-514350">
-              <a:buFont typeface="+mj-lt"/>
-              <a:buAutoNum type="arabicPeriod"/>
-            </a:pPr>
-            <a:r>
-              <a:rPr lang="de-DE" dirty="0"/>
-              <a:t>Systems</a:t>
-            </a:r>
-          </a:p>
-          <a:p>
-            <a:pPr marL="514350" indent="-514350">
-              <a:buFont typeface="+mj-lt"/>
-              <a:buAutoNum type="arabicPeriod"/>
-            </a:pPr>
-            <a:endParaRPr lang="de-DE" dirty="0"/>
-          </a:p>
-          <a:p>
-            <a:pPr marL="514350" indent="-514350">
-              <a:buFont typeface="+mj-lt"/>
-              <a:buAutoNum type="arabicPeriod"/>
-            </a:pPr>
-            <a:r>
-              <a:rPr lang="de-DE" dirty="0" err="1"/>
-              <a:t>Continuous</a:t>
-            </a:r>
-            <a:r>
-              <a:rPr lang="de-DE" dirty="0"/>
-              <a:t>-time Controllers</a:t>
-            </a:r>
-          </a:p>
-          <a:p>
-            <a:pPr marL="514350" indent="-514350">
-              <a:buFont typeface="+mj-lt"/>
-              <a:buAutoNum type="arabicPeriod"/>
-            </a:pPr>
-            <a:endParaRPr lang="de-DE" dirty="0"/>
-          </a:p>
-          <a:p>
-            <a:pPr marL="514350" indent="-514350">
-              <a:buFont typeface="+mj-lt"/>
-              <a:buAutoNum type="arabicPeriod"/>
-            </a:pPr>
-            <a:r>
-              <a:rPr lang="de-DE" dirty="0"/>
-              <a:t>Laplace Domain</a:t>
-            </a:r>
-          </a:p>
-          <a:p>
-            <a:pPr marL="514350" indent="-514350">
-              <a:buFont typeface="+mj-lt"/>
-              <a:buAutoNum type="arabicPeriod"/>
-            </a:pPr>
-            <a:endParaRPr lang="de-DE" dirty="0"/>
-          </a:p>
-          <a:p>
-            <a:pPr marL="514350" indent="-514350">
-              <a:buFont typeface="+mj-lt"/>
-              <a:buAutoNum type="arabicPeriod"/>
-            </a:pPr>
-            <a:r>
-              <a:rPr lang="de-DE" dirty="0"/>
-              <a:t>Poles/Zeros &amp; </a:t>
-            </a:r>
-            <a:r>
-              <a:rPr lang="de-DE" dirty="0" err="1"/>
-              <a:t>Stability</a:t>
-            </a:r>
-            <a:endParaRPr lang="de-DE" dirty="0"/>
-          </a:p>
-        </p:txBody>
-      </p:sp>
-      <p:sp>
-        <p:nvSpPr>
-          <p:cNvPr id="7" name="Inhaltsplatzhalter 6">
-            <a:extLst>
-              <a:ext uri="{FF2B5EF4-FFF2-40B4-BE49-F238E27FC236}">
-                <a16:creationId xmlns:a16="http://schemas.microsoft.com/office/drawing/2014/main" id="{B671907E-FFFA-73EF-8E7D-4AB4EBDD957B}"/>
-              </a:ext>
-            </a:extLst>
-          </p:cNvPr>
-          <p:cNvSpPr>
-            <a:spLocks noGrp="1"/>
-          </p:cNvSpPr>
-          <p:nvPr>
-            <p:ph sz="half" idx="2"/>
-          </p:nvPr>
-        </p:nvSpPr>
-        <p:spPr/>
-        <p:txBody>
-          <a:bodyPr>
-            <a:normAutofit/>
-          </a:bodyPr>
-          <a:lstStyle/>
-          <a:p>
-            <a:pPr marL="514350" indent="-514350">
-              <a:buFont typeface="+mj-lt"/>
-              <a:buAutoNum type="arabicPeriod" startAt="5"/>
-            </a:pPr>
-            <a:r>
-              <a:rPr lang="de-DE" dirty="0"/>
-              <a:t>Controller Design</a:t>
-            </a:r>
-          </a:p>
-          <a:p>
-            <a:pPr marL="514350" indent="-514350">
-              <a:buFont typeface="+mj-lt"/>
-              <a:buAutoNum type="arabicPeriod" startAt="5"/>
-            </a:pPr>
-            <a:endParaRPr lang="de-DE" dirty="0"/>
-          </a:p>
-          <a:p>
-            <a:pPr marL="514350" indent="-514350">
-              <a:buFont typeface="+mj-lt"/>
-              <a:buAutoNum type="arabicPeriod" startAt="5"/>
-            </a:pPr>
-            <a:r>
-              <a:rPr lang="de-DE" dirty="0" err="1"/>
-              <a:t>Discrete</a:t>
-            </a:r>
-            <a:r>
-              <a:rPr lang="de-DE" dirty="0"/>
-              <a:t>-time Controllers</a:t>
-            </a:r>
-          </a:p>
-          <a:p>
-            <a:pPr marL="514350" indent="-514350">
-              <a:buFont typeface="+mj-lt"/>
-              <a:buAutoNum type="arabicPeriod" startAt="5"/>
-            </a:pPr>
-            <a:endParaRPr lang="de-DE" dirty="0"/>
-          </a:p>
-          <a:p>
-            <a:pPr marL="514350" indent="-514350">
-              <a:buFont typeface="+mj-lt"/>
-              <a:buAutoNum type="arabicPeriod" startAt="5"/>
-            </a:pPr>
-            <a:r>
-              <a:rPr lang="de-DE" dirty="0"/>
-              <a:t>State Space </a:t>
-            </a:r>
-            <a:r>
-              <a:rPr lang="de-DE" dirty="0" err="1"/>
-              <a:t>Representation</a:t>
-            </a:r>
-            <a:endParaRPr lang="de-DE" dirty="0"/>
-          </a:p>
-          <a:p>
-            <a:pPr marL="514350" indent="-514350">
-              <a:buFont typeface="+mj-lt"/>
-              <a:buAutoNum type="arabicPeriod" startAt="5"/>
-            </a:pPr>
-            <a:endParaRPr lang="de-DE" dirty="0"/>
-          </a:p>
-          <a:p>
-            <a:pPr marL="514350" indent="-514350">
-              <a:buFont typeface="+mj-lt"/>
-              <a:buAutoNum type="arabicPeriod" startAt="5"/>
-            </a:pPr>
-            <a:r>
-              <a:rPr lang="de-DE" dirty="0" err="1"/>
-              <a:t>Advanced</a:t>
-            </a:r>
-            <a:r>
-              <a:rPr lang="de-DE" dirty="0"/>
-              <a:t> Control Methods</a:t>
-            </a:r>
-          </a:p>
-        </p:txBody>
-      </p:sp>
-      <p:sp>
-        <p:nvSpPr>
-          <p:cNvPr id="3" name="Slide Number Placeholder 2">
-            <a:extLst>
-              <a:ext uri="{FF2B5EF4-FFF2-40B4-BE49-F238E27FC236}">
-                <a16:creationId xmlns:a16="http://schemas.microsoft.com/office/drawing/2014/main" id="{A0664D44-83AC-6A7A-17E0-C1AE2ED18FF5}"/>
-              </a:ext>
-            </a:extLst>
-          </p:cNvPr>
-          <p:cNvSpPr>
-            <a:spLocks noGrp="1"/>
-          </p:cNvSpPr>
-          <p:nvPr>
-            <p:ph type="sldNum" sz="quarter" idx="12"/>
-          </p:nvPr>
-        </p:nvSpPr>
-        <p:spPr/>
-        <p:txBody>
-          <a:bodyPr/>
-          <a:lstStyle/>
-          <a:p>
-            <a:fld id="{08C366F5-AFAD-49CB-854A-9D9E238FCA13}" type="slidenum">
-              <a:rPr lang="en-GB" smtClean="0"/>
-              <a:t>2</a:t>
-            </a:fld>
-            <a:endParaRPr lang="en-GB" dirty="0"/>
-          </a:p>
-        </p:txBody>
-      </p:sp>
-    </p:spTree>
-    <p:extLst>
-      <p:ext uri="{BB962C8B-B14F-4D97-AF65-F5344CB8AC3E}">
-        <p14:creationId xmlns:p14="http://schemas.microsoft.com/office/powerpoint/2010/main" val="310336692"/>
-      </p:ext>
-    </p:extLst>
-  </p:cSld>
-  <p:clrMapOvr>
-    <a:masterClrMapping/>
-  </p:clrMapOvr>
-</p:sld>
-</file>
-
-<file path=ppt/slides/slide20.xml><?xml version="1.0" encoding="utf-8"?>
+<file path=ppt/slides/slide21.xml><?xml version="1.0" encoding="utf-8"?>
 <p:sld xmlns:a="http://schemas.openxmlformats.org/drawingml/2006/main" xmlns:r="http://schemas.openxmlformats.org/officeDocument/2006/relationships" xmlns:p="http://schemas.openxmlformats.org/presentationml/2006/main">
   <p:cSld>
     <p:spTree>
@@ -13645,7 +15402,7 @@
           <a:p>
             <a:fld id="{9803FC7C-1F2C-4946-B702-1A52A755583B}" type="slidenum">
               <a:rPr lang="de-DE" smtClean="0"/>
-              <a:t>20</a:t>
+              <a:t>21</a:t>
             </a:fld>
             <a:endParaRPr lang="de-DE"/>
           </a:p>
@@ -14924,7 +16681,7 @@
 </p:sld>
 </file>
 
-<file path=ppt/slides/slide21.xml><?xml version="1.0" encoding="utf-8"?>
+<file path=ppt/slides/slide22.xml><?xml version="1.0" encoding="utf-8"?>
 <p:sld xmlns:a="http://schemas.openxmlformats.org/drawingml/2006/main" xmlns:r="http://schemas.openxmlformats.org/officeDocument/2006/relationships" xmlns:p="http://schemas.openxmlformats.org/presentationml/2006/main">
   <p:cSld>
     <p:spTree>
@@ -14998,7 +16755,7 @@
           <a:p>
             <a:fld id="{9803FC7C-1F2C-4946-B702-1A52A755583B}" type="slidenum">
               <a:rPr lang="de-DE" smtClean="0"/>
-              <a:t>21</a:t>
+              <a:t>22</a:t>
             </a:fld>
             <a:endParaRPr lang="de-DE"/>
           </a:p>
@@ -16770,7 +18527,7 @@
 </p:sld>
 </file>
 
-<file path=ppt/slides/slide22.xml><?xml version="1.0" encoding="utf-8"?>
+<file path=ppt/slides/slide23.xml><?xml version="1.0" encoding="utf-8"?>
 <p:sld xmlns:a="http://schemas.openxmlformats.org/drawingml/2006/main" xmlns:r="http://schemas.openxmlformats.org/officeDocument/2006/relationships" xmlns:p="http://schemas.openxmlformats.org/presentationml/2006/main">
   <p:cSld>
     <p:spTree>
@@ -17503,7 +19260,7 @@
           <a:p>
             <a:fld id="{08C366F5-AFAD-49CB-854A-9D9E238FCA13}" type="slidenum">
               <a:rPr lang="en-GB" smtClean="0"/>
-              <a:t>22</a:t>
+              <a:t>23</a:t>
             </a:fld>
             <a:endParaRPr lang="en-GB"/>
           </a:p>
@@ -17948,10 +19705,101 @@
           </a:p>
         </p:txBody>
       </p:sp>
+      <p:sp>
+        <p:nvSpPr>
+          <p:cNvPr id="6" name="Textfeld 5">
+            <a:extLst>
+              <a:ext uri="{FF2B5EF4-FFF2-40B4-BE49-F238E27FC236}">
+                <a16:creationId xmlns:a16="http://schemas.microsoft.com/office/drawing/2014/main" id="{620181E0-59B5-360F-5C78-FB120AC905D1}"/>
+              </a:ext>
+            </a:extLst>
+          </p:cNvPr>
+          <p:cNvSpPr txBox="1"/>
+          <p:nvPr/>
+        </p:nvSpPr>
+        <p:spPr>
+          <a:xfrm>
+            <a:off x="7943898" y="140852"/>
+            <a:ext cx="4084516" cy="707886"/>
+          </a:xfrm>
+          <a:prstGeom prst="rect">
+            <a:avLst/>
+          </a:prstGeom>
+          <a:noFill/>
+          <a:ln>
+            <a:solidFill>
+              <a:schemeClr val="tx1"/>
+            </a:solidFill>
+          </a:ln>
+        </p:spPr>
+        <p:txBody>
+          <a:bodyPr wrap="none" rtlCol="0">
+            <a:spAutoFit/>
+          </a:bodyPr>
+          <a:lstStyle/>
+          <a:p>
+            <a:r>
+              <a:rPr lang="de-DE" sz="2000" dirty="0"/>
+              <a:t>Series </a:t>
+            </a:r>
+            <a:r>
+              <a:rPr lang="de-DE" sz="2000" dirty="0" err="1"/>
+              <a:t>connection</a:t>
+            </a:r>
+            <a:r>
+              <a:rPr lang="de-DE" sz="2000" dirty="0"/>
+              <a:t> </a:t>
+            </a:r>
+            <a:r>
+              <a:rPr lang="de-DE" sz="2000" dirty="0" err="1"/>
+              <a:t>of</a:t>
+            </a:r>
+            <a:r>
+              <a:rPr lang="de-DE" sz="2000" dirty="0"/>
+              <a:t> </a:t>
+            </a:r>
+            <a:r>
+              <a:rPr lang="de-DE" sz="2000" dirty="0" err="1"/>
+              <a:t>two</a:t>
+            </a:r>
+            <a:r>
+              <a:rPr lang="de-DE" sz="2000" dirty="0"/>
+              <a:t> PT1:</a:t>
+            </a:r>
+          </a:p>
+          <a:p>
+            <a:r>
+              <a:rPr lang="de-DE" sz="2000" dirty="0"/>
+              <a:t>Time </a:t>
+            </a:r>
+            <a:r>
+              <a:rPr lang="de-DE" sz="2000" dirty="0" err="1"/>
+              <a:t>constants</a:t>
+            </a:r>
+            <a:r>
+              <a:rPr lang="de-DE" sz="2000" dirty="0"/>
+              <a:t> </a:t>
+            </a:r>
+            <a:r>
+              <a:rPr lang="de-DE" sz="2000" dirty="0" err="1"/>
+              <a:t>determine</a:t>
+            </a:r>
+            <a:r>
+              <a:rPr lang="de-DE" sz="2000" dirty="0"/>
+              <a:t> </a:t>
+            </a:r>
+            <a:r>
+              <a:rPr lang="de-DE" sz="2000" dirty="0" err="1"/>
+              <a:t>behavior</a:t>
+            </a:r>
+            <a:endParaRPr lang="de-DE" sz="2000" dirty="0"/>
+          </a:p>
+        </p:txBody>
+      </p:sp>
     </p:spTree>
     <p:extLst>
       <p:ext uri="{BB962C8B-B14F-4D97-AF65-F5344CB8AC3E}">
-        <p14:creationId xmlns:p14="http://schemas.microsoft.com/office/powerpoint/2010/main" val="1216483348"/>
+        <p14:creationId xmlns:p14="http://schemas.microsoft.com/office/powerpoint/2010/main" val="2535768436"/>
       </p:ext>
     </p:extLst>
   </p:cSld>
@@ -17961,7 +19809,7 @@
 </p:sld>
 </file>
 
-<file path=ppt/slides/slide23.xml><?xml version="1.0" encoding="utf-8"?>
+<file path=ppt/slides/slide24.xml><?xml version="1.0" encoding="utf-8"?>
 <p:sld xmlns:a="http://schemas.openxmlformats.org/drawingml/2006/main" xmlns:r="http://schemas.openxmlformats.org/officeDocument/2006/relationships" xmlns:p="http://schemas.openxmlformats.org/presentationml/2006/main">
   <p:cSld>
     <p:spTree>
@@ -18717,7 +20565,7 @@
           <a:p>
             <a:fld id="{08C366F5-AFAD-49CB-854A-9D9E238FCA13}" type="slidenum">
               <a:rPr lang="en-GB" smtClean="0"/>
-              <a:t>23</a:t>
+              <a:t>24</a:t>
             </a:fld>
             <a:endParaRPr lang="en-GB"/>
           </a:p>
@@ -21287,7 +23135,7 @@
     </p:spTree>
     <p:extLst>
       <p:ext uri="{BB962C8B-B14F-4D97-AF65-F5344CB8AC3E}">
-        <p14:creationId xmlns:p14="http://schemas.microsoft.com/office/powerpoint/2010/main" val="1308056844"/>
+        <p14:creationId xmlns:p14="http://schemas.microsoft.com/office/powerpoint/2010/main" val="1363661981"/>
       </p:ext>
     </p:extLst>
   </p:cSld>
@@ -21297,7 +23145,7 @@
 </p:sld>
 </file>
 
-<file path=ppt/slides/slide24.xml><?xml version="1.0" encoding="utf-8"?>
+<file path=ppt/slides/slide25.xml><?xml version="1.0" encoding="utf-8"?>
 <p:sld xmlns:a="http://schemas.openxmlformats.org/drawingml/2006/main" xmlns:r="http://schemas.openxmlformats.org/officeDocument/2006/relationships" xmlns:p="http://schemas.openxmlformats.org/presentationml/2006/main">
   <p:cSld>
     <p:spTree>
@@ -24717,7 +26565,7 @@
           <a:p>
             <a:fld id="{08C366F5-AFAD-49CB-854A-9D9E238FCA13}" type="slidenum">
               <a:rPr lang="en-GB" smtClean="0"/>
-              <a:t>24</a:t>
+              <a:t>25</a:t>
             </a:fld>
             <a:endParaRPr lang="en-GB"/>
           </a:p>
@@ -24726,7 +26574,7 @@
     </p:spTree>
     <p:extLst>
       <p:ext uri="{BB962C8B-B14F-4D97-AF65-F5344CB8AC3E}">
-        <p14:creationId xmlns:p14="http://schemas.microsoft.com/office/powerpoint/2010/main" val="4077757168"/>
+        <p14:creationId xmlns:p14="http://schemas.microsoft.com/office/powerpoint/2010/main" val="2584190322"/>
       </p:ext>
     </p:extLst>
   </p:cSld>
@@ -24736,7 +26584,7 @@
 </p:sld>
 </file>
 
-<file path=ppt/slides/slide25.xml><?xml version="1.0" encoding="utf-8"?>
+<file path=ppt/slides/slide26.xml><?xml version="1.0" encoding="utf-8"?>
 <p:sld xmlns:a="http://schemas.openxmlformats.org/drawingml/2006/main" xmlns:r="http://schemas.openxmlformats.org/officeDocument/2006/relationships" xmlns:p="http://schemas.openxmlformats.org/presentationml/2006/main">
   <p:cSld>
     <p:spTree>
@@ -29598,7 +31446,7 @@
           <a:p>
             <a:fld id="{08C366F5-AFAD-49CB-854A-9D9E238FCA13}" type="slidenum">
               <a:rPr lang="en-GB" smtClean="0"/>
-              <a:t>25</a:t>
+              <a:t>26</a:t>
             </a:fld>
             <a:endParaRPr lang="en-GB"/>
           </a:p>
@@ -29607,7 +31455,7 @@
     </p:spTree>
     <p:extLst>
       <p:ext uri="{BB962C8B-B14F-4D97-AF65-F5344CB8AC3E}">
-        <p14:creationId xmlns:p14="http://schemas.microsoft.com/office/powerpoint/2010/main" val="2328534195"/>
+        <p14:creationId xmlns:p14="http://schemas.microsoft.com/office/powerpoint/2010/main" val="2670204945"/>
       </p:ext>
     </p:extLst>
   </p:cSld>
@@ -29617,7 +31465,7 @@
 </p:sld>
 </file>
 
-<file path=ppt/slides/slide26.xml><?xml version="1.0" encoding="utf-8"?>
+<file path=ppt/slides/slide27.xml><?xml version="1.0" encoding="utf-8"?>
 <p:sld xmlns:a="http://schemas.openxmlformats.org/drawingml/2006/main" xmlns:r="http://schemas.openxmlformats.org/officeDocument/2006/relationships" xmlns:p="http://schemas.openxmlformats.org/presentationml/2006/main">
   <p:cSld>
     <p:spTree>
@@ -30405,7 +32253,7 @@
           <a:p>
             <a:fld id="{08C366F5-AFAD-49CB-854A-9D9E238FCA13}" type="slidenum">
               <a:rPr lang="en-GB" smtClean="0"/>
-              <a:t>26</a:t>
+              <a:t>27</a:t>
             </a:fld>
             <a:endParaRPr lang="en-GB"/>
           </a:p>
@@ -30441,9 +32289,6 @@
               </a:bodyPr>
               <a:lstStyle/>
               <a:p>
-                <a:pPr marL="0" indent="0">
-                  <a:buNone/>
-                </a:pPr>
                 <a:r>
                   <a:rPr lang="de-DE" sz="2000" dirty="0">
                     <a:ea typeface="Cambria Math" panose="02040503050406030204" pitchFamily="18" charset="0"/>
@@ -30477,7 +32322,7 @@
                 <a14:m>
                   <m:oMath xmlns:m="http://schemas.openxmlformats.org/officeDocument/2006/math">
                     <m:r>
-                      <a:rPr lang="el-GR" sz="2000" i="1" smtClean="0">
+                      <a:rPr lang="el-GR" sz="2000" i="1">
                         <a:latin typeface="Cambria Math" panose="02040503050406030204" pitchFamily="18" charset="0"/>
                         <a:ea typeface="Cambria Math" panose="02040503050406030204" pitchFamily="18" charset="0"/>
                       </a:rPr>
@@ -30894,6 +32739,78 @@
           </a:p>
         </p:txBody>
       </p:sp>
+      <p:pic>
+        <p:nvPicPr>
+          <p:cNvPr id="9" name="Grafik 8" descr="Ein Bild, das Design enthält.&#10;&#10;KI-generierte Inhalte können fehlerhaft sein.">
+            <a:extLst>
+              <a:ext uri="{FF2B5EF4-FFF2-40B4-BE49-F238E27FC236}">
+                <a16:creationId xmlns:a16="http://schemas.microsoft.com/office/drawing/2014/main" id="{64E46781-3A36-0F13-09D1-3967E245B109}"/>
+              </a:ext>
+            </a:extLst>
+          </p:cNvPr>
+          <p:cNvPicPr>
+            <a:picLocks noChangeAspect="1"/>
+          </p:cNvPicPr>
+          <p:nvPr/>
+        </p:nvPicPr>
+        <p:blipFill>
+          <a:blip r:embed="rId5">
+            <a:extLst>
+              <a:ext uri="{28A0092B-C50C-407E-A947-70E740481C1C}">
+                <a14:useLocalDpi xmlns:a14="http://schemas.microsoft.com/office/drawing/2010/main" val="0"/>
+              </a:ext>
+            </a:extLst>
+          </a:blip>
+          <a:stretch>
+            <a:fillRect/>
+          </a:stretch>
+        </p:blipFill>
+        <p:spPr>
+          <a:xfrm rot="5400000" flipV="1">
+            <a:off x="6081566" y="2421128"/>
+            <a:ext cx="930617" cy="262800"/>
+          </a:xfrm>
+          <a:prstGeom prst="rect">
+            <a:avLst/>
+          </a:prstGeom>
+        </p:spPr>
+      </p:pic>
+      <p:pic>
+        <p:nvPicPr>
+          <p:cNvPr id="10" name="Grafik 9" descr="Ein Bild, das Design enthält.&#10;&#10;KI-generierte Inhalte können fehlerhaft sein.">
+            <a:extLst>
+              <a:ext uri="{FF2B5EF4-FFF2-40B4-BE49-F238E27FC236}">
+                <a16:creationId xmlns:a16="http://schemas.microsoft.com/office/drawing/2014/main" id="{F0EAE811-ED39-C7C3-AFF2-C1C967C13918}"/>
+              </a:ext>
+            </a:extLst>
+          </p:cNvPr>
+          <p:cNvPicPr>
+            <a:picLocks noChangeAspect="1"/>
+          </p:cNvPicPr>
+          <p:nvPr/>
+        </p:nvPicPr>
+        <p:blipFill>
+          <a:blip r:embed="rId5">
+            <a:extLst>
+              <a:ext uri="{28A0092B-C50C-407E-A947-70E740481C1C}">
+                <a14:useLocalDpi xmlns:a14="http://schemas.microsoft.com/office/drawing/2010/main" val="0"/>
+              </a:ext>
+            </a:extLst>
+          </a:blip>
+          <a:stretch>
+            <a:fillRect/>
+          </a:stretch>
+        </p:blipFill>
+        <p:spPr>
+          <a:xfrm rot="5400000" flipV="1">
+            <a:off x="6081567" y="4258039"/>
+            <a:ext cx="930617" cy="262800"/>
+          </a:xfrm>
+          <a:prstGeom prst="rect">
+            <a:avLst/>
+          </a:prstGeom>
+        </p:spPr>
+      </p:pic>
     </p:spTree>
     <p:extLst>
       <p:ext uri="{BB962C8B-B14F-4D97-AF65-F5344CB8AC3E}">
@@ -30907,7 +32824,7 @@
 </p:sld>
 </file>
 
-<file path=ppt/slides/slide27.xml><?xml version="1.0" encoding="utf-8"?>
+<file path=ppt/slides/slide28.xml><?xml version="1.0" encoding="utf-8"?>
 <p:sld xmlns:a="http://schemas.openxmlformats.org/drawingml/2006/main" xmlns:r="http://schemas.openxmlformats.org/officeDocument/2006/relationships" xmlns:p="http://schemas.openxmlformats.org/presentationml/2006/main">
   <p:cSld>
     <p:spTree>
@@ -31045,7 +32962,7 @@
           <a:p>
             <a:fld id="{08C366F5-AFAD-49CB-854A-9D9E238FCA13}" type="slidenum">
               <a:rPr lang="en-GB" smtClean="0"/>
-              <a:t>27</a:t>
+              <a:t>28</a:t>
             </a:fld>
             <a:endParaRPr lang="en-GB"/>
           </a:p>
@@ -31136,7 +33053,7 @@
 </p:sld>
 </file>
 
-<file path=ppt/slides/slide28.xml><?xml version="1.0" encoding="utf-8"?>
+<file path=ppt/slides/slide29.xml><?xml version="1.0" encoding="utf-8"?>
 <p:sld xmlns:a="http://schemas.openxmlformats.org/drawingml/2006/main" xmlns:r="http://schemas.openxmlformats.org/officeDocument/2006/relationships" xmlns:p="http://schemas.openxmlformats.org/presentationml/2006/main">
   <p:cSld>
     <p:spTree>
@@ -31951,7 +33868,7 @@
           <a:p>
             <a:fld id="{08C366F5-AFAD-49CB-854A-9D9E238FCA13}" type="slidenum">
               <a:rPr lang="en-GB" smtClean="0"/>
-              <a:t>28</a:t>
+              <a:t>29</a:t>
             </a:fld>
             <a:endParaRPr lang="en-GB"/>
           </a:p>
@@ -32204,7 +34121,192 @@
 </p:sld>
 </file>
 
-<file path=ppt/slides/slide29.xml><?xml version="1.0" encoding="utf-8"?>
+<file path=ppt/slides/slide3.xml><?xml version="1.0" encoding="utf-8"?>
+<p:sld xmlns:a="http://schemas.openxmlformats.org/drawingml/2006/main" xmlns:r="http://schemas.openxmlformats.org/officeDocument/2006/relationships" xmlns:p="http://schemas.openxmlformats.org/presentationml/2006/main">
+  <p:cSld>
+    <p:spTree>
+      <p:nvGrpSpPr>
+        <p:cNvPr id="1" name=""/>
+        <p:cNvGrpSpPr/>
+        <p:nvPr/>
+      </p:nvGrpSpPr>
+      <p:grpSpPr>
+        <a:xfrm>
+          <a:off x="0" y="0"/>
+          <a:ext cx="0" cy="0"/>
+          <a:chOff x="0" y="0"/>
+          <a:chExt cx="0" cy="0"/>
+        </a:xfrm>
+      </p:grpSpPr>
+      <p:sp>
+        <p:nvSpPr>
+          <p:cNvPr id="6" name="Titel 5">
+            <a:extLst>
+              <a:ext uri="{FF2B5EF4-FFF2-40B4-BE49-F238E27FC236}">
+                <a16:creationId xmlns:a16="http://schemas.microsoft.com/office/drawing/2014/main" id="{E92B2E04-27B7-8A9A-6143-C8831F834080}"/>
+              </a:ext>
+            </a:extLst>
+          </p:cNvPr>
+          <p:cNvSpPr>
+            <a:spLocks noGrp="1"/>
+          </p:cNvSpPr>
+          <p:nvPr>
+            <p:ph type="title"/>
+          </p:nvPr>
+        </p:nvSpPr>
+        <p:spPr/>
+        <p:txBody>
+          <a:bodyPr/>
+          <a:lstStyle/>
+          <a:p>
+            <a:r>
+              <a:rPr lang="en-GB" dirty="0"/>
+              <a:t>Systems</a:t>
+            </a:r>
+            <a:endParaRPr lang="de-DE" dirty="0"/>
+          </a:p>
+        </p:txBody>
+      </p:sp>
+      <p:sp>
+        <p:nvSpPr>
+          <p:cNvPr id="8" name="Inhaltsplatzhalter 7">
+            <a:extLst>
+              <a:ext uri="{FF2B5EF4-FFF2-40B4-BE49-F238E27FC236}">
+                <a16:creationId xmlns:a16="http://schemas.microsoft.com/office/drawing/2014/main" id="{8B599745-405B-0FFD-67CC-A4CA1E6684A4}"/>
+              </a:ext>
+            </a:extLst>
+          </p:cNvPr>
+          <p:cNvSpPr>
+            <a:spLocks noGrp="1"/>
+          </p:cNvSpPr>
+          <p:nvPr>
+            <p:ph idx="1"/>
+          </p:nvPr>
+        </p:nvSpPr>
+        <p:spPr/>
+        <p:txBody>
+          <a:bodyPr/>
+          <a:lstStyle/>
+          <a:p>
+            <a:r>
+              <a:rPr lang="de-DE" dirty="0"/>
+              <a:t>Static and </a:t>
+            </a:r>
+            <a:r>
+              <a:rPr lang="de-DE" dirty="0" err="1"/>
+              <a:t>dynamic</a:t>
+            </a:r>
+            <a:r>
+              <a:rPr lang="de-DE" dirty="0"/>
+              <a:t> </a:t>
+            </a:r>
+            <a:r>
+              <a:rPr lang="de-DE" dirty="0" err="1"/>
+              <a:t>behavior</a:t>
+            </a:r>
+            <a:endParaRPr lang="de-DE" dirty="0"/>
+          </a:p>
+          <a:p>
+            <a:r>
+              <a:rPr lang="de-DE" dirty="0"/>
+              <a:t>Models</a:t>
+            </a:r>
+          </a:p>
+          <a:p>
+            <a:r>
+              <a:rPr lang="de-DE" dirty="0"/>
+              <a:t>Proportional </a:t>
+            </a:r>
+            <a:r>
+              <a:rPr lang="de-DE" dirty="0" err="1"/>
+              <a:t>systems</a:t>
+            </a:r>
+            <a:endParaRPr lang="de-DE" dirty="0"/>
+          </a:p>
+          <a:p>
+            <a:r>
+              <a:rPr lang="de-DE" dirty="0"/>
+              <a:t>First-order </a:t>
+            </a:r>
+            <a:r>
+              <a:rPr lang="de-DE" dirty="0" err="1"/>
+              <a:t>systems</a:t>
+            </a:r>
+            <a:endParaRPr lang="de-DE" dirty="0"/>
+          </a:p>
+          <a:p>
+            <a:r>
+              <a:rPr lang="de-DE" dirty="0"/>
+              <a:t>Second-order </a:t>
+            </a:r>
+            <a:r>
+              <a:rPr lang="de-DE" dirty="0" err="1"/>
+              <a:t>systems</a:t>
+            </a:r>
+            <a:endParaRPr lang="de-DE" dirty="0"/>
+          </a:p>
+          <a:p>
+            <a:r>
+              <a:rPr lang="de-DE" dirty="0"/>
+              <a:t>Linear Time-Invariant </a:t>
+            </a:r>
+            <a:r>
+              <a:rPr lang="de-DE" dirty="0" err="1"/>
+              <a:t>systems</a:t>
+            </a:r>
+            <a:endParaRPr lang="de-DE" dirty="0"/>
+          </a:p>
+          <a:p>
+            <a:r>
+              <a:rPr lang="de-DE" dirty="0"/>
+              <a:t>Dead time</a:t>
+            </a:r>
+          </a:p>
+        </p:txBody>
+      </p:sp>
+      <p:sp>
+        <p:nvSpPr>
+          <p:cNvPr id="5" name="Foliennummernplatzhalter 4">
+            <a:extLst>
+              <a:ext uri="{FF2B5EF4-FFF2-40B4-BE49-F238E27FC236}">
+                <a16:creationId xmlns:a16="http://schemas.microsoft.com/office/drawing/2014/main" id="{422405FE-CC14-5A9E-E6BC-374EBECB4E84}"/>
+              </a:ext>
+            </a:extLst>
+          </p:cNvPr>
+          <p:cNvSpPr>
+            <a:spLocks noGrp="1"/>
+          </p:cNvSpPr>
+          <p:nvPr>
+            <p:ph type="sldNum" sz="quarter" idx="12"/>
+          </p:nvPr>
+        </p:nvSpPr>
+        <p:spPr/>
+        <p:txBody>
+          <a:bodyPr/>
+          <a:lstStyle/>
+          <a:p>
+            <a:fld id="{08C366F5-AFAD-49CB-854A-9D9E238FCA13}" type="slidenum">
+              <a:rPr lang="en-GB" smtClean="0"/>
+              <a:t>3</a:t>
+            </a:fld>
+            <a:endParaRPr lang="en-GB"/>
+          </a:p>
+        </p:txBody>
+      </p:sp>
+    </p:spTree>
+    <p:extLst>
+      <p:ext uri="{BB962C8B-B14F-4D97-AF65-F5344CB8AC3E}">
+        <p14:creationId xmlns:p14="http://schemas.microsoft.com/office/powerpoint/2010/main" val="3204133960"/>
+      </p:ext>
+    </p:extLst>
+  </p:cSld>
+  <p:clrMapOvr>
+    <a:masterClrMapping/>
+  </p:clrMapOvr>
+</p:sld>
+</file>
+
+<file path=ppt/slides/slide30.xml><?xml version="1.0" encoding="utf-8"?>
 <p:sld xmlns:a="http://schemas.openxmlformats.org/drawingml/2006/main" xmlns:r="http://schemas.openxmlformats.org/officeDocument/2006/relationships" xmlns:p="http://schemas.openxmlformats.org/presentationml/2006/main">
   <p:cSld>
     <p:spTree>
@@ -32517,7 +34619,7 @@
           <a:p>
             <a:fld id="{08C366F5-AFAD-49CB-854A-9D9E238FCA13}" type="slidenum">
               <a:rPr lang="en-GB" smtClean="0"/>
-              <a:t>29</a:t>
+              <a:t>30</a:t>
             </a:fld>
             <a:endParaRPr lang="en-GB"/>
           </a:p>
@@ -33387,192 +35489,7 @@
 </p:sld>
 </file>
 
-<file path=ppt/slides/slide3.xml><?xml version="1.0" encoding="utf-8"?>
-<p:sld xmlns:a="http://schemas.openxmlformats.org/drawingml/2006/main" xmlns:r="http://schemas.openxmlformats.org/officeDocument/2006/relationships" xmlns:p="http://schemas.openxmlformats.org/presentationml/2006/main">
-  <p:cSld>
-    <p:spTree>
-      <p:nvGrpSpPr>
-        <p:cNvPr id="1" name=""/>
-        <p:cNvGrpSpPr/>
-        <p:nvPr/>
-      </p:nvGrpSpPr>
-      <p:grpSpPr>
-        <a:xfrm>
-          <a:off x="0" y="0"/>
-          <a:ext cx="0" cy="0"/>
-          <a:chOff x="0" y="0"/>
-          <a:chExt cx="0" cy="0"/>
-        </a:xfrm>
-      </p:grpSpPr>
-      <p:sp>
-        <p:nvSpPr>
-          <p:cNvPr id="6" name="Titel 5">
-            <a:extLst>
-              <a:ext uri="{FF2B5EF4-FFF2-40B4-BE49-F238E27FC236}">
-                <a16:creationId xmlns:a16="http://schemas.microsoft.com/office/drawing/2014/main" id="{E92B2E04-27B7-8A9A-6143-C8831F834080}"/>
-              </a:ext>
-            </a:extLst>
-          </p:cNvPr>
-          <p:cNvSpPr>
-            <a:spLocks noGrp="1"/>
-          </p:cNvSpPr>
-          <p:nvPr>
-            <p:ph type="title"/>
-          </p:nvPr>
-        </p:nvSpPr>
-        <p:spPr/>
-        <p:txBody>
-          <a:bodyPr/>
-          <a:lstStyle/>
-          <a:p>
-            <a:r>
-              <a:rPr lang="en-GB" dirty="0"/>
-              <a:t>Systems</a:t>
-            </a:r>
-            <a:endParaRPr lang="de-DE" dirty="0"/>
-          </a:p>
-        </p:txBody>
-      </p:sp>
-      <p:sp>
-        <p:nvSpPr>
-          <p:cNvPr id="8" name="Inhaltsplatzhalter 7">
-            <a:extLst>
-              <a:ext uri="{FF2B5EF4-FFF2-40B4-BE49-F238E27FC236}">
-                <a16:creationId xmlns:a16="http://schemas.microsoft.com/office/drawing/2014/main" id="{8B599745-405B-0FFD-67CC-A4CA1E6684A4}"/>
-              </a:ext>
-            </a:extLst>
-          </p:cNvPr>
-          <p:cNvSpPr>
-            <a:spLocks noGrp="1"/>
-          </p:cNvSpPr>
-          <p:nvPr>
-            <p:ph idx="1"/>
-          </p:nvPr>
-        </p:nvSpPr>
-        <p:spPr/>
-        <p:txBody>
-          <a:bodyPr/>
-          <a:lstStyle/>
-          <a:p>
-            <a:r>
-              <a:rPr lang="de-DE" dirty="0"/>
-              <a:t>Static and </a:t>
-            </a:r>
-            <a:r>
-              <a:rPr lang="de-DE" dirty="0" err="1"/>
-              <a:t>dynamic</a:t>
-            </a:r>
-            <a:r>
-              <a:rPr lang="de-DE" dirty="0"/>
-              <a:t> </a:t>
-            </a:r>
-            <a:r>
-              <a:rPr lang="de-DE" dirty="0" err="1"/>
-              <a:t>behavior</a:t>
-            </a:r>
-            <a:endParaRPr lang="de-DE" dirty="0"/>
-          </a:p>
-          <a:p>
-            <a:r>
-              <a:rPr lang="de-DE" dirty="0"/>
-              <a:t>Models</a:t>
-            </a:r>
-          </a:p>
-          <a:p>
-            <a:r>
-              <a:rPr lang="de-DE" dirty="0"/>
-              <a:t>Proportional </a:t>
-            </a:r>
-            <a:r>
-              <a:rPr lang="de-DE" dirty="0" err="1"/>
-              <a:t>systems</a:t>
-            </a:r>
-            <a:endParaRPr lang="de-DE" dirty="0"/>
-          </a:p>
-          <a:p>
-            <a:r>
-              <a:rPr lang="de-DE" dirty="0"/>
-              <a:t>First-order </a:t>
-            </a:r>
-            <a:r>
-              <a:rPr lang="de-DE" dirty="0" err="1"/>
-              <a:t>systems</a:t>
-            </a:r>
-            <a:endParaRPr lang="de-DE" dirty="0"/>
-          </a:p>
-          <a:p>
-            <a:r>
-              <a:rPr lang="de-DE" dirty="0"/>
-              <a:t>Second-order </a:t>
-            </a:r>
-            <a:r>
-              <a:rPr lang="de-DE" dirty="0" err="1"/>
-              <a:t>systems</a:t>
-            </a:r>
-            <a:endParaRPr lang="de-DE" dirty="0"/>
-          </a:p>
-          <a:p>
-            <a:r>
-              <a:rPr lang="de-DE" dirty="0"/>
-              <a:t>Linear Time-Invariant </a:t>
-            </a:r>
-            <a:r>
-              <a:rPr lang="de-DE" dirty="0" err="1"/>
-              <a:t>systems</a:t>
-            </a:r>
-            <a:endParaRPr lang="de-DE" dirty="0"/>
-          </a:p>
-          <a:p>
-            <a:r>
-              <a:rPr lang="de-DE" dirty="0"/>
-              <a:t>Dead time</a:t>
-            </a:r>
-          </a:p>
-        </p:txBody>
-      </p:sp>
-      <p:sp>
-        <p:nvSpPr>
-          <p:cNvPr id="5" name="Foliennummernplatzhalter 4">
-            <a:extLst>
-              <a:ext uri="{FF2B5EF4-FFF2-40B4-BE49-F238E27FC236}">
-                <a16:creationId xmlns:a16="http://schemas.microsoft.com/office/drawing/2014/main" id="{422405FE-CC14-5A9E-E6BC-374EBECB4E84}"/>
-              </a:ext>
-            </a:extLst>
-          </p:cNvPr>
-          <p:cNvSpPr>
-            <a:spLocks noGrp="1"/>
-          </p:cNvSpPr>
-          <p:nvPr>
-            <p:ph type="sldNum" sz="quarter" idx="12"/>
-          </p:nvPr>
-        </p:nvSpPr>
-        <p:spPr/>
-        <p:txBody>
-          <a:bodyPr/>
-          <a:lstStyle/>
-          <a:p>
-            <a:fld id="{08C366F5-AFAD-49CB-854A-9D9E238FCA13}" type="slidenum">
-              <a:rPr lang="en-GB" smtClean="0"/>
-              <a:t>3</a:t>
-            </a:fld>
-            <a:endParaRPr lang="en-GB"/>
-          </a:p>
-        </p:txBody>
-      </p:sp>
-    </p:spTree>
-    <p:extLst>
-      <p:ext uri="{BB962C8B-B14F-4D97-AF65-F5344CB8AC3E}">
-        <p14:creationId xmlns:p14="http://schemas.microsoft.com/office/powerpoint/2010/main" val="3204133960"/>
-      </p:ext>
-    </p:extLst>
-  </p:cSld>
-  <p:clrMapOvr>
-    <a:masterClrMapping/>
-  </p:clrMapOvr>
-</p:sld>
-</file>
-
-<file path=ppt/slides/slide30.xml><?xml version="1.0" encoding="utf-8"?>
+<file path=ppt/slides/slide31.xml><?xml version="1.0" encoding="utf-8"?>
 <p:sld xmlns:a="http://schemas.openxmlformats.org/drawingml/2006/main" xmlns:r="http://schemas.openxmlformats.org/officeDocument/2006/relationships" xmlns:p="http://schemas.openxmlformats.org/presentationml/2006/main">
   <p:cSld>
     <p:spTree>
@@ -33617,8 +35534,8 @@
           </a:p>
         </p:txBody>
       </p:sp>
-      <mc:AlternateContent xmlns:mc="http://schemas.openxmlformats.org/markup-compatibility/2006" xmlns:a14="http://schemas.microsoft.com/office/drawing/2010/main">
-        <mc:Choice Requires="a14">
+      <mc:AlternateContent xmlns:mc="http://schemas.openxmlformats.org/markup-compatibility/2006">
+        <mc:Choice xmlns:a14="http://schemas.microsoft.com/office/drawing/2010/main" Requires="a14">
           <p:sp>
             <p:nvSpPr>
               <p:cNvPr id="3" name="Inhaltsplatzhalter 2">
@@ -33746,10 +35663,11 @@
                       </m:sSubPr>
                       <m:e>
                         <m:r>
-                          <a:rPr lang="de-DE" b="0" i="1" smtClean="0">
-                            <a:latin typeface="Cambria Math" panose="02040503050406030204" pitchFamily="18" charset="0"/>
-                          </a:rPr>
-                          <m:t>𝑇</m:t>
+                          <a:rPr lang="de-DE" i="1">
+                            <a:latin typeface="Cambria Math" panose="02040503050406030204" pitchFamily="18" charset="0"/>
+                            <a:ea typeface="Cambria Math" panose="02040503050406030204" pitchFamily="18" charset="0"/>
+                          </a:rPr>
+                          <m:t>𝜏</m:t>
                         </m:r>
                       </m:e>
                       <m:sub>
@@ -33926,7 +35844,7 @@
             </p:txBody>
           </p:sp>
         </mc:Choice>
-        <mc:Fallback xmlns="">
+        <mc:Fallback>
           <p:sp>
             <p:nvSpPr>
               <p:cNvPr id="3" name="Inhaltsplatzhalter 2">
@@ -33989,7 +35907,7 @@
           <a:p>
             <a:fld id="{08C366F5-AFAD-49CB-854A-9D9E238FCA13}" type="slidenum">
               <a:rPr lang="en-GB" smtClean="0"/>
-              <a:t>30</a:t>
+              <a:t>31</a:t>
             </a:fld>
             <a:endParaRPr lang="en-GB"/>
           </a:p>
@@ -34038,7 +35956,7 @@
 </p:sld>
 </file>
 
-<file path=ppt/slides/slide31.xml><?xml version="1.0" encoding="utf-8"?>
+<file path=ppt/slides/slide32.xml><?xml version="1.0" encoding="utf-8"?>
 <p:sld xmlns:a="http://schemas.openxmlformats.org/drawingml/2006/main" xmlns:r="http://schemas.openxmlformats.org/officeDocument/2006/relationships" xmlns:p="http://schemas.openxmlformats.org/presentationml/2006/main">
   <p:cSld>
     <p:spTree>
@@ -34118,7 +36036,7 @@
           <a:p>
             <a:fld id="{08C366F5-AFAD-49CB-854A-9D9E238FCA13}" type="slidenum">
               <a:rPr lang="en-GB" smtClean="0"/>
-              <a:t>31</a:t>
+              <a:t>32</a:t>
             </a:fld>
             <a:endParaRPr lang="en-GB"/>
           </a:p>
@@ -34338,7 +36256,7 @@
 </p:sld>
 </file>
 
-<file path=ppt/slides/slide32.xml><?xml version="1.0" encoding="utf-8"?>
+<file path=ppt/slides/slide33.xml><?xml version="1.0" encoding="utf-8"?>
 <p:sld xmlns:a="http://schemas.openxmlformats.org/drawingml/2006/main" xmlns:r="http://schemas.openxmlformats.org/officeDocument/2006/relationships" xmlns:p="http://schemas.openxmlformats.org/presentationml/2006/main">
   <p:cSld>
     <p:spTree>
@@ -34609,7 +36527,7 @@
           <a:p>
             <a:fld id="{08C366F5-AFAD-49CB-854A-9D9E238FCA13}" type="slidenum">
               <a:rPr lang="en-GB" smtClean="0"/>
-              <a:t>32</a:t>
+              <a:t>33</a:t>
             </a:fld>
             <a:endParaRPr lang="en-GB"/>
           </a:p>
@@ -34628,7 +36546,7 @@
 </p:sld>
 </file>
 
-<file path=ppt/slides/slide33.xml><?xml version="1.0" encoding="utf-8"?>
+<file path=ppt/slides/slide34.xml><?xml version="1.0" encoding="utf-8"?>
 <p:sld xmlns:a="http://schemas.openxmlformats.org/drawingml/2006/main" xmlns:r="http://schemas.openxmlformats.org/officeDocument/2006/relationships" xmlns:p="http://schemas.openxmlformats.org/presentationml/2006/main">
   <p:cSld>
     <p:spTree>
@@ -34836,7 +36754,7 @@
           <a:p>
             <a:fld id="{08C366F5-AFAD-49CB-854A-9D9E238FCA13}" type="slidenum">
               <a:rPr lang="en-GB" smtClean="0"/>
-              <a:t>33</a:t>
+              <a:t>34</a:t>
             </a:fld>
             <a:endParaRPr lang="en-GB"/>
           </a:p>

--- a/slides/1_systems.pptx
+++ b/slides/1_systems.pptx
@@ -241,7 +241,7 @@
           <a:p>
             <a:fld id="{506E0FD1-891F-4B1E-916D-E9B585160BB8}" type="datetimeFigureOut">
               <a:rPr lang="en-GB" smtClean="0"/>
-              <a:t>12/03/2026</a:t>
+              <a:t>26/03/2026</a:t>
             </a:fld>
             <a:endParaRPr lang="en-GB"/>
           </a:p>
@@ -658,7 +658,7 @@
           <a:p>
             <a:fld id="{D68C3F22-27B2-44E3-9C5F-D08126455F6F}" type="datetime1">
               <a:rPr lang="en-GB" smtClean="0"/>
-              <a:t>12/03/2026</a:t>
+              <a:t>26/03/2026</a:t>
             </a:fld>
             <a:endParaRPr lang="en-GB"/>
           </a:p>
@@ -858,7 +858,7 @@
           <a:p>
             <a:fld id="{1CD03846-7BF6-4FB6-A921-FF3379ADBD4C}" type="datetime1">
               <a:rPr lang="en-GB" smtClean="0"/>
-              <a:t>12/03/2026</a:t>
+              <a:t>26/03/2026</a:t>
             </a:fld>
             <a:endParaRPr lang="en-GB"/>
           </a:p>
@@ -1068,7 +1068,7 @@
           <a:p>
             <a:fld id="{99E1B91A-3FD0-4144-9C84-63E9688ED2FE}" type="datetime1">
               <a:rPr lang="en-GB" smtClean="0"/>
-              <a:t>12/03/2026</a:t>
+              <a:t>26/03/2026</a:t>
             </a:fld>
             <a:endParaRPr lang="en-GB"/>
           </a:p>
@@ -1268,7 +1268,7 @@
           <a:p>
             <a:fld id="{5295ED7B-FEAD-4734-819F-93EF4B0EA908}" type="datetime1">
               <a:rPr lang="en-GB" smtClean="0"/>
-              <a:t>12/03/2026</a:t>
+              <a:t>26/03/2026</a:t>
             </a:fld>
             <a:endParaRPr lang="en-GB"/>
           </a:p>
@@ -1544,7 +1544,7 @@
           <a:p>
             <a:fld id="{D2D5D4B4-C926-4B45-8815-1ED8911179A2}" type="datetime1">
               <a:rPr lang="en-GB" smtClean="0"/>
-              <a:t>12/03/2026</a:t>
+              <a:t>26/03/2026</a:t>
             </a:fld>
             <a:endParaRPr lang="en-GB"/>
           </a:p>
@@ -1812,7 +1812,7 @@
           <a:p>
             <a:fld id="{B4C5210A-0E37-4935-93AF-69F21A5F712F}" type="datetime1">
               <a:rPr lang="en-GB" smtClean="0"/>
-              <a:t>12/03/2026</a:t>
+              <a:t>26/03/2026</a:t>
             </a:fld>
             <a:endParaRPr lang="en-GB"/>
           </a:p>
@@ -2227,7 +2227,7 @@
           <a:p>
             <a:fld id="{3D3A6B2F-436C-4691-80E8-9C890E000E9D}" type="datetime1">
               <a:rPr lang="en-GB" smtClean="0"/>
-              <a:t>12/03/2026</a:t>
+              <a:t>26/03/2026</a:t>
             </a:fld>
             <a:endParaRPr lang="en-GB"/>
           </a:p>
@@ -2369,7 +2369,7 @@
           <a:p>
             <a:fld id="{84385F4C-D74B-496F-8D21-97E3549C783B}" type="datetime1">
               <a:rPr lang="en-GB" smtClean="0"/>
-              <a:t>12/03/2026</a:t>
+              <a:t>26/03/2026</a:t>
             </a:fld>
             <a:endParaRPr lang="en-GB"/>
           </a:p>
@@ -2482,7 +2482,7 @@
           <a:p>
             <a:fld id="{0CBDCB32-C241-4703-A832-4EB47BD54E83}" type="datetime1">
               <a:rPr lang="en-GB" smtClean="0"/>
-              <a:t>12/03/2026</a:t>
+              <a:t>26/03/2026</a:t>
             </a:fld>
             <a:endParaRPr lang="en-GB"/>
           </a:p>
@@ -2795,7 +2795,7 @@
           <a:p>
             <a:fld id="{85C150FF-BE95-4D25-A16A-E368A81CBF24}" type="datetime1">
               <a:rPr lang="en-GB" smtClean="0"/>
-              <a:t>12/03/2026</a:t>
+              <a:t>26/03/2026</a:t>
             </a:fld>
             <a:endParaRPr lang="en-GB"/>
           </a:p>
@@ -3084,7 +3084,7 @@
           <a:p>
             <a:fld id="{F3C5DB4B-B349-43C9-A424-BADA723AD9F1}" type="datetime1">
               <a:rPr lang="en-GB" smtClean="0"/>
-              <a:t>12/03/2026</a:t>
+              <a:t>26/03/2026</a:t>
             </a:fld>
             <a:endParaRPr lang="en-GB"/>
           </a:p>
@@ -3327,7 +3327,7 @@
           <a:p>
             <a:fld id="{12632426-0A0C-405F-A3D0-2D11AA44702A}" type="datetime1">
               <a:rPr lang="en-GB" smtClean="0"/>
-              <a:t>12/03/2026</a:t>
+              <a:t>26/03/2026</a:t>
             </a:fld>
             <a:endParaRPr lang="en-GB"/>
           </a:p>
@@ -35534,8 +35534,8 @@
           </a:p>
         </p:txBody>
       </p:sp>
-      <mc:AlternateContent xmlns:mc="http://schemas.openxmlformats.org/markup-compatibility/2006">
-        <mc:Choice xmlns:a14="http://schemas.microsoft.com/office/drawing/2010/main" Requires="a14">
+      <mc:AlternateContent xmlns:mc="http://schemas.openxmlformats.org/markup-compatibility/2006" xmlns:a14="http://schemas.microsoft.com/office/drawing/2010/main">
+        <mc:Choice Requires="a14">
           <p:sp>
             <p:nvSpPr>
               <p:cNvPr id="3" name="Inhaltsplatzhalter 2">
@@ -35844,7 +35844,7 @@
             </p:txBody>
           </p:sp>
         </mc:Choice>
-        <mc:Fallback>
+        <mc:Fallback xmlns="">
           <p:sp>
             <p:nvSpPr>
               <p:cNvPr id="3" name="Inhaltsplatzhalter 2">
@@ -41346,6 +41346,103 @@
           </a:p>
         </p:txBody>
       </p:sp>
+      <mc:AlternateContent xmlns:mc="http://schemas.openxmlformats.org/markup-compatibility/2006">
+        <mc:Choice xmlns:a14="http://schemas.microsoft.com/office/drawing/2010/main" Requires="a14">
+          <p:sp>
+            <p:nvSpPr>
+              <p:cNvPr id="8" name="Textfeld 7">
+                <a:extLst>
+                  <a:ext uri="{FF2B5EF4-FFF2-40B4-BE49-F238E27FC236}">
+                    <a16:creationId xmlns:a16="http://schemas.microsoft.com/office/drawing/2014/main" id="{B1B8DC01-C520-77E6-7426-63D418D6FED4}"/>
+                  </a:ext>
+                </a:extLst>
+              </p:cNvPr>
+              <p:cNvSpPr txBox="1"/>
+              <p:nvPr/>
+            </p:nvSpPr>
+            <p:spPr>
+              <a:xfrm>
+                <a:off x="4457700" y="2552740"/>
+                <a:ext cx="235321" cy="369332"/>
+              </a:xfrm>
+              <a:prstGeom prst="rect">
+                <a:avLst/>
+              </a:prstGeom>
+              <a:solidFill>
+                <a:schemeClr val="bg1"/>
+              </a:solidFill>
+            </p:spPr>
+            <p:txBody>
+              <a:bodyPr wrap="none" lIns="0" tIns="0" rIns="0" bIns="0" rtlCol="0">
+                <a:spAutoFit/>
+              </a:bodyPr>
+              <a:lstStyle/>
+              <a:p>
+                <a14:m>
+                  <m:oMathPara xmlns:m="http://schemas.openxmlformats.org/officeDocument/2006/math">
+                    <m:oMathParaPr>
+                      <m:jc m:val="centerGroup"/>
+                    </m:oMathParaPr>
+                    <m:oMath xmlns:m="http://schemas.openxmlformats.org/officeDocument/2006/math">
+                      <m:r>
+                        <a:rPr lang="de-DE" sz="2400" b="0" i="1" smtClean="0">
+                          <a:latin typeface="Cambria Math" panose="02040503050406030204" pitchFamily="18" charset="0"/>
+                        </a:rPr>
+                        <m:t>𝑥</m:t>
+                      </m:r>
+                    </m:oMath>
+                  </m:oMathPara>
+                </a14:m>
+                <a:endParaRPr lang="de-DE" sz="2400" dirty="0"/>
+              </a:p>
+            </p:txBody>
+          </p:sp>
+        </mc:Choice>
+        <mc:Fallback>
+          <p:sp>
+            <p:nvSpPr>
+              <p:cNvPr id="8" name="Textfeld 7">
+                <a:extLst>
+                  <a:ext uri="{FF2B5EF4-FFF2-40B4-BE49-F238E27FC236}">
+                    <a16:creationId xmlns:a16="http://schemas.microsoft.com/office/drawing/2014/main" id="{B1B8DC01-C520-77E6-7426-63D418D6FED4}"/>
+                  </a:ext>
+                </a:extLst>
+              </p:cNvPr>
+              <p:cNvSpPr txBox="1">
+                <a:spLocks noRot="1" noChangeAspect="1" noMove="1" noResize="1" noEditPoints="1" noAdjustHandles="1" noChangeArrowheads="1" noChangeShapeType="1" noTextEdit="1"/>
+              </p:cNvSpPr>
+              <p:nvPr/>
+            </p:nvSpPr>
+            <p:spPr>
+              <a:xfrm>
+                <a:off x="4457700" y="2552740"/>
+                <a:ext cx="235321" cy="369332"/>
+              </a:xfrm>
+              <a:prstGeom prst="rect">
+                <a:avLst/>
+              </a:prstGeom>
+              <a:blipFill>
+                <a:blip r:embed="rId5"/>
+                <a:stretch>
+                  <a:fillRect l="-10000" r="-10000"/>
+                </a:stretch>
+              </a:blipFill>
+            </p:spPr>
+            <p:txBody>
+              <a:bodyPr/>
+              <a:lstStyle/>
+              <a:p>
+                <a:r>
+                  <a:rPr lang="de-DE">
+                    <a:noFill/>
+                  </a:rPr>
+                  <a:t> </a:t>
+                </a:r>
+              </a:p>
+            </p:txBody>
+          </p:sp>
+        </mc:Fallback>
+      </mc:AlternateContent>
     </p:spTree>
     <p:extLst>
       <p:ext uri="{BB962C8B-B14F-4D97-AF65-F5344CB8AC3E}">

--- a/slides/1_systems.pptx
+++ b/slides/1_systems.pptx
@@ -5,7 +5,7 @@
     <p:sldMasterId id="2147483648" r:id="rId1"/>
   </p:sldMasterIdLst>
   <p:notesMasterIdLst>
-    <p:notesMasterId r:id="rId36"/>
+    <p:notesMasterId r:id="rId42"/>
   </p:notesMasterIdLst>
   <p:sldIdLst>
     <p:sldId id="256" r:id="rId2"/>
@@ -42,6 +42,12 @@
     <p:sldId id="316" r:id="rId33"/>
     <p:sldId id="280" r:id="rId34"/>
     <p:sldId id="277" r:id="rId35"/>
+    <p:sldId id="324" r:id="rId36"/>
+    <p:sldId id="325" r:id="rId37"/>
+    <p:sldId id="326" r:id="rId38"/>
+    <p:sldId id="327" r:id="rId39"/>
+    <p:sldId id="328" r:id="rId40"/>
+    <p:sldId id="329" r:id="rId41"/>
   </p:sldIdLst>
   <p:sldSz cx="12192000" cy="6858000"/>
   <p:notesSz cx="6858000" cy="9144000"/>
@@ -241,7 +247,7 @@
           <a:p>
             <a:fld id="{506E0FD1-891F-4B1E-916D-E9B585160BB8}" type="datetimeFigureOut">
               <a:rPr lang="en-GB" smtClean="0"/>
-              <a:t>26/03/2026</a:t>
+              <a:t>09/04/2026</a:t>
             </a:fld>
             <a:endParaRPr lang="en-GB"/>
           </a:p>
@@ -658,7 +664,7 @@
           <a:p>
             <a:fld id="{D68C3F22-27B2-44E3-9C5F-D08126455F6F}" type="datetime1">
               <a:rPr lang="en-GB" smtClean="0"/>
-              <a:t>26/03/2026</a:t>
+              <a:t>09/04/2026</a:t>
             </a:fld>
             <a:endParaRPr lang="en-GB"/>
           </a:p>
@@ -858,7 +864,7 @@
           <a:p>
             <a:fld id="{1CD03846-7BF6-4FB6-A921-FF3379ADBD4C}" type="datetime1">
               <a:rPr lang="en-GB" smtClean="0"/>
-              <a:t>26/03/2026</a:t>
+              <a:t>09/04/2026</a:t>
             </a:fld>
             <a:endParaRPr lang="en-GB"/>
           </a:p>
@@ -1068,7 +1074,7 @@
           <a:p>
             <a:fld id="{99E1B91A-3FD0-4144-9C84-63E9688ED2FE}" type="datetime1">
               <a:rPr lang="en-GB" smtClean="0"/>
-              <a:t>26/03/2026</a:t>
+              <a:t>09/04/2026</a:t>
             </a:fld>
             <a:endParaRPr lang="en-GB"/>
           </a:p>
@@ -1268,7 +1274,7 @@
           <a:p>
             <a:fld id="{5295ED7B-FEAD-4734-819F-93EF4B0EA908}" type="datetime1">
               <a:rPr lang="en-GB" smtClean="0"/>
-              <a:t>26/03/2026</a:t>
+              <a:t>09/04/2026</a:t>
             </a:fld>
             <a:endParaRPr lang="en-GB"/>
           </a:p>
@@ -1544,7 +1550,7 @@
           <a:p>
             <a:fld id="{D2D5D4B4-C926-4B45-8815-1ED8911179A2}" type="datetime1">
               <a:rPr lang="en-GB" smtClean="0"/>
-              <a:t>26/03/2026</a:t>
+              <a:t>09/04/2026</a:t>
             </a:fld>
             <a:endParaRPr lang="en-GB"/>
           </a:p>
@@ -1812,7 +1818,7 @@
           <a:p>
             <a:fld id="{B4C5210A-0E37-4935-93AF-69F21A5F712F}" type="datetime1">
               <a:rPr lang="en-GB" smtClean="0"/>
-              <a:t>26/03/2026</a:t>
+              <a:t>09/04/2026</a:t>
             </a:fld>
             <a:endParaRPr lang="en-GB"/>
           </a:p>
@@ -2227,7 +2233,7 @@
           <a:p>
             <a:fld id="{3D3A6B2F-436C-4691-80E8-9C890E000E9D}" type="datetime1">
               <a:rPr lang="en-GB" smtClean="0"/>
-              <a:t>26/03/2026</a:t>
+              <a:t>09/04/2026</a:t>
             </a:fld>
             <a:endParaRPr lang="en-GB"/>
           </a:p>
@@ -2369,7 +2375,7 @@
           <a:p>
             <a:fld id="{84385F4C-D74B-496F-8D21-97E3549C783B}" type="datetime1">
               <a:rPr lang="en-GB" smtClean="0"/>
-              <a:t>26/03/2026</a:t>
+              <a:t>09/04/2026</a:t>
             </a:fld>
             <a:endParaRPr lang="en-GB"/>
           </a:p>
@@ -2482,7 +2488,7 @@
           <a:p>
             <a:fld id="{0CBDCB32-C241-4703-A832-4EB47BD54E83}" type="datetime1">
               <a:rPr lang="en-GB" smtClean="0"/>
-              <a:t>26/03/2026</a:t>
+              <a:t>09/04/2026</a:t>
             </a:fld>
             <a:endParaRPr lang="en-GB"/>
           </a:p>
@@ -2795,7 +2801,7 @@
           <a:p>
             <a:fld id="{85C150FF-BE95-4D25-A16A-E368A81CBF24}" type="datetime1">
               <a:rPr lang="en-GB" smtClean="0"/>
-              <a:t>26/03/2026</a:t>
+              <a:t>09/04/2026</a:t>
             </a:fld>
             <a:endParaRPr lang="en-GB"/>
           </a:p>
@@ -3084,7 +3090,7 @@
           <a:p>
             <a:fld id="{F3C5DB4B-B349-43C9-A424-BADA723AD9F1}" type="datetime1">
               <a:rPr lang="en-GB" smtClean="0"/>
-              <a:t>26/03/2026</a:t>
+              <a:t>09/04/2026</a:t>
             </a:fld>
             <a:endParaRPr lang="en-GB"/>
           </a:p>
@@ -3327,7 +3333,7 @@
           <a:p>
             <a:fld id="{12632426-0A0C-405F-A3D0-2D11AA44702A}" type="datetime1">
               <a:rPr lang="en-GB" smtClean="0"/>
-              <a:t>26/03/2026</a:t>
+              <a:t>09/04/2026</a:t>
             </a:fld>
             <a:endParaRPr lang="en-GB"/>
           </a:p>
@@ -33102,8 +33108,8 @@
           </a:p>
         </p:txBody>
       </p:sp>
-      <mc:AlternateContent xmlns:mc="http://schemas.openxmlformats.org/markup-compatibility/2006" xmlns:a14="http://schemas.microsoft.com/office/drawing/2010/main">
-        <mc:Choice Requires="a14">
+      <mc:AlternateContent xmlns:mc="http://schemas.openxmlformats.org/markup-compatibility/2006">
+        <mc:Choice xmlns:a14="http://schemas.microsoft.com/office/drawing/2010/main" Requires="a14">
           <p:sp>
             <p:nvSpPr>
               <p:cNvPr id="3" name="Inhaltsplatzhalter 2">
@@ -33397,11 +33403,8 @@
                   </m:oMath>
                 </a14:m>
                 <a:r>
-                  <a:rPr lang="de-DE" i="1" dirty="0">
-                    <a:latin typeface="Cambria Math" panose="02040503050406030204" pitchFamily="18" charset="0"/>
-                    <a:ea typeface="Cambria Math" panose="02040503050406030204" pitchFamily="18" charset="0"/>
-                  </a:rPr>
-                  <a:t>,   </a:t>
+                  <a:rPr lang="de-DE" dirty="0"/>
+                  <a:t> ,   </a:t>
                 </a:r>
                 <a14:m>
                   <m:oMath xmlns:m="http://schemas.openxmlformats.org/officeDocument/2006/math">
@@ -33801,7 +33804,7 @@
             </p:txBody>
           </p:sp>
         </mc:Choice>
-        <mc:Fallback xmlns="">
+        <mc:Fallback>
           <p:sp>
             <p:nvSpPr>
               <p:cNvPr id="3" name="Inhaltsplatzhalter 2">
@@ -33826,7 +33829,7 @@
               <a:blipFill>
                 <a:blip r:embed="rId2"/>
                 <a:stretch>
-                  <a:fillRect l="-844" r="-483"/>
+                  <a:fillRect l="-844" r="-844"/>
                 </a:stretch>
               </a:blipFill>
             </p:spPr>
@@ -36773,6 +36776,2190 @@
 </p:sld>
 </file>
 
+<file path=ppt/slides/slide35.xml><?xml version="1.0" encoding="utf-8"?>
+<p:sld xmlns:a="http://schemas.openxmlformats.org/drawingml/2006/main" xmlns:r="http://schemas.openxmlformats.org/officeDocument/2006/relationships" xmlns:p="http://schemas.openxmlformats.org/presentationml/2006/main">
+  <p:cSld>
+    <p:spTree>
+      <p:nvGrpSpPr>
+        <p:cNvPr id="1" name=""/>
+        <p:cNvGrpSpPr/>
+        <p:nvPr/>
+      </p:nvGrpSpPr>
+      <p:grpSpPr>
+        <a:xfrm>
+          <a:off x="0" y="0"/>
+          <a:ext cx="0" cy="0"/>
+          <a:chOff x="0" y="0"/>
+          <a:chExt cx="0" cy="0"/>
+        </a:xfrm>
+      </p:grpSpPr>
+      <p:sp>
+        <p:nvSpPr>
+          <p:cNvPr id="2" name="Titel 1">
+            <a:extLst>
+              <a:ext uri="{FF2B5EF4-FFF2-40B4-BE49-F238E27FC236}">
+                <a16:creationId xmlns:a16="http://schemas.microsoft.com/office/drawing/2014/main" id="{179FB616-373D-660F-953E-FEFEC30EB1EA}"/>
+              </a:ext>
+            </a:extLst>
+          </p:cNvPr>
+          <p:cNvSpPr>
+            <a:spLocks noGrp="1"/>
+          </p:cNvSpPr>
+          <p:nvPr>
+            <p:ph type="title"/>
+          </p:nvPr>
+        </p:nvSpPr>
+        <p:spPr/>
+        <p:txBody>
+          <a:bodyPr/>
+          <a:lstStyle/>
+          <a:p>
+            <a:r>
+              <a:rPr lang="de-DE" dirty="0" err="1"/>
+              <a:t>Exercise</a:t>
+            </a:r>
+            <a:r>
+              <a:rPr lang="de-DE" dirty="0"/>
+              <a:t> 1</a:t>
+            </a:r>
+          </a:p>
+        </p:txBody>
+      </p:sp>
+      <mc:AlternateContent xmlns:mc="http://schemas.openxmlformats.org/markup-compatibility/2006">
+        <mc:Choice xmlns:a14="http://schemas.microsoft.com/office/drawing/2010/main" Requires="a14">
+          <p:sp>
+            <p:nvSpPr>
+              <p:cNvPr id="3" name="Inhaltsplatzhalter 2">
+                <a:extLst>
+                  <a:ext uri="{FF2B5EF4-FFF2-40B4-BE49-F238E27FC236}">
+                    <a16:creationId xmlns:a16="http://schemas.microsoft.com/office/drawing/2014/main" id="{02500C19-FFAB-D798-2B10-BFE4C715C90B}"/>
+                  </a:ext>
+                </a:extLst>
+              </p:cNvPr>
+              <p:cNvSpPr>
+                <a:spLocks noGrp="1"/>
+              </p:cNvSpPr>
+              <p:nvPr>
+                <p:ph idx="1"/>
+              </p:nvPr>
+            </p:nvSpPr>
+            <p:spPr/>
+            <p:txBody>
+              <a:bodyPr/>
+              <a:lstStyle/>
+              <a:p>
+                <a:pPr marL="0" indent="0">
+                  <a:buNone/>
+                </a:pPr>
+                <a:r>
+                  <a:rPr lang="de-DE" dirty="0"/>
+                  <a:t>A </a:t>
+                </a:r>
+                <a:r>
+                  <a:rPr lang="de-DE" dirty="0" err="1"/>
+                  <a:t>system</a:t>
+                </a:r>
+                <a:r>
+                  <a:rPr lang="de-DE" dirty="0"/>
+                  <a:t> </a:t>
+                </a:r>
+                <a:r>
+                  <a:rPr lang="de-DE" dirty="0" err="1"/>
+                  <a:t>is</a:t>
+                </a:r>
+                <a:r>
+                  <a:rPr lang="de-DE" dirty="0"/>
+                  <a:t> </a:t>
+                </a:r>
+                <a:r>
+                  <a:rPr lang="de-DE" dirty="0" err="1"/>
+                  <a:t>described</a:t>
+                </a:r>
+                <a:r>
+                  <a:rPr lang="de-DE" dirty="0"/>
+                  <a:t> </a:t>
+                </a:r>
+                <a:r>
+                  <a:rPr lang="de-DE" dirty="0" err="1"/>
+                  <a:t>by</a:t>
+                </a:r>
+                <a:r>
+                  <a:rPr lang="de-DE" dirty="0"/>
+                  <a:t> </a:t>
+                </a:r>
+                <a:r>
+                  <a:rPr lang="de-DE" dirty="0" err="1"/>
+                  <a:t>the</a:t>
+                </a:r>
+                <a:r>
+                  <a:rPr lang="de-DE" dirty="0"/>
+                  <a:t> </a:t>
+                </a:r>
+                <a:r>
+                  <a:rPr lang="de-DE" dirty="0" err="1"/>
+                  <a:t>following</a:t>
+                </a:r>
+                <a:r>
+                  <a:rPr lang="de-DE" dirty="0"/>
+                  <a:t> </a:t>
+                </a:r>
+                <a:r>
+                  <a:rPr lang="de-DE" dirty="0" err="1"/>
+                  <a:t>relation</a:t>
+                </a:r>
+                <a:r>
+                  <a:rPr lang="de-DE" dirty="0"/>
+                  <a:t>:</a:t>
+                </a:r>
+              </a:p>
+              <a:p>
+                <a:pPr marL="0" indent="0">
+                  <a:buNone/>
+                </a:pPr>
+                <a:r>
+                  <a:rPr lang="de-DE" b="0" dirty="0"/>
+                  <a:t>	</a:t>
+                </a:r>
+                <a14:m>
+                  <m:oMath xmlns:m="http://schemas.openxmlformats.org/officeDocument/2006/math">
+                    <m:r>
+                      <a:rPr lang="de-DE" b="0" i="1" smtClean="0">
+                        <a:latin typeface="Cambria Math" panose="02040503050406030204" pitchFamily="18" charset="0"/>
+                      </a:rPr>
+                      <m:t>𝑦</m:t>
+                    </m:r>
+                    <m:d>
+                      <m:dPr>
+                        <m:ctrlPr>
+                          <a:rPr lang="de-DE" b="0" i="1" smtClean="0">
+                            <a:latin typeface="Cambria Math" panose="02040503050406030204" pitchFamily="18" charset="0"/>
+                          </a:rPr>
+                        </m:ctrlPr>
+                      </m:dPr>
+                      <m:e>
+                        <m:r>
+                          <a:rPr lang="de-DE" b="0" i="1" smtClean="0">
+                            <a:latin typeface="Cambria Math" panose="02040503050406030204" pitchFamily="18" charset="0"/>
+                          </a:rPr>
+                          <m:t>𝑡</m:t>
+                        </m:r>
+                      </m:e>
+                    </m:d>
+                    <m:r>
+                      <a:rPr lang="de-DE" b="0" i="1" smtClean="0">
+                        <a:latin typeface="Cambria Math" panose="02040503050406030204" pitchFamily="18" charset="0"/>
+                      </a:rPr>
+                      <m:t>=2 </m:t>
+                    </m:r>
+                    <m:r>
+                      <a:rPr lang="de-DE" b="0" i="1" smtClean="0">
+                        <a:latin typeface="Cambria Math" panose="02040503050406030204" pitchFamily="18" charset="0"/>
+                      </a:rPr>
+                      <m:t>𝑢</m:t>
+                    </m:r>
+                    <m:r>
+                      <a:rPr lang="de-DE" b="0" i="1" smtClean="0">
+                        <a:latin typeface="Cambria Math" panose="02040503050406030204" pitchFamily="18" charset="0"/>
+                      </a:rPr>
+                      <m:t>(</m:t>
+                    </m:r>
+                    <m:r>
+                      <a:rPr lang="de-DE" b="0" i="1" smtClean="0">
+                        <a:latin typeface="Cambria Math" panose="02040503050406030204" pitchFamily="18" charset="0"/>
+                      </a:rPr>
+                      <m:t>𝑡</m:t>
+                    </m:r>
+                    <m:r>
+                      <a:rPr lang="de-DE" b="0" i="1" smtClean="0">
+                        <a:latin typeface="Cambria Math" panose="02040503050406030204" pitchFamily="18" charset="0"/>
+                      </a:rPr>
+                      <m:t>)</m:t>
+                    </m:r>
+                  </m:oMath>
+                </a14:m>
+                <a:endParaRPr lang="de-DE" dirty="0"/>
+              </a:p>
+              <a:p>
+                <a:pPr marL="0" indent="0">
+                  <a:buNone/>
+                </a:pPr>
+                <a:endParaRPr lang="de-DE" dirty="0"/>
+              </a:p>
+              <a:p>
+                <a:r>
+                  <a:rPr lang="de-DE" dirty="0" err="1"/>
+                  <a:t>Is</a:t>
+                </a:r>
+                <a:r>
+                  <a:rPr lang="de-DE" dirty="0"/>
+                  <a:t> </a:t>
+                </a:r>
+                <a:r>
+                  <a:rPr lang="de-DE" dirty="0" err="1"/>
+                  <a:t>this</a:t>
+                </a:r>
+                <a:r>
+                  <a:rPr lang="de-DE" dirty="0"/>
+                  <a:t> </a:t>
+                </a:r>
+                <a:r>
+                  <a:rPr lang="de-DE" dirty="0" err="1"/>
+                  <a:t>system</a:t>
+                </a:r>
+                <a:r>
+                  <a:rPr lang="de-DE" dirty="0"/>
+                  <a:t> </a:t>
+                </a:r>
+                <a:r>
+                  <a:rPr lang="de-DE" dirty="0" err="1"/>
+                  <a:t>static</a:t>
+                </a:r>
+                <a:r>
+                  <a:rPr lang="de-DE" dirty="0"/>
+                  <a:t> </a:t>
+                </a:r>
+                <a:r>
+                  <a:rPr lang="de-DE" dirty="0" err="1"/>
+                  <a:t>or</a:t>
+                </a:r>
+                <a:r>
+                  <a:rPr lang="de-DE" dirty="0"/>
+                  <a:t> </a:t>
+                </a:r>
+                <a:r>
+                  <a:rPr lang="de-DE" dirty="0" err="1"/>
+                  <a:t>dynamic</a:t>
+                </a:r>
+                <a:r>
+                  <a:rPr lang="de-DE" dirty="0"/>
+                  <a:t>?</a:t>
+                </a:r>
+              </a:p>
+              <a:p>
+                <a:r>
+                  <a:rPr lang="de-DE" dirty="0" err="1"/>
+                  <a:t>What</a:t>
+                </a:r>
+                <a:r>
+                  <a:rPr lang="de-DE" dirty="0"/>
+                  <a:t> </a:t>
+                </a:r>
+                <a:r>
+                  <a:rPr lang="de-DE" dirty="0" err="1"/>
+                  <a:t>is</a:t>
+                </a:r>
+                <a:r>
+                  <a:rPr lang="de-DE" dirty="0"/>
+                  <a:t> </a:t>
+                </a:r>
+                <a:r>
+                  <a:rPr lang="de-DE" dirty="0" err="1"/>
+                  <a:t>the</a:t>
+                </a:r>
+                <a:r>
+                  <a:rPr lang="de-DE" dirty="0"/>
+                  <a:t> </a:t>
+                </a:r>
+                <a:r>
+                  <a:rPr lang="de-DE" dirty="0" err="1"/>
+                  <a:t>output</a:t>
+                </a:r>
+                <a:r>
+                  <a:rPr lang="de-DE" dirty="0"/>
+                  <a:t> </a:t>
+                </a:r>
+                <a:r>
+                  <a:rPr lang="de-DE" dirty="0" err="1"/>
+                  <a:t>for</a:t>
+                </a:r>
+                <a:r>
+                  <a:rPr lang="de-DE" dirty="0"/>
+                  <a:t> a </a:t>
+                </a:r>
+                <a:r>
+                  <a:rPr lang="de-DE" dirty="0" err="1"/>
+                  <a:t>step</a:t>
+                </a:r>
+                <a:r>
+                  <a:rPr lang="de-DE" dirty="0"/>
+                  <a:t> </a:t>
+                </a:r>
+                <a:r>
+                  <a:rPr lang="de-DE" dirty="0" err="1"/>
+                  <a:t>input</a:t>
+                </a:r>
+                <a:r>
+                  <a:rPr lang="de-DE" dirty="0"/>
+                  <a:t> </a:t>
+                </a:r>
+                <a14:m>
+                  <m:oMath xmlns:m="http://schemas.openxmlformats.org/officeDocument/2006/math">
+                    <m:r>
+                      <a:rPr lang="de-DE" b="0" i="1" smtClean="0">
+                        <a:latin typeface="Cambria Math" panose="02040503050406030204" pitchFamily="18" charset="0"/>
+                      </a:rPr>
+                      <m:t>𝑢</m:t>
+                    </m:r>
+                    <m:d>
+                      <m:dPr>
+                        <m:ctrlPr>
+                          <a:rPr lang="de-DE" b="0" i="1" smtClean="0">
+                            <a:latin typeface="Cambria Math" panose="02040503050406030204" pitchFamily="18" charset="0"/>
+                          </a:rPr>
+                        </m:ctrlPr>
+                      </m:dPr>
+                      <m:e>
+                        <m:r>
+                          <a:rPr lang="de-DE" b="0" i="1" smtClean="0">
+                            <a:latin typeface="Cambria Math" panose="02040503050406030204" pitchFamily="18" charset="0"/>
+                          </a:rPr>
+                          <m:t>𝑡</m:t>
+                        </m:r>
+                      </m:e>
+                    </m:d>
+                    <m:r>
+                      <a:rPr lang="de-DE" b="0" i="1" smtClean="0">
+                        <a:latin typeface="Cambria Math" panose="02040503050406030204" pitchFamily="18" charset="0"/>
+                      </a:rPr>
+                      <m:t>=3</m:t>
+                    </m:r>
+                  </m:oMath>
+                </a14:m>
+                <a:r>
+                  <a:rPr lang="de-DE" dirty="0"/>
+                  <a:t>?</a:t>
+                </a:r>
+              </a:p>
+              <a:p>
+                <a:pPr marL="0" indent="0">
+                  <a:buNone/>
+                </a:pPr>
+                <a:endParaRPr lang="de-DE" dirty="0"/>
+              </a:p>
+            </p:txBody>
+          </p:sp>
+        </mc:Choice>
+        <mc:Fallback>
+          <p:sp>
+            <p:nvSpPr>
+              <p:cNvPr id="3" name="Inhaltsplatzhalter 2">
+                <a:extLst>
+                  <a:ext uri="{FF2B5EF4-FFF2-40B4-BE49-F238E27FC236}">
+                    <a16:creationId xmlns:a16="http://schemas.microsoft.com/office/drawing/2014/main" id="{02500C19-FFAB-D798-2B10-BFE4C715C90B}"/>
+                  </a:ext>
+                </a:extLst>
+              </p:cNvPr>
+              <p:cNvSpPr>
+                <a:spLocks noGrp="1" noRot="1" noChangeAspect="1" noMove="1" noResize="1" noEditPoints="1" noAdjustHandles="1" noChangeArrowheads="1" noChangeShapeType="1" noTextEdit="1"/>
+              </p:cNvSpPr>
+              <p:nvPr>
+                <p:ph idx="1"/>
+              </p:nvPr>
+            </p:nvSpPr>
+            <p:spPr>
+              <a:blipFill>
+                <a:blip r:embed="rId2"/>
+                <a:stretch>
+                  <a:fillRect l="-1206" t="-2326"/>
+                </a:stretch>
+              </a:blipFill>
+            </p:spPr>
+            <p:txBody>
+              <a:bodyPr/>
+              <a:lstStyle/>
+              <a:p>
+                <a:r>
+                  <a:rPr lang="de-DE">
+                    <a:noFill/>
+                  </a:rPr>
+                  <a:t> </a:t>
+                </a:r>
+              </a:p>
+            </p:txBody>
+          </p:sp>
+        </mc:Fallback>
+      </mc:AlternateContent>
+      <p:sp>
+        <p:nvSpPr>
+          <p:cNvPr id="4" name="Foliennummernplatzhalter 3">
+            <a:extLst>
+              <a:ext uri="{FF2B5EF4-FFF2-40B4-BE49-F238E27FC236}">
+                <a16:creationId xmlns:a16="http://schemas.microsoft.com/office/drawing/2014/main" id="{964826B0-B86D-5644-66C6-0F67B76DFFF0}"/>
+              </a:ext>
+            </a:extLst>
+          </p:cNvPr>
+          <p:cNvSpPr>
+            <a:spLocks noGrp="1"/>
+          </p:cNvSpPr>
+          <p:nvPr>
+            <p:ph type="sldNum" sz="quarter" idx="12"/>
+          </p:nvPr>
+        </p:nvSpPr>
+        <p:spPr/>
+        <p:txBody>
+          <a:bodyPr/>
+          <a:lstStyle/>
+          <a:p>
+            <a:fld id="{08C366F5-AFAD-49CB-854A-9D9E238FCA13}" type="slidenum">
+              <a:rPr lang="en-GB" smtClean="0"/>
+              <a:t>35</a:t>
+            </a:fld>
+            <a:endParaRPr lang="en-GB"/>
+          </a:p>
+        </p:txBody>
+      </p:sp>
+    </p:spTree>
+    <p:extLst>
+      <p:ext uri="{BB962C8B-B14F-4D97-AF65-F5344CB8AC3E}">
+        <p14:creationId xmlns:p14="http://schemas.microsoft.com/office/powerpoint/2010/main" val="3405578758"/>
+      </p:ext>
+    </p:extLst>
+  </p:cSld>
+  <p:clrMapOvr>
+    <a:masterClrMapping/>
+  </p:clrMapOvr>
+</p:sld>
+</file>
+
+<file path=ppt/slides/slide36.xml><?xml version="1.0" encoding="utf-8"?>
+<p:sld xmlns:a="http://schemas.openxmlformats.org/drawingml/2006/main" xmlns:r="http://schemas.openxmlformats.org/officeDocument/2006/relationships" xmlns:p="http://schemas.openxmlformats.org/presentationml/2006/main">
+  <p:cSld>
+    <p:spTree>
+      <p:nvGrpSpPr>
+        <p:cNvPr id="1" name=""/>
+        <p:cNvGrpSpPr/>
+        <p:nvPr/>
+      </p:nvGrpSpPr>
+      <p:grpSpPr>
+        <a:xfrm>
+          <a:off x="0" y="0"/>
+          <a:ext cx="0" cy="0"/>
+          <a:chOff x="0" y="0"/>
+          <a:chExt cx="0" cy="0"/>
+        </a:xfrm>
+      </p:grpSpPr>
+      <p:sp>
+        <p:nvSpPr>
+          <p:cNvPr id="2" name="Titel 1">
+            <a:extLst>
+              <a:ext uri="{FF2B5EF4-FFF2-40B4-BE49-F238E27FC236}">
+                <a16:creationId xmlns:a16="http://schemas.microsoft.com/office/drawing/2014/main" id="{F45AF3DB-3326-7E1D-43C7-B71DD9FC72A3}"/>
+              </a:ext>
+            </a:extLst>
+          </p:cNvPr>
+          <p:cNvSpPr>
+            <a:spLocks noGrp="1"/>
+          </p:cNvSpPr>
+          <p:nvPr>
+            <p:ph type="title"/>
+          </p:nvPr>
+        </p:nvSpPr>
+        <p:spPr/>
+        <p:txBody>
+          <a:bodyPr/>
+          <a:lstStyle/>
+          <a:p>
+            <a:r>
+              <a:rPr lang="de-DE" dirty="0" err="1"/>
+              <a:t>Exercise</a:t>
+            </a:r>
+            <a:r>
+              <a:rPr lang="de-DE" dirty="0"/>
+              <a:t> 2</a:t>
+            </a:r>
+          </a:p>
+        </p:txBody>
+      </p:sp>
+      <mc:AlternateContent xmlns:mc="http://schemas.openxmlformats.org/markup-compatibility/2006">
+        <mc:Choice xmlns:a14="http://schemas.microsoft.com/office/drawing/2010/main" Requires="a14">
+          <p:sp>
+            <p:nvSpPr>
+              <p:cNvPr id="3" name="Inhaltsplatzhalter 2">
+                <a:extLst>
+                  <a:ext uri="{FF2B5EF4-FFF2-40B4-BE49-F238E27FC236}">
+                    <a16:creationId xmlns:a16="http://schemas.microsoft.com/office/drawing/2014/main" id="{052F7AF9-64E4-BAD1-FC90-569F88F69AD2}"/>
+                  </a:ext>
+                </a:extLst>
+              </p:cNvPr>
+              <p:cNvSpPr>
+                <a:spLocks noGrp="1"/>
+              </p:cNvSpPr>
+              <p:nvPr>
+                <p:ph idx="1"/>
+              </p:nvPr>
+            </p:nvSpPr>
+            <p:spPr/>
+            <p:txBody>
+              <a:bodyPr/>
+              <a:lstStyle/>
+              <a:p>
+                <a:pPr marL="0" indent="0">
+                  <a:buNone/>
+                </a:pPr>
+                <a:r>
+                  <a:rPr lang="de-DE" dirty="0"/>
+                  <a:t>A proportional </a:t>
+                </a:r>
+                <a:r>
+                  <a:rPr lang="de-DE" dirty="0" err="1"/>
+                  <a:t>system</a:t>
+                </a:r>
+                <a:r>
+                  <a:rPr lang="de-DE" dirty="0"/>
+                  <a:t> </a:t>
+                </a:r>
+                <a:r>
+                  <a:rPr lang="de-DE" dirty="0" err="1"/>
+                  <a:t>has</a:t>
+                </a:r>
+                <a:r>
+                  <a:rPr lang="de-DE" dirty="0"/>
+                  <a:t> </a:t>
+                </a:r>
+                <a:r>
+                  <a:rPr lang="de-DE" dirty="0" err="1"/>
+                  <a:t>gain</a:t>
+                </a:r>
+                <a:r>
+                  <a:rPr lang="de-DE" dirty="0"/>
+                  <a:t> </a:t>
+                </a:r>
+                <a14:m>
+                  <m:oMath xmlns:m="http://schemas.openxmlformats.org/officeDocument/2006/math">
+                    <m:r>
+                      <a:rPr lang="de-DE" b="0" i="1" smtClean="0">
+                        <a:latin typeface="Cambria Math" panose="02040503050406030204" pitchFamily="18" charset="0"/>
+                      </a:rPr>
+                      <m:t>𝐾</m:t>
+                    </m:r>
+                    <m:r>
+                      <a:rPr lang="de-DE" b="0" i="1" smtClean="0">
+                        <a:latin typeface="Cambria Math" panose="02040503050406030204" pitchFamily="18" charset="0"/>
+                      </a:rPr>
+                      <m:t>=4</m:t>
+                    </m:r>
+                  </m:oMath>
+                </a14:m>
+                <a:r>
+                  <a:rPr lang="de-DE" dirty="0"/>
+                  <a:t>.</a:t>
+                </a:r>
+              </a:p>
+              <a:p>
+                <a:pPr marL="0" indent="0">
+                  <a:buNone/>
+                </a:pPr>
+                <a:endParaRPr lang="de-DE" dirty="0"/>
+              </a:p>
+              <a:p>
+                <a:r>
+                  <a:rPr lang="de-DE" dirty="0"/>
+                  <a:t>Write </a:t>
+                </a:r>
+                <a:r>
+                  <a:rPr lang="de-DE" dirty="0" err="1"/>
+                  <a:t>the</a:t>
+                </a:r>
+                <a:r>
+                  <a:rPr lang="de-DE" dirty="0"/>
+                  <a:t> input-output </a:t>
+                </a:r>
+                <a:r>
+                  <a:rPr lang="de-DE" dirty="0" err="1"/>
+                  <a:t>relation</a:t>
+                </a:r>
+                <a:r>
+                  <a:rPr lang="de-DE" dirty="0"/>
+                  <a:t>.</a:t>
+                </a:r>
+              </a:p>
+              <a:p>
+                <a:r>
+                  <a:rPr lang="de-DE" dirty="0" err="1"/>
+                  <a:t>Compute</a:t>
+                </a:r>
+                <a:r>
+                  <a:rPr lang="de-DE" dirty="0"/>
+                  <a:t> </a:t>
+                </a:r>
+                <a:r>
+                  <a:rPr lang="de-DE" dirty="0" err="1"/>
+                  <a:t>the</a:t>
+                </a:r>
+                <a:r>
+                  <a:rPr lang="de-DE" dirty="0"/>
+                  <a:t> </a:t>
+                </a:r>
+                <a:r>
+                  <a:rPr lang="de-DE" dirty="0" err="1"/>
+                  <a:t>output</a:t>
+                </a:r>
+                <a:r>
+                  <a:rPr lang="de-DE" dirty="0"/>
+                  <a:t> </a:t>
+                </a:r>
+                <a:r>
+                  <a:rPr lang="de-DE" dirty="0" err="1"/>
+                  <a:t>for</a:t>
+                </a:r>
+                <a:r>
+                  <a:rPr lang="de-DE" dirty="0"/>
+                  <a:t> </a:t>
+                </a:r>
+                <a14:m>
+                  <m:oMath xmlns:m="http://schemas.openxmlformats.org/officeDocument/2006/math">
+                    <m:r>
+                      <a:rPr lang="de-DE" b="0" i="1" smtClean="0">
+                        <a:latin typeface="Cambria Math" panose="02040503050406030204" pitchFamily="18" charset="0"/>
+                      </a:rPr>
+                      <m:t>𝑢</m:t>
+                    </m:r>
+                    <m:d>
+                      <m:dPr>
+                        <m:ctrlPr>
+                          <a:rPr lang="de-DE" b="0" i="1" smtClean="0">
+                            <a:latin typeface="Cambria Math" panose="02040503050406030204" pitchFamily="18" charset="0"/>
+                          </a:rPr>
+                        </m:ctrlPr>
+                      </m:dPr>
+                      <m:e>
+                        <m:r>
+                          <a:rPr lang="de-DE" b="0" i="1" smtClean="0">
+                            <a:latin typeface="Cambria Math" panose="02040503050406030204" pitchFamily="18" charset="0"/>
+                          </a:rPr>
+                          <m:t>𝑡</m:t>
+                        </m:r>
+                      </m:e>
+                    </m:d>
+                    <m:r>
+                      <a:rPr lang="de-DE" b="0" i="1" smtClean="0">
+                        <a:latin typeface="Cambria Math" panose="02040503050406030204" pitchFamily="18" charset="0"/>
+                      </a:rPr>
+                      <m:t>=1.5</m:t>
+                    </m:r>
+                  </m:oMath>
+                </a14:m>
+                <a:r>
+                  <a:rPr lang="de-DE" dirty="0"/>
+                  <a:t>.</a:t>
+                </a:r>
+              </a:p>
+            </p:txBody>
+          </p:sp>
+        </mc:Choice>
+        <mc:Fallback>
+          <p:sp>
+            <p:nvSpPr>
+              <p:cNvPr id="3" name="Inhaltsplatzhalter 2">
+                <a:extLst>
+                  <a:ext uri="{FF2B5EF4-FFF2-40B4-BE49-F238E27FC236}">
+                    <a16:creationId xmlns:a16="http://schemas.microsoft.com/office/drawing/2014/main" id="{052F7AF9-64E4-BAD1-FC90-569F88F69AD2}"/>
+                  </a:ext>
+                </a:extLst>
+              </p:cNvPr>
+              <p:cNvSpPr>
+                <a:spLocks noGrp="1" noRot="1" noChangeAspect="1" noMove="1" noResize="1" noEditPoints="1" noAdjustHandles="1" noChangeArrowheads="1" noChangeShapeType="1" noTextEdit="1"/>
+              </p:cNvSpPr>
+              <p:nvPr>
+                <p:ph idx="1"/>
+              </p:nvPr>
+            </p:nvSpPr>
+            <p:spPr>
+              <a:blipFill>
+                <a:blip r:embed="rId2"/>
+                <a:stretch>
+                  <a:fillRect l="-1206" t="-2326"/>
+                </a:stretch>
+              </a:blipFill>
+            </p:spPr>
+            <p:txBody>
+              <a:bodyPr/>
+              <a:lstStyle/>
+              <a:p>
+                <a:r>
+                  <a:rPr lang="de-DE">
+                    <a:noFill/>
+                  </a:rPr>
+                  <a:t> </a:t>
+                </a:r>
+              </a:p>
+            </p:txBody>
+          </p:sp>
+        </mc:Fallback>
+      </mc:AlternateContent>
+      <p:sp>
+        <p:nvSpPr>
+          <p:cNvPr id="4" name="Foliennummernplatzhalter 3">
+            <a:extLst>
+              <a:ext uri="{FF2B5EF4-FFF2-40B4-BE49-F238E27FC236}">
+                <a16:creationId xmlns:a16="http://schemas.microsoft.com/office/drawing/2014/main" id="{5A138EEB-4DB1-F890-3B10-93CC9AD86663}"/>
+              </a:ext>
+            </a:extLst>
+          </p:cNvPr>
+          <p:cNvSpPr>
+            <a:spLocks noGrp="1"/>
+          </p:cNvSpPr>
+          <p:nvPr>
+            <p:ph type="sldNum" sz="quarter" idx="12"/>
+          </p:nvPr>
+        </p:nvSpPr>
+        <p:spPr/>
+        <p:txBody>
+          <a:bodyPr/>
+          <a:lstStyle/>
+          <a:p>
+            <a:fld id="{08C366F5-AFAD-49CB-854A-9D9E238FCA13}" type="slidenum">
+              <a:rPr lang="en-GB" smtClean="0"/>
+              <a:t>36</a:t>
+            </a:fld>
+            <a:endParaRPr lang="en-GB"/>
+          </a:p>
+        </p:txBody>
+      </p:sp>
+    </p:spTree>
+    <p:extLst>
+      <p:ext uri="{BB962C8B-B14F-4D97-AF65-F5344CB8AC3E}">
+        <p14:creationId xmlns:p14="http://schemas.microsoft.com/office/powerpoint/2010/main" val="2446074728"/>
+      </p:ext>
+    </p:extLst>
+  </p:cSld>
+  <p:clrMapOvr>
+    <a:masterClrMapping/>
+  </p:clrMapOvr>
+</p:sld>
+</file>
+
+<file path=ppt/slides/slide37.xml><?xml version="1.0" encoding="utf-8"?>
+<p:sld xmlns:a="http://schemas.openxmlformats.org/drawingml/2006/main" xmlns:r="http://schemas.openxmlformats.org/officeDocument/2006/relationships" xmlns:p="http://schemas.openxmlformats.org/presentationml/2006/main">
+  <p:cSld>
+    <p:spTree>
+      <p:nvGrpSpPr>
+        <p:cNvPr id="1" name=""/>
+        <p:cNvGrpSpPr/>
+        <p:nvPr/>
+      </p:nvGrpSpPr>
+      <p:grpSpPr>
+        <a:xfrm>
+          <a:off x="0" y="0"/>
+          <a:ext cx="0" cy="0"/>
+          <a:chOff x="0" y="0"/>
+          <a:chExt cx="0" cy="0"/>
+        </a:xfrm>
+      </p:grpSpPr>
+      <p:sp>
+        <p:nvSpPr>
+          <p:cNvPr id="2" name="Titel 1">
+            <a:extLst>
+              <a:ext uri="{FF2B5EF4-FFF2-40B4-BE49-F238E27FC236}">
+                <a16:creationId xmlns:a16="http://schemas.microsoft.com/office/drawing/2014/main" id="{7B506D8C-1961-4593-A028-C2318AD0F56B}"/>
+              </a:ext>
+            </a:extLst>
+          </p:cNvPr>
+          <p:cNvSpPr>
+            <a:spLocks noGrp="1"/>
+          </p:cNvSpPr>
+          <p:nvPr>
+            <p:ph type="title"/>
+          </p:nvPr>
+        </p:nvSpPr>
+        <p:spPr/>
+        <p:txBody>
+          <a:bodyPr/>
+          <a:lstStyle/>
+          <a:p>
+            <a:r>
+              <a:rPr lang="de-DE" dirty="0" err="1"/>
+              <a:t>Exercise</a:t>
+            </a:r>
+            <a:r>
+              <a:rPr lang="de-DE" dirty="0"/>
+              <a:t> 3</a:t>
+            </a:r>
+          </a:p>
+        </p:txBody>
+      </p:sp>
+      <mc:AlternateContent xmlns:mc="http://schemas.openxmlformats.org/markup-compatibility/2006">
+        <mc:Choice xmlns:a14="http://schemas.microsoft.com/office/drawing/2010/main" Requires="a14">
+          <p:sp>
+            <p:nvSpPr>
+              <p:cNvPr id="3" name="Inhaltsplatzhalter 2">
+                <a:extLst>
+                  <a:ext uri="{FF2B5EF4-FFF2-40B4-BE49-F238E27FC236}">
+                    <a16:creationId xmlns:a16="http://schemas.microsoft.com/office/drawing/2014/main" id="{E3894B84-7B2D-99DA-81F9-EB1A42B79E1A}"/>
+                  </a:ext>
+                </a:extLst>
+              </p:cNvPr>
+              <p:cNvSpPr>
+                <a:spLocks noGrp="1"/>
+              </p:cNvSpPr>
+              <p:nvPr>
+                <p:ph idx="1"/>
+              </p:nvPr>
+            </p:nvSpPr>
+            <p:spPr/>
+            <p:txBody>
+              <a:bodyPr/>
+              <a:lstStyle/>
+              <a:p>
+                <a:pPr marL="0" indent="0">
+                  <a:buNone/>
+                </a:pPr>
+                <a:r>
+                  <a:rPr lang="de-DE" dirty="0"/>
+                  <a:t>Consider a first-order </a:t>
+                </a:r>
+                <a:r>
+                  <a:rPr lang="de-DE" dirty="0" err="1"/>
+                  <a:t>system</a:t>
+                </a:r>
+                <a:r>
+                  <a:rPr lang="de-DE" dirty="0"/>
+                  <a:t> </a:t>
+                </a:r>
+                <a:r>
+                  <a:rPr lang="de-DE" dirty="0" err="1"/>
+                  <a:t>with</a:t>
+                </a:r>
+                <a:r>
+                  <a:rPr lang="de-DE" dirty="0"/>
+                  <a:t> </a:t>
+                </a:r>
+                <a14:m>
+                  <m:oMath xmlns:m="http://schemas.openxmlformats.org/officeDocument/2006/math">
+                    <m:r>
+                      <a:rPr lang="de-DE" b="0" i="1" smtClean="0">
+                        <a:latin typeface="Cambria Math" panose="02040503050406030204" pitchFamily="18" charset="0"/>
+                      </a:rPr>
+                      <m:t>𝑇</m:t>
+                    </m:r>
+                    <m:r>
+                      <a:rPr lang="de-DE" b="0" i="1" smtClean="0">
+                        <a:latin typeface="Cambria Math" panose="02040503050406030204" pitchFamily="18" charset="0"/>
+                      </a:rPr>
+                      <m:t>=2</m:t>
+                    </m:r>
+                  </m:oMath>
+                </a14:m>
+                <a:r>
+                  <a:rPr lang="de-DE" dirty="0"/>
+                  <a:t>, </a:t>
+                </a:r>
+                <a14:m>
+                  <m:oMath xmlns:m="http://schemas.openxmlformats.org/officeDocument/2006/math">
+                    <m:r>
+                      <a:rPr lang="de-DE" b="0" i="1" smtClean="0">
+                        <a:latin typeface="Cambria Math" panose="02040503050406030204" pitchFamily="18" charset="0"/>
+                      </a:rPr>
+                      <m:t>𝐾</m:t>
+                    </m:r>
+                    <m:r>
+                      <a:rPr lang="de-DE" b="0" i="1" smtClean="0">
+                        <a:latin typeface="Cambria Math" panose="02040503050406030204" pitchFamily="18" charset="0"/>
+                      </a:rPr>
+                      <m:t>=3</m:t>
+                    </m:r>
+                  </m:oMath>
+                </a14:m>
+                <a:r>
+                  <a:rPr lang="de-DE" dirty="0"/>
+                  <a:t>, and </a:t>
+                </a:r>
+                <a:r>
+                  <a:rPr lang="de-DE" dirty="0" err="1"/>
+                  <a:t>step</a:t>
+                </a:r>
+                <a:r>
+                  <a:rPr lang="de-DE" dirty="0"/>
+                  <a:t> </a:t>
+                </a:r>
+                <a:r>
+                  <a:rPr lang="de-DE" dirty="0" err="1"/>
+                  <a:t>input</a:t>
+                </a:r>
+                <a:r>
+                  <a:rPr lang="de-DE" dirty="0"/>
+                  <a:t> </a:t>
+                </a:r>
+                <a14:m>
+                  <m:oMath xmlns:m="http://schemas.openxmlformats.org/officeDocument/2006/math">
+                    <m:r>
+                      <a:rPr lang="de-DE" b="0" i="1" smtClean="0">
+                        <a:latin typeface="Cambria Math" panose="02040503050406030204" pitchFamily="18" charset="0"/>
+                      </a:rPr>
+                      <m:t>𝑢</m:t>
+                    </m:r>
+                    <m:d>
+                      <m:dPr>
+                        <m:ctrlPr>
+                          <a:rPr lang="de-DE" b="0" i="1" smtClean="0">
+                            <a:latin typeface="Cambria Math" panose="02040503050406030204" pitchFamily="18" charset="0"/>
+                          </a:rPr>
+                        </m:ctrlPr>
+                      </m:dPr>
+                      <m:e>
+                        <m:r>
+                          <a:rPr lang="de-DE" b="0" i="1" smtClean="0">
+                            <a:latin typeface="Cambria Math" panose="02040503050406030204" pitchFamily="18" charset="0"/>
+                          </a:rPr>
+                          <m:t>𝑡</m:t>
+                        </m:r>
+                      </m:e>
+                    </m:d>
+                    <m:r>
+                      <a:rPr lang="de-DE" b="0" i="1" smtClean="0">
+                        <a:latin typeface="Cambria Math" panose="02040503050406030204" pitchFamily="18" charset="0"/>
+                      </a:rPr>
+                      <m:t>=1</m:t>
+                    </m:r>
+                  </m:oMath>
+                </a14:m>
+                <a:r>
+                  <a:rPr lang="de-DE" dirty="0"/>
+                  <a:t>.</a:t>
+                </a:r>
+              </a:p>
+              <a:p>
+                <a:pPr marL="0" indent="0">
+                  <a:buNone/>
+                </a:pPr>
+                <a:endParaRPr lang="de-DE" dirty="0"/>
+              </a:p>
+              <a:p>
+                <a:r>
+                  <a:rPr lang="de-DE" dirty="0"/>
+                  <a:t>Write </a:t>
+                </a:r>
+                <a:r>
+                  <a:rPr lang="de-DE" dirty="0" err="1"/>
+                  <a:t>the</a:t>
+                </a:r>
+                <a:r>
+                  <a:rPr lang="de-DE" dirty="0"/>
+                  <a:t> differential </a:t>
+                </a:r>
+                <a:r>
+                  <a:rPr lang="de-DE" dirty="0" err="1"/>
+                  <a:t>equation</a:t>
+                </a:r>
+                <a:r>
+                  <a:rPr lang="de-DE" dirty="0"/>
+                  <a:t>.</a:t>
+                </a:r>
+              </a:p>
+              <a:p>
+                <a:r>
+                  <a:rPr lang="de-DE" dirty="0" err="1"/>
+                  <a:t>Determine</a:t>
+                </a:r>
+                <a:r>
+                  <a:rPr lang="de-DE" dirty="0"/>
+                  <a:t> </a:t>
+                </a:r>
+                <a:r>
+                  <a:rPr lang="de-DE" dirty="0" err="1"/>
+                  <a:t>the</a:t>
+                </a:r>
+                <a:r>
+                  <a:rPr lang="de-DE" dirty="0"/>
+                  <a:t> </a:t>
+                </a:r>
+                <a:r>
+                  <a:rPr lang="de-DE" dirty="0" err="1"/>
+                  <a:t>steady-state</a:t>
+                </a:r>
+                <a:r>
+                  <a:rPr lang="de-DE" dirty="0"/>
+                  <a:t> </a:t>
+                </a:r>
+                <a:r>
+                  <a:rPr lang="de-DE" dirty="0" err="1"/>
+                  <a:t>value</a:t>
+                </a:r>
+                <a:r>
+                  <a:rPr lang="de-DE" dirty="0"/>
+                  <a:t>.</a:t>
+                </a:r>
+              </a:p>
+            </p:txBody>
+          </p:sp>
+        </mc:Choice>
+        <mc:Fallback>
+          <p:sp>
+            <p:nvSpPr>
+              <p:cNvPr id="3" name="Inhaltsplatzhalter 2">
+                <a:extLst>
+                  <a:ext uri="{FF2B5EF4-FFF2-40B4-BE49-F238E27FC236}">
+                    <a16:creationId xmlns:a16="http://schemas.microsoft.com/office/drawing/2014/main" id="{E3894B84-7B2D-99DA-81F9-EB1A42B79E1A}"/>
+                  </a:ext>
+                </a:extLst>
+              </p:cNvPr>
+              <p:cNvSpPr>
+                <a:spLocks noGrp="1" noRot="1" noChangeAspect="1" noMove="1" noResize="1" noEditPoints="1" noAdjustHandles="1" noChangeArrowheads="1" noChangeShapeType="1" noTextEdit="1"/>
+              </p:cNvSpPr>
+              <p:nvPr>
+                <p:ph idx="1"/>
+              </p:nvPr>
+            </p:nvSpPr>
+            <p:spPr>
+              <a:blipFill>
+                <a:blip r:embed="rId2"/>
+                <a:stretch>
+                  <a:fillRect l="-1206" t="-2326"/>
+                </a:stretch>
+              </a:blipFill>
+            </p:spPr>
+            <p:txBody>
+              <a:bodyPr/>
+              <a:lstStyle/>
+              <a:p>
+                <a:r>
+                  <a:rPr lang="de-DE">
+                    <a:noFill/>
+                  </a:rPr>
+                  <a:t> </a:t>
+                </a:r>
+              </a:p>
+            </p:txBody>
+          </p:sp>
+        </mc:Fallback>
+      </mc:AlternateContent>
+      <p:sp>
+        <p:nvSpPr>
+          <p:cNvPr id="4" name="Foliennummernplatzhalter 3">
+            <a:extLst>
+              <a:ext uri="{FF2B5EF4-FFF2-40B4-BE49-F238E27FC236}">
+                <a16:creationId xmlns:a16="http://schemas.microsoft.com/office/drawing/2014/main" id="{58380112-3663-8EDD-3A74-445103649A32}"/>
+              </a:ext>
+            </a:extLst>
+          </p:cNvPr>
+          <p:cNvSpPr>
+            <a:spLocks noGrp="1"/>
+          </p:cNvSpPr>
+          <p:nvPr>
+            <p:ph type="sldNum" sz="quarter" idx="12"/>
+          </p:nvPr>
+        </p:nvSpPr>
+        <p:spPr/>
+        <p:txBody>
+          <a:bodyPr/>
+          <a:lstStyle/>
+          <a:p>
+            <a:fld id="{08C366F5-AFAD-49CB-854A-9D9E238FCA13}" type="slidenum">
+              <a:rPr lang="en-GB" smtClean="0"/>
+              <a:t>37</a:t>
+            </a:fld>
+            <a:endParaRPr lang="en-GB"/>
+          </a:p>
+        </p:txBody>
+      </p:sp>
+    </p:spTree>
+    <p:extLst>
+      <p:ext uri="{BB962C8B-B14F-4D97-AF65-F5344CB8AC3E}">
+        <p14:creationId xmlns:p14="http://schemas.microsoft.com/office/powerpoint/2010/main" val="3440483679"/>
+      </p:ext>
+    </p:extLst>
+  </p:cSld>
+  <p:clrMapOvr>
+    <a:masterClrMapping/>
+  </p:clrMapOvr>
+</p:sld>
+</file>
+
+<file path=ppt/slides/slide38.xml><?xml version="1.0" encoding="utf-8"?>
+<p:sld xmlns:a="http://schemas.openxmlformats.org/drawingml/2006/main" xmlns:r="http://schemas.openxmlformats.org/officeDocument/2006/relationships" xmlns:p="http://schemas.openxmlformats.org/presentationml/2006/main">
+  <p:cSld>
+    <p:spTree>
+      <p:nvGrpSpPr>
+        <p:cNvPr id="1" name=""/>
+        <p:cNvGrpSpPr/>
+        <p:nvPr/>
+      </p:nvGrpSpPr>
+      <p:grpSpPr>
+        <a:xfrm>
+          <a:off x="0" y="0"/>
+          <a:ext cx="0" cy="0"/>
+          <a:chOff x="0" y="0"/>
+          <a:chExt cx="0" cy="0"/>
+        </a:xfrm>
+      </p:grpSpPr>
+      <p:sp>
+        <p:nvSpPr>
+          <p:cNvPr id="2" name="Titel 1">
+            <a:extLst>
+              <a:ext uri="{FF2B5EF4-FFF2-40B4-BE49-F238E27FC236}">
+                <a16:creationId xmlns:a16="http://schemas.microsoft.com/office/drawing/2014/main" id="{5E763AAB-4FD9-5509-7E85-CDC46AC1C388}"/>
+              </a:ext>
+            </a:extLst>
+          </p:cNvPr>
+          <p:cNvSpPr>
+            <a:spLocks noGrp="1"/>
+          </p:cNvSpPr>
+          <p:nvPr>
+            <p:ph type="title"/>
+          </p:nvPr>
+        </p:nvSpPr>
+        <p:spPr/>
+        <p:txBody>
+          <a:bodyPr/>
+          <a:lstStyle/>
+          <a:p>
+            <a:r>
+              <a:rPr lang="de-DE" dirty="0" err="1"/>
+              <a:t>Exercise</a:t>
+            </a:r>
+            <a:r>
+              <a:rPr lang="de-DE" dirty="0"/>
+              <a:t> 4</a:t>
+            </a:r>
+          </a:p>
+        </p:txBody>
+      </p:sp>
+      <mc:AlternateContent xmlns:mc="http://schemas.openxmlformats.org/markup-compatibility/2006">
+        <mc:Choice xmlns:a14="http://schemas.microsoft.com/office/drawing/2010/main" Requires="a14">
+          <p:sp>
+            <p:nvSpPr>
+              <p:cNvPr id="3" name="Inhaltsplatzhalter 2">
+                <a:extLst>
+                  <a:ext uri="{FF2B5EF4-FFF2-40B4-BE49-F238E27FC236}">
+                    <a16:creationId xmlns:a16="http://schemas.microsoft.com/office/drawing/2014/main" id="{89BF351A-C1B0-638A-3FE4-730FE39E887B}"/>
+                  </a:ext>
+                </a:extLst>
+              </p:cNvPr>
+              <p:cNvSpPr>
+                <a:spLocks noGrp="1"/>
+              </p:cNvSpPr>
+              <p:nvPr>
+                <p:ph idx="1"/>
+              </p:nvPr>
+            </p:nvSpPr>
+            <p:spPr/>
+            <p:txBody>
+              <a:bodyPr>
+                <a:normAutofit/>
+              </a:bodyPr>
+              <a:lstStyle/>
+              <a:p>
+                <a:pPr marL="0" indent="0">
+                  <a:buNone/>
+                </a:pPr>
+                <a:r>
+                  <a:rPr lang="de-DE" dirty="0"/>
+                  <a:t>Given </a:t>
+                </a:r>
+                <a:r>
+                  <a:rPr lang="de-DE" dirty="0" err="1"/>
+                  <a:t>the</a:t>
+                </a:r>
+                <a:r>
+                  <a:rPr lang="de-DE" dirty="0"/>
+                  <a:t> </a:t>
+                </a:r>
+                <a:r>
+                  <a:rPr lang="de-DE" dirty="0" err="1"/>
+                  <a:t>model</a:t>
+                </a:r>
+                <a:r>
+                  <a:rPr lang="de-DE" dirty="0"/>
+                  <a:t>:</a:t>
+                </a:r>
+              </a:p>
+              <a:p>
+                <a:pPr marL="0" indent="0">
+                  <a:buNone/>
+                </a:pPr>
+                <a:r>
+                  <a:rPr lang="de-DE" dirty="0"/>
+                  <a:t>	</a:t>
+                </a:r>
+                <a14:m>
+                  <m:oMath xmlns:m="http://schemas.openxmlformats.org/officeDocument/2006/math">
+                    <m:acc>
+                      <m:accPr>
+                        <m:chr m:val="̇"/>
+                        <m:ctrlPr>
+                          <a:rPr lang="de-DE" i="1" smtClean="0">
+                            <a:latin typeface="Cambria Math" panose="02040503050406030204" pitchFamily="18" charset="0"/>
+                          </a:rPr>
+                        </m:ctrlPr>
+                      </m:accPr>
+                      <m:e>
+                        <m:r>
+                          <a:rPr lang="de-DE" b="0" i="1" smtClean="0">
+                            <a:latin typeface="Cambria Math" panose="02040503050406030204" pitchFamily="18" charset="0"/>
+                          </a:rPr>
+                          <m:t>𝑦</m:t>
+                        </m:r>
+                      </m:e>
+                    </m:acc>
+                    <m:d>
+                      <m:dPr>
+                        <m:ctrlPr>
+                          <a:rPr lang="de-DE" b="0" i="1" smtClean="0">
+                            <a:latin typeface="Cambria Math" panose="02040503050406030204" pitchFamily="18" charset="0"/>
+                          </a:rPr>
+                        </m:ctrlPr>
+                      </m:dPr>
+                      <m:e>
+                        <m:r>
+                          <a:rPr lang="de-DE" b="0" i="1" smtClean="0">
+                            <a:latin typeface="Cambria Math" panose="02040503050406030204" pitchFamily="18" charset="0"/>
+                          </a:rPr>
+                          <m:t>𝑡</m:t>
+                        </m:r>
+                      </m:e>
+                    </m:d>
+                    <m:r>
+                      <a:rPr lang="de-DE" b="0" i="1" smtClean="0">
+                        <a:latin typeface="Cambria Math" panose="02040503050406030204" pitchFamily="18" charset="0"/>
+                      </a:rPr>
+                      <m:t>=−2 </m:t>
+                    </m:r>
+                    <m:r>
+                      <a:rPr lang="de-DE" b="0" i="1" smtClean="0">
+                        <a:latin typeface="Cambria Math" panose="02040503050406030204" pitchFamily="18" charset="0"/>
+                      </a:rPr>
+                      <m:t>𝑦</m:t>
+                    </m:r>
+                    <m:d>
+                      <m:dPr>
+                        <m:ctrlPr>
+                          <a:rPr lang="de-DE" b="0" i="1" smtClean="0">
+                            <a:latin typeface="Cambria Math" panose="02040503050406030204" pitchFamily="18" charset="0"/>
+                          </a:rPr>
+                        </m:ctrlPr>
+                      </m:dPr>
+                      <m:e>
+                        <m:r>
+                          <a:rPr lang="de-DE" b="0" i="1" smtClean="0">
+                            <a:latin typeface="Cambria Math" panose="02040503050406030204" pitchFamily="18" charset="0"/>
+                          </a:rPr>
+                          <m:t>𝑡</m:t>
+                        </m:r>
+                      </m:e>
+                    </m:d>
+                    <m:r>
+                      <a:rPr lang="de-DE" b="0" i="1" smtClean="0">
+                        <a:latin typeface="Cambria Math" panose="02040503050406030204" pitchFamily="18" charset="0"/>
+                      </a:rPr>
+                      <m:t>+2 </m:t>
+                    </m:r>
+                    <m:r>
+                      <a:rPr lang="de-DE" b="0" i="1" smtClean="0">
+                        <a:latin typeface="Cambria Math" panose="02040503050406030204" pitchFamily="18" charset="0"/>
+                      </a:rPr>
+                      <m:t>𝑢</m:t>
+                    </m:r>
+                    <m:r>
+                      <a:rPr lang="de-DE" b="0" i="1" smtClean="0">
+                        <a:latin typeface="Cambria Math" panose="02040503050406030204" pitchFamily="18" charset="0"/>
+                      </a:rPr>
+                      <m:t>(</m:t>
+                    </m:r>
+                    <m:r>
+                      <a:rPr lang="de-DE" b="0" i="1" smtClean="0">
+                        <a:latin typeface="Cambria Math" panose="02040503050406030204" pitchFamily="18" charset="0"/>
+                      </a:rPr>
+                      <m:t>𝑡</m:t>
+                    </m:r>
+                    <m:r>
+                      <a:rPr lang="de-DE" b="0" i="1" smtClean="0">
+                        <a:latin typeface="Cambria Math" panose="02040503050406030204" pitchFamily="18" charset="0"/>
+                      </a:rPr>
+                      <m:t>)</m:t>
+                    </m:r>
+                  </m:oMath>
+                </a14:m>
+                <a:endParaRPr lang="de-DE" dirty="0"/>
+              </a:p>
+              <a:p>
+                <a:pPr marL="0" indent="0">
+                  <a:buNone/>
+                </a:pPr>
+                <a:endParaRPr lang="de-DE" dirty="0"/>
+              </a:p>
+              <a:p>
+                <a:r>
+                  <a:rPr lang="de-DE" dirty="0" err="1"/>
+                  <a:t>Is</a:t>
+                </a:r>
+                <a:r>
+                  <a:rPr lang="de-DE" dirty="0"/>
+                  <a:t> </a:t>
+                </a:r>
+                <a:r>
+                  <a:rPr lang="de-DE" dirty="0" err="1"/>
+                  <a:t>this</a:t>
+                </a:r>
+                <a:r>
+                  <a:rPr lang="de-DE" dirty="0"/>
+                  <a:t> a first-order </a:t>
+                </a:r>
+                <a:r>
+                  <a:rPr lang="de-DE" dirty="0" err="1"/>
+                  <a:t>system</a:t>
+                </a:r>
+                <a:r>
+                  <a:rPr lang="de-DE" dirty="0"/>
+                  <a:t>?</a:t>
+                </a:r>
+              </a:p>
+              <a:p>
+                <a:r>
+                  <a:rPr lang="de-DE" dirty="0" err="1"/>
+                  <a:t>What</a:t>
+                </a:r>
+                <a:r>
+                  <a:rPr lang="de-DE" dirty="0"/>
+                  <a:t> </a:t>
+                </a:r>
+                <a:r>
+                  <a:rPr lang="de-DE" dirty="0" err="1"/>
+                  <a:t>happens</a:t>
+                </a:r>
+                <a:r>
+                  <a:rPr lang="de-DE" dirty="0"/>
+                  <a:t> </a:t>
+                </a:r>
+                <a:r>
+                  <a:rPr lang="de-DE" dirty="0" err="1"/>
+                  <a:t>if</a:t>
+                </a:r>
+                <a:r>
+                  <a:rPr lang="de-DE" dirty="0"/>
+                  <a:t> </a:t>
+                </a:r>
+                <a14:m>
+                  <m:oMath xmlns:m="http://schemas.openxmlformats.org/officeDocument/2006/math">
+                    <m:r>
+                      <a:rPr lang="de-DE" b="0" i="1" smtClean="0">
+                        <a:latin typeface="Cambria Math" panose="02040503050406030204" pitchFamily="18" charset="0"/>
+                      </a:rPr>
+                      <m:t>𝑢</m:t>
+                    </m:r>
+                    <m:d>
+                      <m:dPr>
+                        <m:ctrlPr>
+                          <a:rPr lang="de-DE" b="0" i="1" smtClean="0">
+                            <a:latin typeface="Cambria Math" panose="02040503050406030204" pitchFamily="18" charset="0"/>
+                          </a:rPr>
+                        </m:ctrlPr>
+                      </m:dPr>
+                      <m:e>
+                        <m:r>
+                          <a:rPr lang="de-DE" b="0" i="1" smtClean="0">
+                            <a:latin typeface="Cambria Math" panose="02040503050406030204" pitchFamily="18" charset="0"/>
+                          </a:rPr>
+                          <m:t>𝑡</m:t>
+                        </m:r>
+                      </m:e>
+                    </m:d>
+                    <m:r>
+                      <a:rPr lang="de-DE" b="0" i="1" smtClean="0">
+                        <a:latin typeface="Cambria Math" panose="02040503050406030204" pitchFamily="18" charset="0"/>
+                      </a:rPr>
+                      <m:t>=0</m:t>
+                    </m:r>
+                  </m:oMath>
+                </a14:m>
+                <a:r>
+                  <a:rPr lang="de-DE" dirty="0"/>
+                  <a:t>?</a:t>
+                </a:r>
+              </a:p>
+            </p:txBody>
+          </p:sp>
+        </mc:Choice>
+        <mc:Fallback>
+          <p:sp>
+            <p:nvSpPr>
+              <p:cNvPr id="3" name="Inhaltsplatzhalter 2">
+                <a:extLst>
+                  <a:ext uri="{FF2B5EF4-FFF2-40B4-BE49-F238E27FC236}">
+                    <a16:creationId xmlns:a16="http://schemas.microsoft.com/office/drawing/2014/main" id="{89BF351A-C1B0-638A-3FE4-730FE39E887B}"/>
+                  </a:ext>
+                </a:extLst>
+              </p:cNvPr>
+              <p:cNvSpPr>
+                <a:spLocks noGrp="1" noRot="1" noChangeAspect="1" noMove="1" noResize="1" noEditPoints="1" noAdjustHandles="1" noChangeArrowheads="1" noChangeShapeType="1" noTextEdit="1"/>
+              </p:cNvSpPr>
+              <p:nvPr>
+                <p:ph idx="1"/>
+              </p:nvPr>
+            </p:nvSpPr>
+            <p:spPr>
+              <a:blipFill>
+                <a:blip r:embed="rId2"/>
+                <a:stretch>
+                  <a:fillRect l="-1206" t="-2326"/>
+                </a:stretch>
+              </a:blipFill>
+            </p:spPr>
+            <p:txBody>
+              <a:bodyPr/>
+              <a:lstStyle/>
+              <a:p>
+                <a:r>
+                  <a:rPr lang="de-DE">
+                    <a:noFill/>
+                  </a:rPr>
+                  <a:t> </a:t>
+                </a:r>
+              </a:p>
+            </p:txBody>
+          </p:sp>
+        </mc:Fallback>
+      </mc:AlternateContent>
+      <p:sp>
+        <p:nvSpPr>
+          <p:cNvPr id="4" name="Foliennummernplatzhalter 3">
+            <a:extLst>
+              <a:ext uri="{FF2B5EF4-FFF2-40B4-BE49-F238E27FC236}">
+                <a16:creationId xmlns:a16="http://schemas.microsoft.com/office/drawing/2014/main" id="{29457E9A-985A-199C-B379-F43F1C709AB8}"/>
+              </a:ext>
+            </a:extLst>
+          </p:cNvPr>
+          <p:cNvSpPr>
+            <a:spLocks noGrp="1"/>
+          </p:cNvSpPr>
+          <p:nvPr>
+            <p:ph type="sldNum" sz="quarter" idx="12"/>
+          </p:nvPr>
+        </p:nvSpPr>
+        <p:spPr/>
+        <p:txBody>
+          <a:bodyPr/>
+          <a:lstStyle/>
+          <a:p>
+            <a:fld id="{08C366F5-AFAD-49CB-854A-9D9E238FCA13}" type="slidenum">
+              <a:rPr lang="en-GB" smtClean="0"/>
+              <a:t>38</a:t>
+            </a:fld>
+            <a:endParaRPr lang="en-GB"/>
+          </a:p>
+        </p:txBody>
+      </p:sp>
+    </p:spTree>
+    <p:extLst>
+      <p:ext uri="{BB962C8B-B14F-4D97-AF65-F5344CB8AC3E}">
+        <p14:creationId xmlns:p14="http://schemas.microsoft.com/office/powerpoint/2010/main" val="922309632"/>
+      </p:ext>
+    </p:extLst>
+  </p:cSld>
+  <p:clrMapOvr>
+    <a:masterClrMapping/>
+  </p:clrMapOvr>
+</p:sld>
+</file>
+
+<file path=ppt/slides/slide39.xml><?xml version="1.0" encoding="utf-8"?>
+<p:sld xmlns:a="http://schemas.openxmlformats.org/drawingml/2006/main" xmlns:r="http://schemas.openxmlformats.org/officeDocument/2006/relationships" xmlns:p="http://schemas.openxmlformats.org/presentationml/2006/main">
+  <p:cSld>
+    <p:spTree>
+      <p:nvGrpSpPr>
+        <p:cNvPr id="1" name=""/>
+        <p:cNvGrpSpPr/>
+        <p:nvPr/>
+      </p:nvGrpSpPr>
+      <p:grpSpPr>
+        <a:xfrm>
+          <a:off x="0" y="0"/>
+          <a:ext cx="0" cy="0"/>
+          <a:chOff x="0" y="0"/>
+          <a:chExt cx="0" cy="0"/>
+        </a:xfrm>
+      </p:grpSpPr>
+      <p:sp>
+        <p:nvSpPr>
+          <p:cNvPr id="2" name="Titel 1">
+            <a:extLst>
+              <a:ext uri="{FF2B5EF4-FFF2-40B4-BE49-F238E27FC236}">
+                <a16:creationId xmlns:a16="http://schemas.microsoft.com/office/drawing/2014/main" id="{D05EF73B-9A95-6A8A-ACE6-0513715B7EC8}"/>
+              </a:ext>
+            </a:extLst>
+          </p:cNvPr>
+          <p:cNvSpPr>
+            <a:spLocks noGrp="1"/>
+          </p:cNvSpPr>
+          <p:nvPr>
+            <p:ph type="title"/>
+          </p:nvPr>
+        </p:nvSpPr>
+        <p:spPr/>
+        <p:txBody>
+          <a:bodyPr/>
+          <a:lstStyle/>
+          <a:p>
+            <a:r>
+              <a:rPr lang="de-DE" dirty="0" err="1"/>
+              <a:t>Exercise</a:t>
+            </a:r>
+            <a:r>
+              <a:rPr lang="de-DE" dirty="0"/>
+              <a:t> 5</a:t>
+            </a:r>
+          </a:p>
+        </p:txBody>
+      </p:sp>
+      <mc:AlternateContent xmlns:mc="http://schemas.openxmlformats.org/markup-compatibility/2006">
+        <mc:Choice xmlns:a14="http://schemas.microsoft.com/office/drawing/2010/main" Requires="a14">
+          <p:sp>
+            <p:nvSpPr>
+              <p:cNvPr id="3" name="Inhaltsplatzhalter 2">
+                <a:extLst>
+                  <a:ext uri="{FF2B5EF4-FFF2-40B4-BE49-F238E27FC236}">
+                    <a16:creationId xmlns:a16="http://schemas.microsoft.com/office/drawing/2014/main" id="{CAAB09D5-032A-47C9-97C9-6279A445F3F8}"/>
+                  </a:ext>
+                </a:extLst>
+              </p:cNvPr>
+              <p:cNvSpPr>
+                <a:spLocks noGrp="1"/>
+              </p:cNvSpPr>
+              <p:nvPr>
+                <p:ph idx="1"/>
+              </p:nvPr>
+            </p:nvSpPr>
+            <p:spPr/>
+            <p:txBody>
+              <a:bodyPr>
+                <a:normAutofit/>
+              </a:bodyPr>
+              <a:lstStyle/>
+              <a:p>
+                <a:pPr marL="0" indent="0">
+                  <a:buNone/>
+                </a:pPr>
+                <a:r>
+                  <a:rPr lang="de-DE" dirty="0"/>
+                  <a:t>Consider </a:t>
+                </a:r>
+                <a:r>
+                  <a:rPr lang="de-DE" dirty="0" err="1"/>
+                  <a:t>the</a:t>
+                </a:r>
+                <a:r>
+                  <a:rPr lang="de-DE" dirty="0"/>
+                  <a:t> </a:t>
+                </a:r>
+                <a:r>
+                  <a:rPr lang="de-DE" dirty="0" err="1"/>
+                  <a:t>system</a:t>
+                </a:r>
+                <a:endParaRPr lang="de-DE" dirty="0"/>
+              </a:p>
+              <a:p>
+                <a:pPr marL="0" indent="0">
+                  <a:buNone/>
+                </a:pPr>
+                <a:r>
+                  <a:rPr lang="de-DE" dirty="0"/>
+                  <a:t>	</a:t>
+                </a:r>
+                <a14:m>
+                  <m:oMath xmlns:m="http://schemas.openxmlformats.org/officeDocument/2006/math">
+                    <m:acc>
+                      <m:accPr>
+                        <m:chr m:val="̈"/>
+                        <m:ctrlPr>
+                          <a:rPr lang="de-DE" i="1" smtClean="0">
+                            <a:latin typeface="Cambria Math" panose="02040503050406030204" pitchFamily="18" charset="0"/>
+                          </a:rPr>
+                        </m:ctrlPr>
+                      </m:accPr>
+                      <m:e>
+                        <m:r>
+                          <a:rPr lang="de-DE" b="0" i="1" smtClean="0">
+                            <a:latin typeface="Cambria Math" panose="02040503050406030204" pitchFamily="18" charset="0"/>
+                          </a:rPr>
+                          <m:t>𝑦</m:t>
+                        </m:r>
+                      </m:e>
+                    </m:acc>
+                    <m:d>
+                      <m:dPr>
+                        <m:ctrlPr>
+                          <a:rPr lang="de-DE" b="0" i="1" smtClean="0">
+                            <a:latin typeface="Cambria Math" panose="02040503050406030204" pitchFamily="18" charset="0"/>
+                          </a:rPr>
+                        </m:ctrlPr>
+                      </m:dPr>
+                      <m:e>
+                        <m:r>
+                          <a:rPr lang="de-DE" b="0" i="1" smtClean="0">
+                            <a:latin typeface="Cambria Math" panose="02040503050406030204" pitchFamily="18" charset="0"/>
+                          </a:rPr>
+                          <m:t>𝑡</m:t>
+                        </m:r>
+                      </m:e>
+                    </m:d>
+                    <m:r>
+                      <a:rPr lang="de-DE" b="0" i="1" smtClean="0">
+                        <a:latin typeface="Cambria Math" panose="02040503050406030204" pitchFamily="18" charset="0"/>
+                      </a:rPr>
+                      <m:t>+6 </m:t>
+                    </m:r>
+                    <m:acc>
+                      <m:accPr>
+                        <m:chr m:val="̇"/>
+                        <m:ctrlPr>
+                          <a:rPr lang="de-DE" b="0" i="1" smtClean="0">
+                            <a:latin typeface="Cambria Math" panose="02040503050406030204" pitchFamily="18" charset="0"/>
+                          </a:rPr>
+                        </m:ctrlPr>
+                      </m:accPr>
+                      <m:e>
+                        <m:r>
+                          <a:rPr lang="de-DE" b="0" i="1" smtClean="0">
+                            <a:latin typeface="Cambria Math" panose="02040503050406030204" pitchFamily="18" charset="0"/>
+                          </a:rPr>
+                          <m:t>𝑦</m:t>
+                        </m:r>
+                      </m:e>
+                    </m:acc>
+                    <m:d>
+                      <m:dPr>
+                        <m:ctrlPr>
+                          <a:rPr lang="de-DE" b="0" i="1" smtClean="0">
+                            <a:latin typeface="Cambria Math" panose="02040503050406030204" pitchFamily="18" charset="0"/>
+                          </a:rPr>
+                        </m:ctrlPr>
+                      </m:dPr>
+                      <m:e>
+                        <m:r>
+                          <a:rPr lang="de-DE" b="0" i="1" smtClean="0">
+                            <a:latin typeface="Cambria Math" panose="02040503050406030204" pitchFamily="18" charset="0"/>
+                          </a:rPr>
+                          <m:t>𝑡</m:t>
+                        </m:r>
+                      </m:e>
+                    </m:d>
+                    <m:r>
+                      <a:rPr lang="de-DE" b="0" i="1" smtClean="0">
+                        <a:latin typeface="Cambria Math" panose="02040503050406030204" pitchFamily="18" charset="0"/>
+                      </a:rPr>
+                      <m:t>+9 </m:t>
+                    </m:r>
+                    <m:r>
+                      <a:rPr lang="de-DE" b="0" i="1" smtClean="0">
+                        <a:latin typeface="Cambria Math" panose="02040503050406030204" pitchFamily="18" charset="0"/>
+                      </a:rPr>
+                      <m:t>𝑦</m:t>
+                    </m:r>
+                    <m:d>
+                      <m:dPr>
+                        <m:ctrlPr>
+                          <a:rPr lang="de-DE" b="0" i="1" smtClean="0">
+                            <a:latin typeface="Cambria Math" panose="02040503050406030204" pitchFamily="18" charset="0"/>
+                          </a:rPr>
+                        </m:ctrlPr>
+                      </m:dPr>
+                      <m:e>
+                        <m:r>
+                          <a:rPr lang="de-DE" b="0" i="1" smtClean="0">
+                            <a:latin typeface="Cambria Math" panose="02040503050406030204" pitchFamily="18" charset="0"/>
+                          </a:rPr>
+                          <m:t>𝑡</m:t>
+                        </m:r>
+                      </m:e>
+                    </m:d>
+                    <m:r>
+                      <a:rPr lang="de-DE" b="0" i="1" smtClean="0">
+                        <a:latin typeface="Cambria Math" panose="02040503050406030204" pitchFamily="18" charset="0"/>
+                      </a:rPr>
+                      <m:t>=9 </m:t>
+                    </m:r>
+                    <m:r>
+                      <a:rPr lang="de-DE" b="0" i="1" smtClean="0">
+                        <a:latin typeface="Cambria Math" panose="02040503050406030204" pitchFamily="18" charset="0"/>
+                      </a:rPr>
+                      <m:t>𝑢</m:t>
+                    </m:r>
+                    <m:r>
+                      <a:rPr lang="de-DE" b="0" i="1" smtClean="0">
+                        <a:latin typeface="Cambria Math" panose="02040503050406030204" pitchFamily="18" charset="0"/>
+                      </a:rPr>
+                      <m:t>(</m:t>
+                    </m:r>
+                    <m:r>
+                      <a:rPr lang="de-DE" b="0" i="1" smtClean="0">
+                        <a:latin typeface="Cambria Math" panose="02040503050406030204" pitchFamily="18" charset="0"/>
+                      </a:rPr>
+                      <m:t>𝑡</m:t>
+                    </m:r>
+                    <m:r>
+                      <a:rPr lang="de-DE" b="0" i="1" smtClean="0">
+                        <a:latin typeface="Cambria Math" panose="02040503050406030204" pitchFamily="18" charset="0"/>
+                      </a:rPr>
+                      <m:t>)</m:t>
+                    </m:r>
+                  </m:oMath>
+                </a14:m>
+                <a:endParaRPr lang="de-DE" dirty="0"/>
+              </a:p>
+              <a:p>
+                <a:pPr marL="0" indent="0">
+                  <a:buNone/>
+                </a:pPr>
+                <a:r>
+                  <a:rPr lang="de-DE" dirty="0" err="1"/>
+                  <a:t>with</a:t>
+                </a:r>
+                <a:r>
+                  <a:rPr lang="de-DE" dirty="0"/>
+                  <a:t> </a:t>
+                </a:r>
+                <a:r>
+                  <a:rPr lang="de-DE" dirty="0" err="1"/>
+                  <a:t>step</a:t>
+                </a:r>
+                <a:r>
+                  <a:rPr lang="de-DE" dirty="0"/>
+                  <a:t> </a:t>
+                </a:r>
+                <a:r>
+                  <a:rPr lang="de-DE" dirty="0" err="1"/>
+                  <a:t>input</a:t>
+                </a:r>
+                <a:r>
+                  <a:rPr lang="de-DE" dirty="0"/>
+                  <a:t> </a:t>
+                </a:r>
+                <a14:m>
+                  <m:oMath xmlns:m="http://schemas.openxmlformats.org/officeDocument/2006/math">
+                    <m:r>
+                      <a:rPr lang="de-DE" b="0" i="1" smtClean="0">
+                        <a:latin typeface="Cambria Math" panose="02040503050406030204" pitchFamily="18" charset="0"/>
+                      </a:rPr>
+                      <m:t>𝑢</m:t>
+                    </m:r>
+                    <m:d>
+                      <m:dPr>
+                        <m:ctrlPr>
+                          <a:rPr lang="de-DE" b="0" i="1" smtClean="0">
+                            <a:latin typeface="Cambria Math" panose="02040503050406030204" pitchFamily="18" charset="0"/>
+                          </a:rPr>
+                        </m:ctrlPr>
+                      </m:dPr>
+                      <m:e>
+                        <m:r>
+                          <a:rPr lang="de-DE" b="0" i="1" smtClean="0">
+                            <a:latin typeface="Cambria Math" panose="02040503050406030204" pitchFamily="18" charset="0"/>
+                          </a:rPr>
+                          <m:t>𝑡</m:t>
+                        </m:r>
+                      </m:e>
+                    </m:d>
+                    <m:r>
+                      <a:rPr lang="de-DE" b="0" i="1" smtClean="0">
+                        <a:latin typeface="Cambria Math" panose="02040503050406030204" pitchFamily="18" charset="0"/>
+                      </a:rPr>
+                      <m:t>=1</m:t>
+                    </m:r>
+                  </m:oMath>
+                </a14:m>
+                <a:r>
+                  <a:rPr lang="de-DE" dirty="0"/>
+                  <a:t> and initial </a:t>
+                </a:r>
+                <a:r>
+                  <a:rPr lang="de-DE" dirty="0" err="1"/>
+                  <a:t>conditions</a:t>
+                </a:r>
+                <a:r>
+                  <a:rPr lang="de-DE" dirty="0"/>
+                  <a:t> </a:t>
+                </a:r>
+                <a14:m>
+                  <m:oMath xmlns:m="http://schemas.openxmlformats.org/officeDocument/2006/math">
+                    <m:r>
+                      <a:rPr lang="de-DE" b="0" i="1" smtClean="0">
+                        <a:latin typeface="Cambria Math" panose="02040503050406030204" pitchFamily="18" charset="0"/>
+                      </a:rPr>
+                      <m:t>𝑦</m:t>
+                    </m:r>
+                    <m:d>
+                      <m:dPr>
+                        <m:ctrlPr>
+                          <a:rPr lang="de-DE" b="0" i="1" smtClean="0">
+                            <a:latin typeface="Cambria Math" panose="02040503050406030204" pitchFamily="18" charset="0"/>
+                          </a:rPr>
+                        </m:ctrlPr>
+                      </m:dPr>
+                      <m:e>
+                        <m:r>
+                          <a:rPr lang="de-DE" b="0" i="1" smtClean="0">
+                            <a:latin typeface="Cambria Math" panose="02040503050406030204" pitchFamily="18" charset="0"/>
+                          </a:rPr>
+                          <m:t>0</m:t>
+                        </m:r>
+                      </m:e>
+                    </m:d>
+                    <m:r>
+                      <a:rPr lang="de-DE" b="0" i="1" smtClean="0">
+                        <a:latin typeface="Cambria Math" panose="02040503050406030204" pitchFamily="18" charset="0"/>
+                      </a:rPr>
+                      <m:t>=0</m:t>
+                    </m:r>
+                  </m:oMath>
+                </a14:m>
+                <a:r>
+                  <a:rPr lang="de-DE" dirty="0"/>
+                  <a:t>, </a:t>
+                </a:r>
+                <a14:m>
+                  <m:oMath xmlns:m="http://schemas.openxmlformats.org/officeDocument/2006/math">
+                    <m:acc>
+                      <m:accPr>
+                        <m:chr m:val="̇"/>
+                        <m:ctrlPr>
+                          <a:rPr lang="de-DE" i="1" smtClean="0">
+                            <a:latin typeface="Cambria Math" panose="02040503050406030204" pitchFamily="18" charset="0"/>
+                          </a:rPr>
+                        </m:ctrlPr>
+                      </m:accPr>
+                      <m:e>
+                        <m:r>
+                          <a:rPr lang="de-DE" b="0" i="1" smtClean="0">
+                            <a:latin typeface="Cambria Math" panose="02040503050406030204" pitchFamily="18" charset="0"/>
+                          </a:rPr>
+                          <m:t>𝑦</m:t>
+                        </m:r>
+                      </m:e>
+                    </m:acc>
+                    <m:d>
+                      <m:dPr>
+                        <m:ctrlPr>
+                          <a:rPr lang="de-DE" b="0" i="1" smtClean="0">
+                            <a:latin typeface="Cambria Math" panose="02040503050406030204" pitchFamily="18" charset="0"/>
+                          </a:rPr>
+                        </m:ctrlPr>
+                      </m:dPr>
+                      <m:e>
+                        <m:r>
+                          <a:rPr lang="de-DE" b="0" i="1" smtClean="0">
+                            <a:latin typeface="Cambria Math" panose="02040503050406030204" pitchFamily="18" charset="0"/>
+                          </a:rPr>
+                          <m:t>0</m:t>
+                        </m:r>
+                      </m:e>
+                    </m:d>
+                    <m:r>
+                      <a:rPr lang="de-DE" b="0" i="1" smtClean="0">
+                        <a:latin typeface="Cambria Math" panose="02040503050406030204" pitchFamily="18" charset="0"/>
+                      </a:rPr>
+                      <m:t>=0</m:t>
+                    </m:r>
+                  </m:oMath>
+                </a14:m>
+                <a:r>
+                  <a:rPr lang="de-DE" dirty="0"/>
+                  <a:t>.</a:t>
+                </a:r>
+                <a:br>
+                  <a:rPr lang="de-DE" dirty="0"/>
+                </a:br>
+                <a:endParaRPr lang="de-DE" dirty="0"/>
+              </a:p>
+              <a:p>
+                <a:r>
+                  <a:rPr lang="de-DE" dirty="0" err="1"/>
+                  <a:t>Determine</a:t>
+                </a:r>
+                <a:r>
+                  <a:rPr lang="de-DE" dirty="0"/>
+                  <a:t> </a:t>
+                </a:r>
+                <a:r>
+                  <a:rPr lang="de-DE" dirty="0" err="1"/>
+                  <a:t>whether</a:t>
+                </a:r>
+                <a:r>
+                  <a:rPr lang="de-DE" dirty="0"/>
+                  <a:t> </a:t>
+                </a:r>
+                <a:r>
+                  <a:rPr lang="de-DE" dirty="0" err="1"/>
+                  <a:t>the</a:t>
+                </a:r>
+                <a:r>
+                  <a:rPr lang="de-DE" dirty="0"/>
+                  <a:t> </a:t>
+                </a:r>
+                <a:r>
+                  <a:rPr lang="de-DE" dirty="0" err="1"/>
+                  <a:t>system</a:t>
+                </a:r>
+                <a:r>
+                  <a:rPr lang="de-DE" dirty="0"/>
+                  <a:t> </a:t>
+                </a:r>
+                <a:r>
+                  <a:rPr lang="de-DE" dirty="0" err="1"/>
+                  <a:t>is</a:t>
+                </a:r>
+                <a:r>
+                  <a:rPr lang="de-DE" dirty="0"/>
+                  <a:t> </a:t>
+                </a:r>
+                <a:r>
+                  <a:rPr lang="de-DE" dirty="0" err="1"/>
+                  <a:t>underdamped</a:t>
+                </a:r>
+                <a:r>
+                  <a:rPr lang="de-DE" dirty="0"/>
+                  <a:t>, </a:t>
+                </a:r>
+                <a:r>
+                  <a:rPr lang="de-DE" dirty="0" err="1"/>
+                  <a:t>critically</a:t>
+                </a:r>
+                <a:r>
+                  <a:rPr lang="de-DE" dirty="0"/>
+                  <a:t> </a:t>
+                </a:r>
+                <a:r>
+                  <a:rPr lang="de-DE" dirty="0" err="1"/>
+                  <a:t>damped</a:t>
+                </a:r>
+                <a:r>
+                  <a:rPr lang="de-DE" dirty="0"/>
+                  <a:t>, </a:t>
+                </a:r>
+                <a:r>
+                  <a:rPr lang="de-DE" dirty="0" err="1"/>
+                  <a:t>or</a:t>
+                </a:r>
+                <a:r>
+                  <a:rPr lang="de-DE" dirty="0"/>
+                  <a:t> </a:t>
+                </a:r>
+                <a:r>
+                  <a:rPr lang="de-DE" dirty="0" err="1"/>
+                  <a:t>overdamped</a:t>
+                </a:r>
+                <a:r>
+                  <a:rPr lang="de-DE" dirty="0"/>
+                  <a:t>.</a:t>
+                </a:r>
+              </a:p>
+              <a:p>
+                <a:r>
+                  <a:rPr lang="de-DE" dirty="0" err="1"/>
+                  <a:t>Determine</a:t>
+                </a:r>
+                <a:r>
+                  <a:rPr lang="de-DE" dirty="0"/>
+                  <a:t> </a:t>
+                </a:r>
+                <a:r>
+                  <a:rPr lang="de-DE" dirty="0" err="1"/>
+                  <a:t>the</a:t>
+                </a:r>
+                <a:r>
+                  <a:rPr lang="de-DE" dirty="0"/>
+                  <a:t> </a:t>
+                </a:r>
+                <a:r>
+                  <a:rPr lang="de-DE" dirty="0" err="1"/>
+                  <a:t>steady-state</a:t>
+                </a:r>
+                <a:r>
+                  <a:rPr lang="de-DE" dirty="0"/>
+                  <a:t> </a:t>
+                </a:r>
+                <a:r>
+                  <a:rPr lang="de-DE" dirty="0" err="1"/>
+                  <a:t>value</a:t>
+                </a:r>
+                <a:r>
+                  <a:rPr lang="de-DE" dirty="0"/>
+                  <a:t> </a:t>
+                </a:r>
+                <a14:m>
+                  <m:oMath xmlns:m="http://schemas.openxmlformats.org/officeDocument/2006/math">
+                    <m:sSub>
+                      <m:sSubPr>
+                        <m:ctrlPr>
+                          <a:rPr lang="de-DE" i="1" smtClean="0">
+                            <a:latin typeface="Cambria Math" panose="02040503050406030204" pitchFamily="18" charset="0"/>
+                          </a:rPr>
+                        </m:ctrlPr>
+                      </m:sSubPr>
+                      <m:e>
+                        <m:r>
+                          <a:rPr lang="de-DE" b="0" i="1" smtClean="0">
+                            <a:latin typeface="Cambria Math" panose="02040503050406030204" pitchFamily="18" charset="0"/>
+                          </a:rPr>
+                          <m:t>𝑦</m:t>
+                        </m:r>
+                      </m:e>
+                      <m:sub>
+                        <m:r>
+                          <a:rPr lang="de-DE" i="1" smtClean="0">
+                            <a:latin typeface="Cambria Math" panose="02040503050406030204" pitchFamily="18" charset="0"/>
+                            <a:ea typeface="Cambria Math" panose="02040503050406030204" pitchFamily="18" charset="0"/>
+                          </a:rPr>
+                          <m:t>∞</m:t>
+                        </m:r>
+                      </m:sub>
+                    </m:sSub>
+                  </m:oMath>
+                </a14:m>
+                <a:r>
+                  <a:rPr lang="de-DE" dirty="0"/>
+                  <a:t>.</a:t>
+                </a:r>
+              </a:p>
+              <a:p>
+                <a:r>
+                  <a:rPr lang="de-DE" dirty="0" err="1"/>
+                  <a:t>Describe</a:t>
+                </a:r>
+                <a:r>
+                  <a:rPr lang="de-DE" dirty="0"/>
+                  <a:t> </a:t>
+                </a:r>
+                <a:r>
+                  <a:rPr lang="de-DE" dirty="0" err="1"/>
+                  <a:t>qualitatively</a:t>
+                </a:r>
+                <a:r>
+                  <a:rPr lang="de-DE" dirty="0"/>
+                  <a:t> </a:t>
+                </a:r>
+                <a:r>
+                  <a:rPr lang="de-DE" dirty="0" err="1"/>
+                  <a:t>the</a:t>
+                </a:r>
+                <a:r>
+                  <a:rPr lang="de-DE" dirty="0"/>
+                  <a:t> </a:t>
+                </a:r>
+                <a:r>
+                  <a:rPr lang="de-DE" dirty="0" err="1"/>
+                  <a:t>shape</a:t>
+                </a:r>
+                <a:r>
+                  <a:rPr lang="de-DE" dirty="0"/>
+                  <a:t> </a:t>
+                </a:r>
+                <a:r>
+                  <a:rPr lang="de-DE" dirty="0" err="1"/>
+                  <a:t>of</a:t>
+                </a:r>
+                <a:r>
+                  <a:rPr lang="de-DE" dirty="0"/>
+                  <a:t> </a:t>
+                </a:r>
+                <a:r>
+                  <a:rPr lang="de-DE" dirty="0" err="1"/>
+                  <a:t>the</a:t>
+                </a:r>
+                <a:r>
+                  <a:rPr lang="de-DE" dirty="0"/>
+                  <a:t> </a:t>
+                </a:r>
+                <a:r>
+                  <a:rPr lang="de-DE" dirty="0" err="1"/>
+                  <a:t>step</a:t>
+                </a:r>
+                <a:r>
+                  <a:rPr lang="de-DE" dirty="0"/>
+                  <a:t> </a:t>
+                </a:r>
+                <a:r>
+                  <a:rPr lang="de-DE" dirty="0" err="1"/>
+                  <a:t>response</a:t>
+                </a:r>
+                <a:r>
+                  <a:rPr lang="de-DE" dirty="0"/>
+                  <a:t>.</a:t>
+                </a:r>
+              </a:p>
+            </p:txBody>
+          </p:sp>
+        </mc:Choice>
+        <mc:Fallback>
+          <p:sp>
+            <p:nvSpPr>
+              <p:cNvPr id="3" name="Inhaltsplatzhalter 2">
+                <a:extLst>
+                  <a:ext uri="{FF2B5EF4-FFF2-40B4-BE49-F238E27FC236}">
+                    <a16:creationId xmlns:a16="http://schemas.microsoft.com/office/drawing/2014/main" id="{CAAB09D5-032A-47C9-97C9-6279A445F3F8}"/>
+                  </a:ext>
+                </a:extLst>
+              </p:cNvPr>
+              <p:cNvSpPr>
+                <a:spLocks noGrp="1" noRot="1" noChangeAspect="1" noMove="1" noResize="1" noEditPoints="1" noAdjustHandles="1" noChangeArrowheads="1" noChangeShapeType="1" noTextEdit="1"/>
+              </p:cNvSpPr>
+              <p:nvPr>
+                <p:ph idx="1"/>
+              </p:nvPr>
+            </p:nvSpPr>
+            <p:spPr>
+              <a:blipFill>
+                <a:blip r:embed="rId2"/>
+                <a:stretch>
+                  <a:fillRect l="-1206" t="-2326"/>
+                </a:stretch>
+              </a:blipFill>
+            </p:spPr>
+            <p:txBody>
+              <a:bodyPr/>
+              <a:lstStyle/>
+              <a:p>
+                <a:r>
+                  <a:rPr lang="de-DE">
+                    <a:noFill/>
+                  </a:rPr>
+                  <a:t> </a:t>
+                </a:r>
+              </a:p>
+            </p:txBody>
+          </p:sp>
+        </mc:Fallback>
+      </mc:AlternateContent>
+      <p:sp>
+        <p:nvSpPr>
+          <p:cNvPr id="4" name="Foliennummernplatzhalter 3">
+            <a:extLst>
+              <a:ext uri="{FF2B5EF4-FFF2-40B4-BE49-F238E27FC236}">
+                <a16:creationId xmlns:a16="http://schemas.microsoft.com/office/drawing/2014/main" id="{4BAE5DBD-3E04-D233-6FED-79B7CC98CF34}"/>
+              </a:ext>
+            </a:extLst>
+          </p:cNvPr>
+          <p:cNvSpPr>
+            <a:spLocks noGrp="1"/>
+          </p:cNvSpPr>
+          <p:nvPr>
+            <p:ph type="sldNum" sz="quarter" idx="12"/>
+          </p:nvPr>
+        </p:nvSpPr>
+        <p:spPr/>
+        <p:txBody>
+          <a:bodyPr/>
+          <a:lstStyle/>
+          <a:p>
+            <a:fld id="{08C366F5-AFAD-49CB-854A-9D9E238FCA13}" type="slidenum">
+              <a:rPr lang="en-GB" smtClean="0"/>
+              <a:t>39</a:t>
+            </a:fld>
+            <a:endParaRPr lang="en-GB"/>
+          </a:p>
+        </p:txBody>
+      </p:sp>
+    </p:spTree>
+    <p:extLst>
+      <p:ext uri="{BB962C8B-B14F-4D97-AF65-F5344CB8AC3E}">
+        <p14:creationId xmlns:p14="http://schemas.microsoft.com/office/powerpoint/2010/main" val="440022587"/>
+      </p:ext>
+    </p:extLst>
+  </p:cSld>
+  <p:clrMapOvr>
+    <a:masterClrMapping/>
+  </p:clrMapOvr>
+</p:sld>
+</file>
+
 <file path=ppt/slides/slide4.xml><?xml version="1.0" encoding="utf-8"?>
 <p:sld xmlns:a="http://schemas.openxmlformats.org/drawingml/2006/main" xmlns:r="http://schemas.openxmlformats.org/officeDocument/2006/relationships" xmlns:p="http://schemas.openxmlformats.org/presentationml/2006/main">
   <p:cSld>
@@ -37435,6 +39622,599 @@
 </p:sld>
 </file>
 
+<file path=ppt/slides/slide40.xml><?xml version="1.0" encoding="utf-8"?>
+<p:sld xmlns:a="http://schemas.openxmlformats.org/drawingml/2006/main" xmlns:r="http://schemas.openxmlformats.org/officeDocument/2006/relationships" xmlns:p="http://schemas.openxmlformats.org/presentationml/2006/main">
+  <p:cSld>
+    <p:spTree>
+      <p:nvGrpSpPr>
+        <p:cNvPr id="1" name=""/>
+        <p:cNvGrpSpPr/>
+        <p:nvPr/>
+      </p:nvGrpSpPr>
+      <p:grpSpPr>
+        <a:xfrm>
+          <a:off x="0" y="0"/>
+          <a:ext cx="0" cy="0"/>
+          <a:chOff x="0" y="0"/>
+          <a:chExt cx="0" cy="0"/>
+        </a:xfrm>
+      </p:grpSpPr>
+      <p:sp>
+        <p:nvSpPr>
+          <p:cNvPr id="2" name="Titel 1">
+            <a:extLst>
+              <a:ext uri="{FF2B5EF4-FFF2-40B4-BE49-F238E27FC236}">
+                <a16:creationId xmlns:a16="http://schemas.microsoft.com/office/drawing/2014/main" id="{C9447C76-C799-B13F-C823-EB9121387C96}"/>
+              </a:ext>
+            </a:extLst>
+          </p:cNvPr>
+          <p:cNvSpPr>
+            <a:spLocks noGrp="1"/>
+          </p:cNvSpPr>
+          <p:nvPr>
+            <p:ph type="title"/>
+          </p:nvPr>
+        </p:nvSpPr>
+        <p:spPr/>
+        <p:txBody>
+          <a:bodyPr/>
+          <a:lstStyle/>
+          <a:p>
+            <a:r>
+              <a:rPr lang="de-DE" dirty="0" err="1"/>
+              <a:t>Exercise</a:t>
+            </a:r>
+            <a:r>
+              <a:rPr lang="de-DE" dirty="0"/>
+              <a:t> 6</a:t>
+            </a:r>
+          </a:p>
+        </p:txBody>
+      </p:sp>
+      <mc:AlternateContent xmlns:mc="http://schemas.openxmlformats.org/markup-compatibility/2006">
+        <mc:Choice xmlns:a14="http://schemas.microsoft.com/office/drawing/2010/main" Requires="a14">
+          <p:sp>
+            <p:nvSpPr>
+              <p:cNvPr id="3" name="Inhaltsplatzhalter 2">
+                <a:extLst>
+                  <a:ext uri="{FF2B5EF4-FFF2-40B4-BE49-F238E27FC236}">
+                    <a16:creationId xmlns:a16="http://schemas.microsoft.com/office/drawing/2014/main" id="{7E245497-9085-CD5D-C020-0BD9B54EA0F2}"/>
+                  </a:ext>
+                </a:extLst>
+              </p:cNvPr>
+              <p:cNvSpPr>
+                <a:spLocks noGrp="1"/>
+              </p:cNvSpPr>
+              <p:nvPr>
+                <p:ph idx="1"/>
+              </p:nvPr>
+            </p:nvSpPr>
+            <p:spPr/>
+            <p:txBody>
+              <a:bodyPr>
+                <a:normAutofit/>
+              </a:bodyPr>
+              <a:lstStyle/>
+              <a:p>
+                <a:pPr marL="0" indent="0">
+                  <a:buNone/>
+                </a:pPr>
+                <a:r>
+                  <a:rPr lang="de-DE" dirty="0"/>
+                  <a:t>Consider </a:t>
+                </a:r>
+                <a:r>
+                  <a:rPr lang="de-DE" dirty="0" err="1"/>
+                  <a:t>the</a:t>
+                </a:r>
+                <a:r>
+                  <a:rPr lang="de-DE" dirty="0"/>
+                  <a:t> </a:t>
+                </a:r>
+                <a:r>
+                  <a:rPr lang="de-DE" dirty="0" err="1"/>
+                  <a:t>system</a:t>
+                </a:r>
+                <a:r>
+                  <a:rPr lang="de-DE" dirty="0"/>
+                  <a:t>:</a:t>
+                </a:r>
+              </a:p>
+              <a:p>
+                <a:pPr marL="0" indent="0">
+                  <a:buNone/>
+                </a:pPr>
+                <a:r>
+                  <a:rPr lang="de-DE" dirty="0"/>
+                  <a:t>	</a:t>
+                </a:r>
+                <a14:m>
+                  <m:oMath xmlns:m="http://schemas.openxmlformats.org/officeDocument/2006/math">
+                    <m:acc>
+                      <m:accPr>
+                        <m:chr m:val="̈"/>
+                        <m:ctrlPr>
+                          <a:rPr lang="de-DE" i="1">
+                            <a:latin typeface="Cambria Math" panose="02040503050406030204" pitchFamily="18" charset="0"/>
+                          </a:rPr>
+                        </m:ctrlPr>
+                      </m:accPr>
+                      <m:e>
+                        <m:r>
+                          <a:rPr lang="de-DE" i="1">
+                            <a:latin typeface="Cambria Math" panose="02040503050406030204" pitchFamily="18" charset="0"/>
+                          </a:rPr>
+                          <m:t>𝑦</m:t>
+                        </m:r>
+                      </m:e>
+                    </m:acc>
+                    <m:d>
+                      <m:dPr>
+                        <m:ctrlPr>
+                          <a:rPr lang="de-DE" i="1">
+                            <a:latin typeface="Cambria Math" panose="02040503050406030204" pitchFamily="18" charset="0"/>
+                          </a:rPr>
+                        </m:ctrlPr>
+                      </m:dPr>
+                      <m:e>
+                        <m:r>
+                          <a:rPr lang="de-DE" i="1">
+                            <a:latin typeface="Cambria Math" panose="02040503050406030204" pitchFamily="18" charset="0"/>
+                          </a:rPr>
+                          <m:t>𝑡</m:t>
+                        </m:r>
+                      </m:e>
+                    </m:d>
+                    <m:r>
+                      <a:rPr lang="de-DE" i="1">
+                        <a:latin typeface="Cambria Math" panose="02040503050406030204" pitchFamily="18" charset="0"/>
+                      </a:rPr>
+                      <m:t>+</m:t>
+                    </m:r>
+                    <m:r>
+                      <a:rPr lang="de-DE" b="0" i="1" smtClean="0">
+                        <a:latin typeface="Cambria Math" panose="02040503050406030204" pitchFamily="18" charset="0"/>
+                      </a:rPr>
+                      <m:t>2</m:t>
+                    </m:r>
+                    <m:r>
+                      <a:rPr lang="de-DE" i="1">
+                        <a:latin typeface="Cambria Math" panose="02040503050406030204" pitchFamily="18" charset="0"/>
+                      </a:rPr>
+                      <m:t> </m:t>
+                    </m:r>
+                    <m:acc>
+                      <m:accPr>
+                        <m:chr m:val="̇"/>
+                        <m:ctrlPr>
+                          <a:rPr lang="de-DE" i="1">
+                            <a:latin typeface="Cambria Math" panose="02040503050406030204" pitchFamily="18" charset="0"/>
+                          </a:rPr>
+                        </m:ctrlPr>
+                      </m:accPr>
+                      <m:e>
+                        <m:r>
+                          <a:rPr lang="de-DE" i="1">
+                            <a:latin typeface="Cambria Math" panose="02040503050406030204" pitchFamily="18" charset="0"/>
+                          </a:rPr>
+                          <m:t>𝑦</m:t>
+                        </m:r>
+                      </m:e>
+                    </m:acc>
+                    <m:d>
+                      <m:dPr>
+                        <m:ctrlPr>
+                          <a:rPr lang="de-DE" i="1">
+                            <a:latin typeface="Cambria Math" panose="02040503050406030204" pitchFamily="18" charset="0"/>
+                          </a:rPr>
+                        </m:ctrlPr>
+                      </m:dPr>
+                      <m:e>
+                        <m:r>
+                          <a:rPr lang="de-DE" i="1">
+                            <a:latin typeface="Cambria Math" panose="02040503050406030204" pitchFamily="18" charset="0"/>
+                          </a:rPr>
+                          <m:t>𝑡</m:t>
+                        </m:r>
+                      </m:e>
+                    </m:d>
+                    <m:r>
+                      <a:rPr lang="de-DE" i="1">
+                        <a:latin typeface="Cambria Math" panose="02040503050406030204" pitchFamily="18" charset="0"/>
+                      </a:rPr>
+                      <m:t>+</m:t>
+                    </m:r>
+                    <m:r>
+                      <a:rPr lang="de-DE" b="0" i="1" smtClean="0">
+                        <a:latin typeface="Cambria Math" panose="02040503050406030204" pitchFamily="18" charset="0"/>
+                      </a:rPr>
+                      <m:t>5</m:t>
+                    </m:r>
+                    <m:r>
+                      <a:rPr lang="de-DE" i="1">
+                        <a:latin typeface="Cambria Math" panose="02040503050406030204" pitchFamily="18" charset="0"/>
+                      </a:rPr>
+                      <m:t> </m:t>
+                    </m:r>
+                    <m:r>
+                      <a:rPr lang="de-DE" i="1">
+                        <a:latin typeface="Cambria Math" panose="02040503050406030204" pitchFamily="18" charset="0"/>
+                      </a:rPr>
+                      <m:t>𝑦</m:t>
+                    </m:r>
+                    <m:d>
+                      <m:dPr>
+                        <m:ctrlPr>
+                          <a:rPr lang="de-DE" i="1">
+                            <a:latin typeface="Cambria Math" panose="02040503050406030204" pitchFamily="18" charset="0"/>
+                          </a:rPr>
+                        </m:ctrlPr>
+                      </m:dPr>
+                      <m:e>
+                        <m:r>
+                          <a:rPr lang="de-DE" i="1">
+                            <a:latin typeface="Cambria Math" panose="02040503050406030204" pitchFamily="18" charset="0"/>
+                          </a:rPr>
+                          <m:t>𝑡</m:t>
+                        </m:r>
+                      </m:e>
+                    </m:d>
+                    <m:r>
+                      <a:rPr lang="de-DE" i="1">
+                        <a:latin typeface="Cambria Math" panose="02040503050406030204" pitchFamily="18" charset="0"/>
+                      </a:rPr>
+                      <m:t>=</m:t>
+                    </m:r>
+                    <m:r>
+                      <a:rPr lang="de-DE" b="0" i="1" smtClean="0">
+                        <a:latin typeface="Cambria Math" panose="02040503050406030204" pitchFamily="18" charset="0"/>
+                      </a:rPr>
+                      <m:t>5</m:t>
+                    </m:r>
+                    <m:r>
+                      <a:rPr lang="de-DE" i="1">
+                        <a:latin typeface="Cambria Math" panose="02040503050406030204" pitchFamily="18" charset="0"/>
+                      </a:rPr>
+                      <m:t> </m:t>
+                    </m:r>
+                    <m:r>
+                      <a:rPr lang="de-DE" i="1">
+                        <a:latin typeface="Cambria Math" panose="02040503050406030204" pitchFamily="18" charset="0"/>
+                      </a:rPr>
+                      <m:t>𝑢</m:t>
+                    </m:r>
+                    <m:r>
+                      <a:rPr lang="de-DE" i="1">
+                        <a:latin typeface="Cambria Math" panose="02040503050406030204" pitchFamily="18" charset="0"/>
+                      </a:rPr>
+                      <m:t>(</m:t>
+                    </m:r>
+                    <m:r>
+                      <a:rPr lang="de-DE" i="1">
+                        <a:latin typeface="Cambria Math" panose="02040503050406030204" pitchFamily="18" charset="0"/>
+                      </a:rPr>
+                      <m:t>𝑡</m:t>
+                    </m:r>
+                    <m:r>
+                      <a:rPr lang="de-DE" i="1">
+                        <a:latin typeface="Cambria Math" panose="02040503050406030204" pitchFamily="18" charset="0"/>
+                      </a:rPr>
+                      <m:t>)</m:t>
+                    </m:r>
+                  </m:oMath>
+                </a14:m>
+                <a:endParaRPr lang="de-DE" dirty="0"/>
+              </a:p>
+              <a:p>
+                <a:pPr marL="0" indent="0">
+                  <a:buNone/>
+                </a:pPr>
+                <a:r>
+                  <a:rPr lang="de-DE" dirty="0"/>
+                  <a:t>with </a:t>
+                </a:r>
+                <a:r>
+                  <a:rPr lang="de-DE" dirty="0" err="1"/>
+                  <a:t>step</a:t>
+                </a:r>
+                <a:r>
+                  <a:rPr lang="de-DE" dirty="0"/>
+                  <a:t> </a:t>
+                </a:r>
+                <a:r>
+                  <a:rPr lang="de-DE" dirty="0" err="1"/>
+                  <a:t>input</a:t>
+                </a:r>
+                <a:r>
+                  <a:rPr lang="de-DE" dirty="0"/>
+                  <a:t> </a:t>
+                </a:r>
+                <a14:m>
+                  <m:oMath xmlns:m="http://schemas.openxmlformats.org/officeDocument/2006/math">
+                    <m:r>
+                      <a:rPr lang="de-DE" i="1">
+                        <a:latin typeface="Cambria Math" panose="02040503050406030204" pitchFamily="18" charset="0"/>
+                      </a:rPr>
+                      <m:t>𝑢</m:t>
+                    </m:r>
+                    <m:d>
+                      <m:dPr>
+                        <m:ctrlPr>
+                          <a:rPr lang="de-DE" i="1">
+                            <a:latin typeface="Cambria Math" panose="02040503050406030204" pitchFamily="18" charset="0"/>
+                          </a:rPr>
+                        </m:ctrlPr>
+                      </m:dPr>
+                      <m:e>
+                        <m:r>
+                          <a:rPr lang="de-DE" i="1">
+                            <a:latin typeface="Cambria Math" panose="02040503050406030204" pitchFamily="18" charset="0"/>
+                          </a:rPr>
+                          <m:t>𝑡</m:t>
+                        </m:r>
+                      </m:e>
+                    </m:d>
+                    <m:r>
+                      <a:rPr lang="de-DE" i="1">
+                        <a:latin typeface="Cambria Math" panose="02040503050406030204" pitchFamily="18" charset="0"/>
+                      </a:rPr>
+                      <m:t>=1</m:t>
+                    </m:r>
+                  </m:oMath>
+                </a14:m>
+                <a:r>
+                  <a:rPr lang="de-DE" dirty="0"/>
+                  <a:t>.</a:t>
+                </a:r>
+                <a:br>
+                  <a:rPr lang="de-DE" dirty="0"/>
+                </a:br>
+                <a:endParaRPr lang="de-DE" dirty="0"/>
+              </a:p>
+              <a:p>
+                <a:r>
+                  <a:rPr lang="de-DE" dirty="0" err="1"/>
+                  <a:t>Determine</a:t>
+                </a:r>
+                <a:r>
+                  <a:rPr lang="de-DE" dirty="0"/>
+                  <a:t> </a:t>
+                </a:r>
+                <a14:m>
+                  <m:oMath xmlns:m="http://schemas.openxmlformats.org/officeDocument/2006/math">
+                    <m:sSub>
+                      <m:sSubPr>
+                        <m:ctrlPr>
+                          <a:rPr lang="el-GR" i="1">
+                            <a:latin typeface="Cambria Math" panose="02040503050406030204" pitchFamily="18" charset="0"/>
+                            <a:ea typeface="Cambria Math" panose="02040503050406030204" pitchFamily="18" charset="0"/>
+                          </a:rPr>
+                        </m:ctrlPr>
+                      </m:sSubPr>
+                      <m:e>
+                        <m:r>
+                          <a:rPr lang="el-GR" i="1">
+                            <a:latin typeface="Cambria Math" panose="02040503050406030204" pitchFamily="18" charset="0"/>
+                            <a:ea typeface="Cambria Math" panose="02040503050406030204" pitchFamily="18" charset="0"/>
+                          </a:rPr>
+                          <m:t>𝜔</m:t>
+                        </m:r>
+                      </m:e>
+                      <m:sub>
+                        <m:r>
+                          <a:rPr lang="de-DE" i="1">
+                            <a:latin typeface="Cambria Math" panose="02040503050406030204" pitchFamily="18" charset="0"/>
+                            <a:ea typeface="Cambria Math" panose="02040503050406030204" pitchFamily="18" charset="0"/>
+                          </a:rPr>
+                          <m:t>𝑛</m:t>
+                        </m:r>
+                      </m:sub>
+                    </m:sSub>
+                  </m:oMath>
+                </a14:m>
+                <a:r>
+                  <a:rPr lang="de-DE" dirty="0"/>
+                  <a:t> and </a:t>
+                </a:r>
+                <a14:m>
+                  <m:oMath xmlns:m="http://schemas.openxmlformats.org/officeDocument/2006/math">
+                    <m:r>
+                      <a:rPr lang="el-GR" i="1">
+                        <a:latin typeface="Cambria Math" panose="02040503050406030204" pitchFamily="18" charset="0"/>
+                        <a:ea typeface="Cambria Math" panose="02040503050406030204" pitchFamily="18" charset="0"/>
+                      </a:rPr>
+                      <m:t>𝜁</m:t>
+                    </m:r>
+                  </m:oMath>
+                </a14:m>
+                <a:r>
+                  <a:rPr lang="de-DE" dirty="0"/>
+                  <a:t>.</a:t>
+                </a:r>
+              </a:p>
+              <a:p>
+                <a:r>
+                  <a:rPr lang="de-DE" dirty="0" err="1"/>
+                  <a:t>Classify</a:t>
+                </a:r>
+                <a:r>
+                  <a:rPr lang="de-DE" dirty="0"/>
+                  <a:t> </a:t>
+                </a:r>
+                <a:r>
+                  <a:rPr lang="de-DE" dirty="0" err="1"/>
+                  <a:t>the</a:t>
+                </a:r>
+                <a:r>
+                  <a:rPr lang="de-DE" dirty="0"/>
+                  <a:t> </a:t>
+                </a:r>
+                <a:r>
+                  <a:rPr lang="de-DE" dirty="0" err="1"/>
+                  <a:t>damping</a:t>
+                </a:r>
+                <a:r>
+                  <a:rPr lang="de-DE" dirty="0"/>
+                  <a:t> </a:t>
+                </a:r>
+                <a:r>
+                  <a:rPr lang="de-DE" dirty="0" err="1"/>
+                  <a:t>behavior</a:t>
+                </a:r>
+                <a:r>
+                  <a:rPr lang="de-DE" dirty="0"/>
+                  <a:t>.</a:t>
+                </a:r>
+              </a:p>
+              <a:p>
+                <a:r>
+                  <a:rPr lang="de-DE" dirty="0"/>
+                  <a:t>Will </a:t>
+                </a:r>
+                <a:r>
+                  <a:rPr lang="de-DE" dirty="0" err="1"/>
+                  <a:t>the</a:t>
+                </a:r>
+                <a:r>
+                  <a:rPr lang="de-DE" dirty="0"/>
+                  <a:t> </a:t>
+                </a:r>
+                <a:r>
+                  <a:rPr lang="de-DE" dirty="0" err="1"/>
+                  <a:t>system</a:t>
+                </a:r>
+                <a:r>
+                  <a:rPr lang="de-DE" dirty="0"/>
+                  <a:t> </a:t>
+                </a:r>
+                <a:r>
+                  <a:rPr lang="de-DE" dirty="0" err="1"/>
+                  <a:t>overshoot</a:t>
+                </a:r>
+                <a:r>
+                  <a:rPr lang="de-DE" dirty="0"/>
+                  <a:t>?</a:t>
+                </a:r>
+              </a:p>
+              <a:p>
+                <a:r>
+                  <a:rPr lang="de-DE" dirty="0" err="1"/>
+                  <a:t>Determine</a:t>
+                </a:r>
+                <a:r>
+                  <a:rPr lang="de-DE" dirty="0"/>
+                  <a:t> </a:t>
+                </a:r>
+                <a:r>
+                  <a:rPr lang="de-DE" dirty="0" err="1"/>
+                  <a:t>the</a:t>
+                </a:r>
+                <a:r>
+                  <a:rPr lang="de-DE" dirty="0"/>
+                  <a:t> </a:t>
+                </a:r>
+                <a:r>
+                  <a:rPr lang="de-DE" dirty="0" err="1"/>
+                  <a:t>steady-state</a:t>
+                </a:r>
+                <a:r>
+                  <a:rPr lang="de-DE" dirty="0"/>
+                  <a:t> </a:t>
+                </a:r>
+                <a:r>
+                  <a:rPr lang="de-DE" dirty="0" err="1"/>
+                  <a:t>value</a:t>
+                </a:r>
+                <a:r>
+                  <a:rPr lang="de-DE" dirty="0"/>
+                  <a:t>.</a:t>
+                </a:r>
+              </a:p>
+            </p:txBody>
+          </p:sp>
+        </mc:Choice>
+        <mc:Fallback>
+          <p:sp>
+            <p:nvSpPr>
+              <p:cNvPr id="3" name="Inhaltsplatzhalter 2">
+                <a:extLst>
+                  <a:ext uri="{FF2B5EF4-FFF2-40B4-BE49-F238E27FC236}">
+                    <a16:creationId xmlns:a16="http://schemas.microsoft.com/office/drawing/2014/main" id="{7E245497-9085-CD5D-C020-0BD9B54EA0F2}"/>
+                  </a:ext>
+                </a:extLst>
+              </p:cNvPr>
+              <p:cNvSpPr>
+                <a:spLocks noGrp="1" noRot="1" noChangeAspect="1" noMove="1" noResize="1" noEditPoints="1" noAdjustHandles="1" noChangeArrowheads="1" noChangeShapeType="1" noTextEdit="1"/>
+              </p:cNvSpPr>
+              <p:nvPr>
+                <p:ph idx="1"/>
+              </p:nvPr>
+            </p:nvSpPr>
+            <p:spPr>
+              <a:blipFill>
+                <a:blip r:embed="rId2"/>
+                <a:stretch>
+                  <a:fillRect l="-1206" t="-2326"/>
+                </a:stretch>
+              </a:blipFill>
+            </p:spPr>
+            <p:txBody>
+              <a:bodyPr/>
+              <a:lstStyle/>
+              <a:p>
+                <a:r>
+                  <a:rPr lang="de-DE">
+                    <a:noFill/>
+                  </a:rPr>
+                  <a:t> </a:t>
+                </a:r>
+              </a:p>
+            </p:txBody>
+          </p:sp>
+        </mc:Fallback>
+      </mc:AlternateContent>
+      <p:sp>
+        <p:nvSpPr>
+          <p:cNvPr id="4" name="Foliennummernplatzhalter 3">
+            <a:extLst>
+              <a:ext uri="{FF2B5EF4-FFF2-40B4-BE49-F238E27FC236}">
+                <a16:creationId xmlns:a16="http://schemas.microsoft.com/office/drawing/2014/main" id="{9877ED24-242F-91CA-64CD-6915474D36DD}"/>
+              </a:ext>
+            </a:extLst>
+          </p:cNvPr>
+          <p:cNvSpPr>
+            <a:spLocks noGrp="1"/>
+          </p:cNvSpPr>
+          <p:nvPr>
+            <p:ph type="sldNum" sz="quarter" idx="12"/>
+          </p:nvPr>
+        </p:nvSpPr>
+        <p:spPr/>
+        <p:txBody>
+          <a:bodyPr/>
+          <a:lstStyle/>
+          <a:p>
+            <a:fld id="{08C366F5-AFAD-49CB-854A-9D9E238FCA13}" type="slidenum">
+              <a:rPr lang="en-GB" smtClean="0"/>
+              <a:t>40</a:t>
+            </a:fld>
+            <a:endParaRPr lang="en-GB"/>
+          </a:p>
+        </p:txBody>
+      </p:sp>
+    </p:spTree>
+    <p:extLst>
+      <p:ext uri="{BB962C8B-B14F-4D97-AF65-F5344CB8AC3E}">
+        <p14:creationId xmlns:p14="http://schemas.microsoft.com/office/powerpoint/2010/main" val="3457395747"/>
+      </p:ext>
+    </p:extLst>
+  </p:cSld>
+  <p:clrMapOvr>
+    <a:masterClrMapping/>
+  </p:clrMapOvr>
+</p:sld>
+</file>
+
 <file path=ppt/slides/slide5.xml><?xml version="1.0" encoding="utf-8"?>
 <p:sld xmlns:a="http://schemas.openxmlformats.org/drawingml/2006/main" xmlns:r="http://schemas.openxmlformats.org/officeDocument/2006/relationships" xmlns:p="http://schemas.openxmlformats.org/presentationml/2006/main">
   <p:cSld>
@@ -41346,8 +44126,8 @@
           </a:p>
         </p:txBody>
       </p:sp>
-      <mc:AlternateContent xmlns:mc="http://schemas.openxmlformats.org/markup-compatibility/2006">
-        <mc:Choice xmlns:a14="http://schemas.microsoft.com/office/drawing/2010/main" Requires="a14">
+      <mc:AlternateContent xmlns:mc="http://schemas.openxmlformats.org/markup-compatibility/2006" xmlns:a14="http://schemas.microsoft.com/office/drawing/2010/main">
+        <mc:Choice Requires="a14">
           <p:sp>
             <p:nvSpPr>
               <p:cNvPr id="8" name="Textfeld 7">
@@ -41378,6 +44158,7 @@
               </a:bodyPr>
               <a:lstStyle/>
               <a:p>
+                <a:pPr/>
                 <a14:m>
                   <m:oMathPara xmlns:m="http://schemas.openxmlformats.org/officeDocument/2006/math">
                     <m:oMathParaPr>
@@ -41398,7 +44179,7 @@
             </p:txBody>
           </p:sp>
         </mc:Choice>
-        <mc:Fallback>
+        <mc:Fallback xmlns="">
           <p:sp>
             <p:nvSpPr>
               <p:cNvPr id="8" name="Textfeld 7">
